--- a/MedMap_Presentation.pptx
+++ b/MedMap_Presentation.pptx
@@ -4,6 +4,9 @@
   <p:sldMasterIdLst>
     <p:sldMasterId id="2147483648" r:id="rId1"/>
   </p:sldMasterIdLst>
+  <p:notesMasterIdLst>
+    <p:notesMasterId r:id="rId11"/>
+  </p:notesMasterIdLst>
   <p:sldIdLst>
     <p:sldId id="256" r:id="rId2"/>
     <p:sldId id="257" r:id="rId3"/>
@@ -15,10 +18,7 @@
     <p:sldId id="263" r:id="rId9"/>
     <p:sldId id="264" r:id="rId10"/>
   </p:sldIdLst>
-  <p:notesMasterIdLst>
-    <p:notesMasterId r:id="rId11"/>
-  </p:notesMasterIdLst>
-  <p:sldSz cx="9144000" cy="5143500"/>
+  <p:sldSz cx="9144000" cy="5143500" type="screen16x9"/>
   <p:notesSz cx="5143500" cy="9144000"/>
   <p:defaultTextStyle>
     <a:lvl1pPr marL="0" algn="l" defTabSz="914400" rtl="0" eaLnBrk="1" latinLnBrk="0" hangingPunct="1">
@@ -112,6 +112,11 @@
       </a:defRPr>
     </a:lvl9pPr>
   </p:defaultTextStyle>
+  <p:extLst>
+    <p:ext uri="{EFAFB233-063F-42B5-8137-9DF3F51BA10A}">
+      <p15:sldGuideLst xmlns:p15="http://schemas.microsoft.com/office/powerpoint/2012/main"/>
+    </p:ext>
+  </p:extLst>
 </p:presentation>
 </file>
 
@@ -137,234 +142,10 @@
           <a:chExt cx="0" cy="0"/>
         </a:xfrm>
       </p:grpSpPr>
-      <p:sp>
-        <p:nvSpPr>
-          <p:cNvPr id="2" name="Header Placeholder 1"/>
-          <p:cNvSpPr>
-            <a:spLocks noGrp="1"/>
-          </p:cNvSpPr>
-          <p:nvPr>
-            <p:ph type="hdr" sz="quarter"/>
-          </p:nvPr>
-        </p:nvSpPr>
-        <p:spPr>
-          <a:xfrm>
-            <a:off x="0" y="0"/>
-            <a:ext cx="2971800" cy="458788"/>
-          </a:xfrm>
-          <a:prstGeom prst="rect">
-            <a:avLst/>
-          </a:prstGeom>
-        </p:spPr>
-        <p:txBody>
-          <a:bodyPr vert="horz" lIns="91440" tIns="45720" rIns="91440" bIns="45720" rtlCol="0"/>
-          <a:lstStyle>
-            <a:lvl1pPr algn="l">
-              <a:defRPr sz="1200"/>
-            </a:lvl1pPr>
-          </a:lstStyle>
-          <a:p>
-            <a:endParaRPr lang="en-US"/>
-          </a:p>
-        </p:txBody>
-      </p:sp>
-      <p:sp>
-        <p:nvSpPr>
-          <p:cNvPr id="3" name="Date Placeholder 2"/>
-          <p:cNvSpPr>
-            <a:spLocks noGrp="1"/>
-          </p:cNvSpPr>
-          <p:nvPr>
-            <p:ph type="dt" idx="1"/>
-          </p:nvPr>
-        </p:nvSpPr>
-        <p:spPr>
-          <a:xfrm>
-            <a:off x="3884613" y="0"/>
-            <a:ext cx="2971800" cy="458788"/>
-          </a:xfrm>
-          <a:prstGeom prst="rect">
-            <a:avLst/>
-          </a:prstGeom>
-        </p:spPr>
-        <p:txBody>
-          <a:bodyPr vert="horz" lIns="91440" tIns="45720" rIns="91440" bIns="45720" rtlCol="0"/>
-          <a:lstStyle>
-            <a:lvl1pPr algn="r">
-              <a:defRPr sz="1200"/>
-            </a:lvl1pPr>
-          </a:lstStyle>
-          <a:p>
-            <a:fld id="{5282F153-3F37-0F45-9E97-73ACFA13230C}" type="datetimeFigureOut">
-              <a:rPr lang="en-US"/>
-              <a:t>7/23/19</a:t>
-            </a:fld>
-            <a:endParaRPr lang="en-US"/>
-          </a:p>
-        </p:txBody>
-      </p:sp>
-      <p:sp>
-        <p:nvSpPr>
-          <p:cNvPr id="4" name="Slide Image Placeholder 3"/>
-          <p:cNvSpPr>
-            <a:spLocks noGrp="1" noRot="1" noChangeAspect="1"/>
-          </p:cNvSpPr>
-          <p:nvPr>
-            <p:ph type="sldImg" idx="2"/>
-          </p:nvPr>
-        </p:nvSpPr>
-        <p:spPr>
-          <a:xfrm>
-            <a:off x="685800" y="1143000"/>
-            <a:ext cx="5486400" cy="3086100"/>
-          </a:xfrm>
-          <a:prstGeom prst="rect">
-            <a:avLst/>
-          </a:prstGeom>
-          <a:noFill/>
-          <a:ln w="12700">
-            <a:solidFill>
-              <a:prstClr val="black"/>
-            </a:solidFill>
-          </a:ln>
-        </p:spPr>
-        <p:txBody>
-          <a:bodyPr vert="horz" lIns="91440" tIns="45720" rIns="91440" bIns="45720" rtlCol="0" anchor="ctr"/>
-          <a:lstStyle/>
-          <a:p>
-            <a:endParaRPr lang="en-US"/>
-          </a:p>
-        </p:txBody>
-      </p:sp>
-      <p:sp>
-        <p:nvSpPr>
-          <p:cNvPr id="5" name="Notes Placeholder 4"/>
-          <p:cNvSpPr>
-            <a:spLocks noGrp="1"/>
-          </p:cNvSpPr>
-          <p:nvPr>
-            <p:ph type="body" sz="quarter" idx="3"/>
-          </p:nvPr>
-        </p:nvSpPr>
-        <p:spPr>
-          <a:xfrm>
-            <a:off x="685800" y="4400550"/>
-            <a:ext cx="5486400" cy="3600450"/>
-          </a:xfrm>
-          <a:prstGeom prst="rect">
-            <a:avLst/>
-          </a:prstGeom>
-        </p:spPr>
-        <p:txBody>
-          <a:bodyPr vert="horz" lIns="91440" tIns="45720" rIns="91440" bIns="45720" rtlCol="0"/>
-          <a:lstStyle/>
-          <a:p>
-            <a:pPr lvl="0"/>
-            <a:r>
-              <a:rPr lang="en-US"/>
-              <a:t>Click to edit Master text styles</a:t>
-            </a:r>
-          </a:p>
-          <a:p>
-            <a:pPr lvl="1"/>
-            <a:r>
-              <a:rPr lang="en-US"/>
-              <a:t>Second level</a:t>
-            </a:r>
-          </a:p>
-          <a:p>
-            <a:pPr lvl="2"/>
-            <a:r>
-              <a:rPr lang="en-US"/>
-              <a:t>Third level</a:t>
-            </a:r>
-          </a:p>
-          <a:p>
-            <a:pPr lvl="3"/>
-            <a:r>
-              <a:rPr lang="en-US"/>
-              <a:t>Fourth level</a:t>
-            </a:r>
-          </a:p>
-          <a:p>
-            <a:pPr lvl="4"/>
-            <a:r>
-              <a:rPr lang="en-US"/>
-              <a:t>Fifth level</a:t>
-            </a:r>
-          </a:p>
-        </p:txBody>
-      </p:sp>
-      <p:sp>
-        <p:nvSpPr>
-          <p:cNvPr id="6" name="Footer Placeholder 5"/>
-          <p:cNvSpPr>
-            <a:spLocks noGrp="1"/>
-          </p:cNvSpPr>
-          <p:nvPr>
-            <p:ph type="ftr" sz="quarter" idx="4"/>
-          </p:nvPr>
-        </p:nvSpPr>
-        <p:spPr>
-          <a:xfrm>
-            <a:off x="0" y="8685213"/>
-            <a:ext cx="2971800" cy="458787"/>
-          </a:xfrm>
-          <a:prstGeom prst="rect">
-            <a:avLst/>
-          </a:prstGeom>
-        </p:spPr>
-        <p:txBody>
-          <a:bodyPr vert="horz" lIns="91440" tIns="45720" rIns="91440" bIns="45720" rtlCol="0" anchor="b"/>
-          <a:lstStyle>
-            <a:lvl1pPr algn="l">
-              <a:defRPr sz="1200"/>
-            </a:lvl1pPr>
-          </a:lstStyle>
-          <a:p>
-            <a:endParaRPr lang="en-US"/>
-          </a:p>
-        </p:txBody>
-      </p:sp>
-      <p:sp>
-        <p:nvSpPr>
-          <p:cNvPr id="7" name="Slide Number Placeholder 6"/>
-          <p:cNvSpPr>
-            <a:spLocks noGrp="1"/>
-          </p:cNvSpPr>
-          <p:nvPr>
-            <p:ph type="sldNum" sz="quarter" idx="5"/>
-          </p:nvPr>
-        </p:nvSpPr>
-        <p:spPr>
-          <a:xfrm>
-            <a:off x="3884613" y="8685213"/>
-            <a:ext cx="2971800" cy="458787"/>
-          </a:xfrm>
-          <a:prstGeom prst="rect">
-            <a:avLst/>
-          </a:prstGeom>
-        </p:spPr>
-        <p:txBody>
-          <a:bodyPr vert="horz" lIns="91440" tIns="45720" rIns="91440" bIns="45720" rtlCol="0" anchor="b"/>
-          <a:lstStyle>
-            <a:lvl1pPr algn="r">
-              <a:defRPr sz="1200"/>
-            </a:lvl1pPr>
-          </a:lstStyle>
-          <a:p>
-            <a:fld id="{CE5E9CC1-C706-0F49-92D6-E571CC5EEA8F}" type="slidenum">
-              <a:rPr lang="en-US"/>
-              <a:t>‹#›</a:t>
-            </a:fld>
-            <a:endParaRPr lang="en-US"/>
-          </a:p>
-        </p:txBody>
-      </p:sp>
     </p:spTree>
     <p:extLst>
       <p:ext uri="{BB962C8B-B14F-4D97-AF65-F5344CB8AC3E}">
-        <p14:creationId xmlns:p14="http://schemas.microsoft.com/office/powerpoint/2010/main" val="1024086991"/>
+        <p14:creationId xmlns:p14="http://schemas.microsoft.com/office/powerpoint/2010/main" val="1768835915"/>
       </p:ext>
     </p:extLst>
   </p:cSld>
@@ -508,10 +289,6 @@
           <a:bodyPr/>
           <a:lstStyle/>
           <a:p>
-            <a:r>
-              <a:rPr lang="en-US" dirty="0"/>
-              <a:t/>
-            </a:r>
             <a:endParaRPr lang="en-US" dirty="0"/>
           </a:p>
         </p:txBody>
@@ -596,10 +373,6 @@
           <a:bodyPr/>
           <a:lstStyle/>
           <a:p>
-            <a:r>
-              <a:rPr lang="en-US" dirty="0"/>
-              <a:t/>
-            </a:r>
             <a:endParaRPr lang="en-US" dirty="0"/>
           </a:p>
         </p:txBody>
@@ -684,10 +457,6 @@
           <a:bodyPr/>
           <a:lstStyle/>
           <a:p>
-            <a:r>
-              <a:rPr lang="en-US" dirty="0"/>
-              <a:t/>
-            </a:r>
             <a:endParaRPr lang="en-US" dirty="0"/>
           </a:p>
         </p:txBody>
@@ -772,10 +541,6 @@
           <a:bodyPr/>
           <a:lstStyle/>
           <a:p>
-            <a:r>
-              <a:rPr lang="en-US" dirty="0"/>
-              <a:t/>
-            </a:r>
             <a:endParaRPr lang="en-US" dirty="0"/>
           </a:p>
         </p:txBody>
@@ -860,10 +625,6 @@
           <a:bodyPr/>
           <a:lstStyle/>
           <a:p>
-            <a:r>
-              <a:rPr lang="en-US" dirty="0"/>
-              <a:t/>
-            </a:r>
             <a:endParaRPr lang="en-US" dirty="0"/>
           </a:p>
         </p:txBody>
@@ -948,10 +709,6 @@
           <a:bodyPr/>
           <a:lstStyle/>
           <a:p>
-            <a:r>
-              <a:rPr lang="en-US" dirty="0"/>
-              <a:t/>
-            </a:r>
             <a:endParaRPr lang="en-US" dirty="0"/>
           </a:p>
         </p:txBody>
@@ -1036,10 +793,6 @@
           <a:bodyPr/>
           <a:lstStyle/>
           <a:p>
-            <a:r>
-              <a:rPr lang="en-US" dirty="0"/>
-              <a:t/>
-            </a:r>
             <a:endParaRPr lang="en-US" dirty="0"/>
           </a:p>
         </p:txBody>
@@ -1124,10 +877,6 @@
           <a:bodyPr/>
           <a:lstStyle/>
           <a:p>
-            <a:r>
-              <a:rPr lang="en-US" dirty="0"/>
-              <a:t/>
-            </a:r>
             <a:endParaRPr lang="en-US" dirty="0"/>
           </a:p>
         </p:txBody>
@@ -1212,10 +961,6 @@
           <a:bodyPr/>
           <a:lstStyle/>
           <a:p>
-            <a:r>
-              <a:rPr lang="en-US" dirty="0"/>
-              <a:t/>
-            </a:r>
             <a:endParaRPr lang="en-US" dirty="0"/>
           </a:p>
         </p:txBody>
@@ -1289,6 +1034,11 @@
 <file path=ppt/slideMasters/slideMaster1.xml><?xml version="1.0" encoding="utf-8"?>
 <p:sldMaster xmlns:a="http://schemas.openxmlformats.org/drawingml/2006/main" xmlns:r="http://schemas.openxmlformats.org/officeDocument/2006/relationships" xmlns:p="http://schemas.openxmlformats.org/presentationml/2006/main">
   <p:cSld>
+    <p:bg>
+      <p:bgRef idx="1001">
+        <a:schemeClr val="bg1"/>
+      </p:bgRef>
+    </p:bg>
     <p:spTree>
       <p:nvGrpSpPr>
         <p:cNvPr id="1" name=""/>
@@ -1571,6 +1321,7 @@
         <a:solidFill>
           <a:srgbClr val="0B1929"/>
         </a:solidFill>
+        <a:effectLst/>
       </p:bgPr>
     </p:bg>
     <p:spTree>
@@ -1606,17 +1357,24 @@
           </a:solidFill>
           <a:ln/>
         </p:spPr>
+        <p:txBody>
+          <a:bodyPr/>
+          <a:lstStyle/>
+          <a:p>
+            <a:endParaRPr lang="en-US"/>
+          </a:p>
+        </p:txBody>
       </p:sp>
       <p:pic>
         <p:nvPicPr>
-          <p:cNvPr id="3" name="Image 0" descr="preencoded.png">    </p:cNvPr>
+          <p:cNvPr id="3" name="Image 0" descr="preencoded.png"/>
           <p:cNvPicPr>
             <a:picLocks noChangeAspect="1"/>
           </p:cNvPicPr>
           <p:nvPr/>
         </p:nvPicPr>
         <p:blipFill>
-          <a:blip r:embed="rId1"/>
+          <a:blip r:embed="rId3"/>
           <a:stretch>
             <a:fillRect/>
           </a:stretch>
@@ -1652,11 +1410,11 @@
           <a:bodyPr wrap="square" lIns="0" tIns="0" rIns="0" bIns="0" rtlCol="0" anchor="ctr"/>
           <a:lstStyle/>
           <a:p>
-            <a:pPr algn="ctr" indent="0" marL="0">
-              <a:buNone/>
-            </a:pPr>
-            <a:r>
-              <a:rPr lang="en-US" sz="5200" b="1" spc="400" kern="0" dirty="0">
+            <a:pPr marL="0" indent="0" algn="ctr">
+              <a:buNone/>
+            </a:pPr>
+            <a:r>
+              <a:rPr lang="en-US" sz="5200" b="1" kern="0" spc="400" dirty="0">
                 <a:solidFill>
                   <a:srgbClr val="FFFFFF"/>
                 </a:solidFill>
@@ -1691,7 +1449,7 @@
           <a:bodyPr wrap="square" lIns="0" tIns="0" rIns="0" bIns="0" rtlCol="0" anchor="ctr"/>
           <a:lstStyle/>
           <a:p>
-            <a:pPr algn="ctr" indent="0" marL="0">
+            <a:pPr marL="0" indent="0" algn="ctr">
               <a:buNone/>
             </a:pPr>
             <a:r>
@@ -1730,7 +1488,7 @@
           <a:bodyPr wrap="square" lIns="0" tIns="0" rIns="0" bIns="0" rtlCol="0" anchor="ctr"/>
           <a:lstStyle/>
           <a:p>
-            <a:pPr algn="ctr" indent="0" marL="0">
+            <a:pPr marL="0" indent="0" algn="ctr">
               <a:buNone/>
             </a:pPr>
             <a:r>
@@ -1767,6 +1525,13 @@
           </a:solidFill>
           <a:ln/>
         </p:spPr>
+        <p:txBody>
+          <a:bodyPr/>
+          <a:lstStyle/>
+          <a:p>
+            <a:endParaRPr lang="en-US"/>
+          </a:p>
+        </p:txBody>
       </p:sp>
       <p:sp>
         <p:nvSpPr>
@@ -1789,7 +1554,7 @@
           <a:bodyPr wrap="square" lIns="0" tIns="0" rIns="0" bIns="0" rtlCol="0" anchor="ctr"/>
           <a:lstStyle/>
           <a:p>
-            <a:pPr algn="ctr" indent="0" marL="0">
+            <a:pPr marL="0" indent="0" algn="ctr">
               <a:buNone/>
             </a:pPr>
             <a:r>
@@ -1823,6 +1588,7 @@
         <a:solidFill>
           <a:srgbClr val="0B1929"/>
         </a:solidFill>
+        <a:effectLst/>
       </p:bgPr>
     </p:bg>
     <p:spTree>
@@ -1858,6 +1624,13 @@
           </a:solidFill>
           <a:ln/>
         </p:spPr>
+        <p:txBody>
+          <a:bodyPr/>
+          <a:lstStyle/>
+          <a:p>
+            <a:endParaRPr lang="en-US"/>
+          </a:p>
+        </p:txBody>
       </p:sp>
       <p:sp>
         <p:nvSpPr>
@@ -1880,7 +1653,7 @@
           <a:bodyPr wrap="square" lIns="0" tIns="0" rIns="0" bIns="0" rtlCol="0" anchor="ctr"/>
           <a:lstStyle/>
           <a:p>
-            <a:pPr indent="0" marL="0">
+            <a:pPr marL="0" indent="0">
               <a:buNone/>
             </a:pPr>
             <a:r>
@@ -1917,13 +1690,20 @@
           </a:solidFill>
           <a:ln/>
           <a:effectLst>
-            <a:outerShdw sx="100000" sy="100000" kx="0" ky="0" algn="bl" rotWithShape="0" blurRad="101600" dist="38100" dir="8100000">
+            <a:outerShdw blurRad="101600" dist="38100" dir="8100000" algn="bl" rotWithShape="0">
               <a:srgbClr val="000000">
                 <a:alpha val="25000"/>
               </a:srgbClr>
             </a:outerShdw>
           </a:effectLst>
         </p:spPr>
+        <p:txBody>
+          <a:bodyPr/>
+          <a:lstStyle/>
+          <a:p>
+            <a:endParaRPr lang="en-US"/>
+          </a:p>
+        </p:txBody>
       </p:sp>
       <p:sp>
         <p:nvSpPr>
@@ -1946,7 +1726,7 @@
           <a:bodyPr wrap="square" lIns="0" tIns="0" rIns="0" bIns="0" rtlCol="0" anchor="ctr"/>
           <a:lstStyle/>
           <a:p>
-            <a:pPr indent="0" marL="0">
+            <a:pPr marL="0" indent="0">
               <a:buNone/>
             </a:pPr>
             <a:r>
@@ -1963,7 +1743,7 @@
             <a:endParaRPr lang="en-US" sz="3000" dirty="0"/>
           </a:p>
           <a:p>
-            <a:pPr indent="0" marL="0">
+            <a:pPr marL="0" indent="0">
               <a:buNone/>
             </a:pPr>
             <a:r>
@@ -1980,7 +1760,7 @@
             <a:endParaRPr lang="en-US" sz="3000" dirty="0"/>
           </a:p>
           <a:p>
-            <a:pPr indent="0" marL="0">
+            <a:pPr marL="0" indent="0">
               <a:buNone/>
             </a:pPr>
             <a:r>
@@ -1994,7 +1774,7 @@
             <a:endParaRPr lang="en-US" sz="3000" dirty="0"/>
           </a:p>
           <a:p>
-            <a:pPr indent="0" marL="0">
+            <a:pPr marL="0" indent="0">
               <a:buNone/>
             </a:pPr>
             <a:r>
@@ -2011,7 +1791,7 @@
             <a:endParaRPr lang="en-US" sz="3000" dirty="0"/>
           </a:p>
           <a:p>
-            <a:pPr indent="0" marL="0">
+            <a:pPr marL="0" indent="0">
               <a:buNone/>
             </a:pPr>
             <a:r>
@@ -2048,275 +1828,24 @@
           </a:solidFill>
           <a:ln/>
           <a:effectLst>
-            <a:outerShdw sx="100000" sy="100000" kx="0" ky="0" algn="bl" rotWithShape="0" blurRad="101600" dist="38100" dir="8100000">
+            <a:outerShdw blurRad="101600" dist="38100" dir="8100000" algn="bl" rotWithShape="0">
               <a:srgbClr val="000000">
                 <a:alpha val="25000"/>
               </a:srgbClr>
             </a:outerShdw>
           </a:effectLst>
         </p:spPr>
+        <p:txBody>
+          <a:bodyPr/>
+          <a:lstStyle/>
+          <a:p>
+            <a:endParaRPr lang="en-US"/>
+          </a:p>
+        </p:txBody>
       </p:sp>
       <p:pic>
         <p:nvPicPr>
-          <p:cNvPr id="7" name="Image 0" descr="preencoded.png">    </p:cNvPr>
-          <p:cNvPicPr>
-            <a:picLocks noChangeAspect="1"/>
-          </p:cNvPicPr>
-          <p:nvPr/>
-        </p:nvPicPr>
-        <p:blipFill>
-          <a:blip r:embed="rId1"/>
-          <a:stretch>
-            <a:fillRect/>
-          </a:stretch>
-        </p:blipFill>
-        <p:spPr>
-          <a:xfrm>
-            <a:off x="4937760" y="1161288"/>
-            <a:ext cx="347472" cy="347472"/>
-          </a:xfrm>
-          <a:prstGeom prst="rect">
-            <a:avLst/>
-          </a:prstGeom>
-        </p:spPr>
-      </p:pic>
-      <p:sp>
-        <p:nvSpPr>
-          <p:cNvPr id="8" name="Text 5"/>
-          <p:cNvSpPr/>
-          <p:nvPr/>
-        </p:nvSpPr>
-        <p:spPr>
-          <a:xfrm>
-            <a:off x="5440680" y="1078992"/>
-            <a:ext cx="3017520" cy="274320"/>
-          </a:xfrm>
-          <a:prstGeom prst="rect">
-            <a:avLst/>
-          </a:prstGeom>
-          <a:noFill/>
-          <a:ln/>
-        </p:spPr>
-        <p:txBody>
-          <a:bodyPr wrap="square" lIns="0" tIns="0" rIns="0" bIns="0" rtlCol="0" anchor="ctr"/>
-          <a:lstStyle/>
-          <a:p>
-            <a:pPr indent="0" marL="0">
-              <a:buNone/>
-            </a:pPr>
-            <a:r>
-              <a:rPr lang="en-US" sz="1300" b="1" dirty="0">
-                <a:solidFill>
-                  <a:srgbClr val="FFFFFF"/>
-                </a:solidFill>
-                <a:latin typeface="Trebuchet MS" pitchFamily="34" charset="0"/>
-                <a:ea typeface="Trebuchet MS" pitchFamily="34" charset="-122"/>
-                <a:cs typeface="Trebuchet MS" pitchFamily="34" charset="-120"/>
-              </a:rPr>
-              <a:t>7+ data sources</a:t>
-            </a:r>
-            <a:endParaRPr lang="en-US" sz="1300" dirty="0"/>
-          </a:p>
-        </p:txBody>
-      </p:sp>
-      <p:sp>
-        <p:nvSpPr>
-          <p:cNvPr id="9" name="Text 6"/>
-          <p:cNvSpPr/>
-          <p:nvPr/>
-        </p:nvSpPr>
-        <p:spPr>
-          <a:xfrm>
-            <a:off x="5440680" y="1325880"/>
-            <a:ext cx="3017520" cy="256032"/>
-          </a:xfrm>
-          <a:prstGeom prst="rect">
-            <a:avLst/>
-          </a:prstGeom>
-          <a:noFill/>
-          <a:ln/>
-        </p:spPr>
-        <p:txBody>
-          <a:bodyPr wrap="square" lIns="0" tIns="0" rIns="0" bIns="0" rtlCol="0" anchor="ctr"/>
-          <a:lstStyle/>
-          <a:p>
-            <a:pPr indent="0" marL="0">
-              <a:buNone/>
-            </a:pPr>
-            <a:r>
-              <a:rPr lang="en-US" sz="1000" dirty="0">
-                <a:solidFill>
-                  <a:srgbClr val="8A9BB0"/>
-                </a:solidFill>
-                <a:latin typeface="Calibri" pitchFamily="34" charset="0"/>
-                <a:ea typeface="Calibri" pitchFamily="34" charset="-122"/>
-                <a:cs typeface="Calibri" pitchFamily="34" charset="-120"/>
-              </a:rPr>
-              <a:t>Labs, devices, meds, nursing notes, EPA, ICD-10...</a:t>
-            </a:r>
-            <a:endParaRPr lang="en-US" sz="1000" dirty="0"/>
-          </a:p>
-        </p:txBody>
-      </p:sp>
-      <p:sp>
-        <p:nvSpPr>
-          <p:cNvPr id="10" name="Shape 7"/>
-          <p:cNvSpPr/>
-          <p:nvPr/>
-        </p:nvSpPr>
-        <p:spPr>
-          <a:xfrm>
-            <a:off x="4754880" y="1719072"/>
-            <a:ext cx="3931920" cy="576072"/>
-          </a:xfrm>
-          <a:prstGeom prst="rect">
-            <a:avLst/>
-          </a:prstGeom>
-          <a:solidFill>
-            <a:srgbClr val="132B42"/>
-          </a:solidFill>
-          <a:ln/>
-          <a:effectLst>
-            <a:outerShdw sx="100000" sy="100000" kx="0" ky="0" algn="bl" rotWithShape="0" blurRad="101600" dist="38100" dir="8100000">
-              <a:srgbClr val="000000">
-                <a:alpha val="25000"/>
-              </a:srgbClr>
-            </a:outerShdw>
-          </a:effectLst>
-        </p:spPr>
-      </p:sp>
-      <p:pic>
-        <p:nvPicPr>
-          <p:cNvPr id="11" name="Image 1" descr="preencoded.png">    </p:cNvPr>
-          <p:cNvPicPr>
-            <a:picLocks noChangeAspect="1"/>
-          </p:cNvPicPr>
-          <p:nvPr/>
-        </p:nvPicPr>
-        <p:blipFill>
-          <a:blip r:embed="rId2"/>
-          <a:stretch>
-            <a:fillRect/>
-          </a:stretch>
-        </p:blipFill>
-        <p:spPr>
-          <a:xfrm>
-            <a:off x="4937760" y="1828800"/>
-            <a:ext cx="347472" cy="347472"/>
-          </a:xfrm>
-          <a:prstGeom prst="rect">
-            <a:avLst/>
-          </a:prstGeom>
-        </p:spPr>
-      </p:pic>
-      <p:sp>
-        <p:nvSpPr>
-          <p:cNvPr id="12" name="Text 8"/>
-          <p:cNvSpPr/>
-          <p:nvPr/>
-        </p:nvSpPr>
-        <p:spPr>
-          <a:xfrm>
-            <a:off x="5440680" y="1746504"/>
-            <a:ext cx="3017520" cy="274320"/>
-          </a:xfrm>
-          <a:prstGeom prst="rect">
-            <a:avLst/>
-          </a:prstGeom>
-          <a:noFill/>
-          <a:ln/>
-        </p:spPr>
-        <p:txBody>
-          <a:bodyPr wrap="square" lIns="0" tIns="0" rIns="0" bIns="0" rtlCol="0" anchor="ctr"/>
-          <a:lstStyle/>
-          <a:p>
-            <a:pPr indent="0" marL="0">
-              <a:buNone/>
-            </a:pPr>
-            <a:r>
-              <a:rPr lang="en-US" sz="1300" b="1" dirty="0">
-                <a:solidFill>
-                  <a:srgbClr val="FFFFFF"/>
-                </a:solidFill>
-                <a:latin typeface="Trebuchet MS" pitchFamily="34" charset="0"/>
-                <a:ea typeface="Trebuchet MS" pitchFamily="34" charset="-122"/>
-                <a:cs typeface="Trebuchet MS" pitchFamily="34" charset="-120"/>
-              </a:rPr>
-              <a:t>Inconsistent schemas</a:t>
-            </a:r>
-            <a:endParaRPr lang="en-US" sz="1300" dirty="0"/>
-          </a:p>
-        </p:txBody>
-      </p:sp>
-      <p:sp>
-        <p:nvSpPr>
-          <p:cNvPr id="13" name="Text 9"/>
-          <p:cNvSpPr/>
-          <p:nvPr/>
-        </p:nvSpPr>
-        <p:spPr>
-          <a:xfrm>
-            <a:off x="5440680" y="1993392"/>
-            <a:ext cx="3017520" cy="256032"/>
-          </a:xfrm>
-          <a:prstGeom prst="rect">
-            <a:avLst/>
-          </a:prstGeom>
-          <a:noFill/>
-          <a:ln/>
-        </p:spPr>
-        <p:txBody>
-          <a:bodyPr wrap="square" lIns="0" tIns="0" rIns="0" bIns="0" rtlCol="0" anchor="ctr"/>
-          <a:lstStyle/>
-          <a:p>
-            <a:pPr indent="0" marL="0">
-              <a:buNone/>
-            </a:pPr>
-            <a:r>
-              <a:rPr lang="en-US" sz="1000" dirty="0">
-                <a:solidFill>
-                  <a:srgbClr val="8A9BB0"/>
-                </a:solidFill>
-                <a:latin typeface="Calibri" pitchFamily="34" charset="0"/>
-                <a:ea typeface="Calibri" pitchFamily="34" charset="-122"/>
-                <a:cs typeface="Calibri" pitchFamily="34" charset="-120"/>
-              </a:rPr>
-              <a:t>PatID vs patient_id vs pid — same field, different names</a:t>
-            </a:r>
-            <a:endParaRPr lang="en-US" sz="1000" dirty="0"/>
-          </a:p>
-        </p:txBody>
-      </p:sp>
-      <p:sp>
-        <p:nvSpPr>
-          <p:cNvPr id="14" name="Shape 10"/>
-          <p:cNvSpPr/>
-          <p:nvPr/>
-        </p:nvSpPr>
-        <p:spPr>
-          <a:xfrm>
-            <a:off x="4754880" y="2386584"/>
-            <a:ext cx="3931920" cy="576072"/>
-          </a:xfrm>
-          <a:prstGeom prst="rect">
-            <a:avLst/>
-          </a:prstGeom>
-          <a:solidFill>
-            <a:srgbClr val="132B42"/>
-          </a:solidFill>
-          <a:ln/>
-          <a:effectLst>
-            <a:outerShdw sx="100000" sy="100000" kx="0" ky="0" algn="bl" rotWithShape="0" blurRad="101600" dist="38100" dir="8100000">
-              <a:srgbClr val="000000">
-                <a:alpha val="25000"/>
-              </a:srgbClr>
-            </a:outerShdw>
-          </a:effectLst>
-        </p:spPr>
-      </p:sp>
-      <p:pic>
-        <p:nvPicPr>
-          <p:cNvPr id="15" name="Image 2" descr="preencoded.png">    </p:cNvPr>
+          <p:cNvPr id="7" name="Image 0" descr="preencoded.png"/>
           <p:cNvPicPr>
             <a:picLocks noChangeAspect="1"/>
           </p:cNvPicPr>
@@ -2330,7 +1859,7 @@
         </p:blipFill>
         <p:spPr>
           <a:xfrm>
-            <a:off x="4937760" y="2496312"/>
+            <a:off x="4937760" y="1161288"/>
             <a:ext cx="347472" cy="347472"/>
           </a:xfrm>
           <a:prstGeom prst="rect">
@@ -2340,13 +1869,13 @@
       </p:pic>
       <p:sp>
         <p:nvSpPr>
-          <p:cNvPr id="16" name="Text 11"/>
-          <p:cNvSpPr/>
-          <p:nvPr/>
-        </p:nvSpPr>
-        <p:spPr>
-          <a:xfrm>
-            <a:off x="5440680" y="2414016"/>
+          <p:cNvPr id="8" name="Text 5"/>
+          <p:cNvSpPr/>
+          <p:nvPr/>
+        </p:nvSpPr>
+        <p:spPr>
+          <a:xfrm>
+            <a:off x="5440680" y="1078992"/>
             <a:ext cx="3017520" cy="274320"/>
           </a:xfrm>
           <a:prstGeom prst="rect">
@@ -2359,7 +1888,7 @@
           <a:bodyPr wrap="square" lIns="0" tIns="0" rIns="0" bIns="0" rtlCol="0" anchor="ctr"/>
           <a:lstStyle/>
           <a:p>
-            <a:pPr indent="0" marL="0">
+            <a:pPr marL="0" indent="0">
               <a:buNone/>
             </a:pPr>
             <a:r>
@@ -2371,7 +1900,7 @@
                 <a:ea typeface="Trebuchet MS" pitchFamily="34" charset="-122"/>
                 <a:cs typeface="Trebuchet MS" pitchFamily="34" charset="-120"/>
               </a:rPr>
-              <a:t>Manual &amp; error-prone</a:t>
+              <a:t>7+ data sources</a:t>
             </a:r>
             <a:endParaRPr lang="en-US" sz="1300" dirty="0"/>
           </a:p>
@@ -2379,13 +1908,13 @@
       </p:sp>
       <p:sp>
         <p:nvSpPr>
-          <p:cNvPr id="17" name="Text 12"/>
-          <p:cNvSpPr/>
-          <p:nvPr/>
-        </p:nvSpPr>
-        <p:spPr>
-          <a:xfrm>
-            <a:off x="5440680" y="2660904"/>
+          <p:cNvPr id="9" name="Text 6"/>
+          <p:cNvSpPr/>
+          <p:nvPr/>
+        </p:nvSpPr>
+        <p:spPr>
+          <a:xfrm>
+            <a:off x="5440680" y="1325880"/>
             <a:ext cx="3017520" cy="256032"/>
           </a:xfrm>
           <a:prstGeom prst="rect">
@@ -2398,7 +1927,7 @@
           <a:bodyPr wrap="square" lIns="0" tIns="0" rIns="0" bIns="0" rtlCol="0" anchor="ctr"/>
           <a:lstStyle/>
           <a:p>
-            <a:pPr indent="0" marL="0">
+            <a:pPr marL="0" indent="0">
               <a:buNone/>
             </a:pPr>
             <a:r>
@@ -2410,7 +1939,7 @@
                 <a:ea typeface="Calibri" pitchFamily="34" charset="-122"/>
                 <a:cs typeface="Calibri" pitchFamily="34" charset="-120"/>
               </a:rPr>
-              <a:t>NULL, Missing, N/A, unknow — all mean the same thing</a:t>
+              <a:t>Labs, devices, meds, nursing notes, EPA, ICD-10...</a:t>
             </a:r>
             <a:endParaRPr lang="en-US" sz="1000" dirty="0"/>
           </a:p>
@@ -2418,14 +1947,14 @@
       </p:sp>
       <p:sp>
         <p:nvSpPr>
-          <p:cNvPr id="18" name="Shape 13"/>
-          <p:cNvSpPr/>
-          <p:nvPr/>
-        </p:nvSpPr>
-        <p:spPr>
-          <a:xfrm>
-            <a:off x="548640" y="3337560"/>
-            <a:ext cx="8046720" cy="640080"/>
+          <p:cNvPr id="10" name="Shape 7"/>
+          <p:cNvSpPr/>
+          <p:nvPr/>
+        </p:nvSpPr>
+        <p:spPr>
+          <a:xfrm>
+            <a:off x="4754880" y="1719072"/>
+            <a:ext cx="3931920" cy="576072"/>
           </a:xfrm>
           <a:prstGeom prst="rect">
             <a:avLst/>
@@ -2434,34 +1963,111 @@
             <a:srgbClr val="132B42"/>
           </a:solidFill>
           <a:ln/>
-        </p:spPr>
-      </p:sp>
-      <p:sp>
-        <p:nvSpPr>
-          <p:cNvPr id="19" name="Text 14"/>
-          <p:cNvSpPr/>
-          <p:nvPr/>
-        </p:nvSpPr>
-        <p:spPr>
-          <a:xfrm>
-            <a:off x="822960" y="3383280"/>
-            <a:ext cx="7498080" cy="548640"/>
-          </a:xfrm>
-          <a:prstGeom prst="rect">
-            <a:avLst/>
-          </a:prstGeom>
-          <a:noFill/>
-          <a:ln/>
-        </p:spPr>
-        <p:txBody>
-          <a:bodyPr wrap="square" lIns="0" tIns="0" rIns="0" bIns="0" rtlCol="0" anchor="ctr"/>
-          <a:lstStyle/>
-          <a:p>
-            <a:pPr indent="0" marL="0">
-              <a:buNone/>
-            </a:pPr>
-            <a:r>
-              <a:rPr lang="en-US" sz="1100" i="1" dirty="0">
+          <a:effectLst>
+            <a:outerShdw blurRad="101600" dist="38100" dir="8100000" algn="bl" rotWithShape="0">
+              <a:srgbClr val="000000">
+                <a:alpha val="25000"/>
+              </a:srgbClr>
+            </a:outerShdw>
+          </a:effectLst>
+        </p:spPr>
+        <p:txBody>
+          <a:bodyPr/>
+          <a:lstStyle/>
+          <a:p>
+            <a:endParaRPr lang="en-US"/>
+          </a:p>
+        </p:txBody>
+      </p:sp>
+      <p:pic>
+        <p:nvPicPr>
+          <p:cNvPr id="11" name="Image 1" descr="preencoded.png"/>
+          <p:cNvPicPr>
+            <a:picLocks noChangeAspect="1"/>
+          </p:cNvPicPr>
+          <p:nvPr/>
+        </p:nvPicPr>
+        <p:blipFill>
+          <a:blip r:embed="rId3"/>
+          <a:stretch>
+            <a:fillRect/>
+          </a:stretch>
+        </p:blipFill>
+        <p:spPr>
+          <a:xfrm>
+            <a:off x="4937760" y="1828800"/>
+            <a:ext cx="347472" cy="347472"/>
+          </a:xfrm>
+          <a:prstGeom prst="rect">
+            <a:avLst/>
+          </a:prstGeom>
+        </p:spPr>
+      </p:pic>
+      <p:sp>
+        <p:nvSpPr>
+          <p:cNvPr id="12" name="Text 8"/>
+          <p:cNvSpPr/>
+          <p:nvPr/>
+        </p:nvSpPr>
+        <p:spPr>
+          <a:xfrm>
+            <a:off x="5440680" y="1746504"/>
+            <a:ext cx="3017520" cy="274320"/>
+          </a:xfrm>
+          <a:prstGeom prst="rect">
+            <a:avLst/>
+          </a:prstGeom>
+          <a:noFill/>
+          <a:ln/>
+        </p:spPr>
+        <p:txBody>
+          <a:bodyPr wrap="square" lIns="0" tIns="0" rIns="0" bIns="0" rtlCol="0" anchor="ctr"/>
+          <a:lstStyle/>
+          <a:p>
+            <a:pPr marL="0" indent="0">
+              <a:buNone/>
+            </a:pPr>
+            <a:r>
+              <a:rPr lang="en-US" sz="1300" b="1" dirty="0">
+                <a:solidFill>
+                  <a:srgbClr val="FFFFFF"/>
+                </a:solidFill>
+                <a:latin typeface="Trebuchet MS" pitchFamily="34" charset="0"/>
+                <a:ea typeface="Trebuchet MS" pitchFamily="34" charset="-122"/>
+                <a:cs typeface="Trebuchet MS" pitchFamily="34" charset="-120"/>
+              </a:rPr>
+              <a:t>Inconsistent schemas</a:t>
+            </a:r>
+            <a:endParaRPr lang="en-US" sz="1300" dirty="0"/>
+          </a:p>
+        </p:txBody>
+      </p:sp>
+      <p:sp>
+        <p:nvSpPr>
+          <p:cNvPr id="13" name="Text 9"/>
+          <p:cNvSpPr/>
+          <p:nvPr/>
+        </p:nvSpPr>
+        <p:spPr>
+          <a:xfrm>
+            <a:off x="5440680" y="1993392"/>
+            <a:ext cx="3017520" cy="256032"/>
+          </a:xfrm>
+          <a:prstGeom prst="rect">
+            <a:avLst/>
+          </a:prstGeom>
+          <a:noFill/>
+          <a:ln/>
+        </p:spPr>
+        <p:txBody>
+          <a:bodyPr wrap="square" lIns="0" tIns="0" rIns="0" bIns="0" rtlCol="0" anchor="ctr"/>
+          <a:lstStyle/>
+          <a:p>
+            <a:pPr marL="0" indent="0">
+              <a:buNone/>
+            </a:pPr>
+            <a:r>
+              <a:rPr lang="en-US" sz="1000" dirty="0">
                 <a:solidFill>
                   <a:srgbClr val="8A9BB0"/>
                 </a:solidFill>
@@ -2469,7 +2075,220 @@
                 <a:ea typeface="Calibri" pitchFamily="34" charset="-122"/>
                 <a:cs typeface="Calibri" pitchFamily="34" charset="-120"/>
               </a:rPr>
-              <a:t>"Current harmonization requires numerous manual steps, leading to inefficiency and limited scalability."  — EPA Challenge Brief</a:t>
+              <a:t>PatID vs patient_id vs pid — same field, different names</a:t>
+            </a:r>
+            <a:endParaRPr lang="en-US" sz="1000" dirty="0"/>
+          </a:p>
+        </p:txBody>
+      </p:sp>
+      <p:sp>
+        <p:nvSpPr>
+          <p:cNvPr id="14" name="Shape 10"/>
+          <p:cNvSpPr/>
+          <p:nvPr/>
+        </p:nvSpPr>
+        <p:spPr>
+          <a:xfrm>
+            <a:off x="4754880" y="2386584"/>
+            <a:ext cx="3931920" cy="576072"/>
+          </a:xfrm>
+          <a:prstGeom prst="rect">
+            <a:avLst/>
+          </a:prstGeom>
+          <a:solidFill>
+            <a:srgbClr val="132B42"/>
+          </a:solidFill>
+          <a:ln/>
+          <a:effectLst>
+            <a:outerShdw blurRad="101600" dist="38100" dir="8100000" algn="bl" rotWithShape="0">
+              <a:srgbClr val="000000">
+                <a:alpha val="25000"/>
+              </a:srgbClr>
+            </a:outerShdw>
+          </a:effectLst>
+        </p:spPr>
+        <p:txBody>
+          <a:bodyPr/>
+          <a:lstStyle/>
+          <a:p>
+            <a:endParaRPr lang="en-US"/>
+          </a:p>
+        </p:txBody>
+      </p:sp>
+      <p:pic>
+        <p:nvPicPr>
+          <p:cNvPr id="15" name="Image 2" descr="preencoded.png"/>
+          <p:cNvPicPr>
+            <a:picLocks noChangeAspect="1"/>
+          </p:cNvPicPr>
+          <p:nvPr/>
+        </p:nvPicPr>
+        <p:blipFill>
+          <a:blip r:embed="rId3"/>
+          <a:stretch>
+            <a:fillRect/>
+          </a:stretch>
+        </p:blipFill>
+        <p:spPr>
+          <a:xfrm>
+            <a:off x="4937760" y="2496312"/>
+            <a:ext cx="347472" cy="347472"/>
+          </a:xfrm>
+          <a:prstGeom prst="rect">
+            <a:avLst/>
+          </a:prstGeom>
+        </p:spPr>
+      </p:pic>
+      <p:sp>
+        <p:nvSpPr>
+          <p:cNvPr id="16" name="Text 11"/>
+          <p:cNvSpPr/>
+          <p:nvPr/>
+        </p:nvSpPr>
+        <p:spPr>
+          <a:xfrm>
+            <a:off x="5440680" y="2414016"/>
+            <a:ext cx="3017520" cy="274320"/>
+          </a:xfrm>
+          <a:prstGeom prst="rect">
+            <a:avLst/>
+          </a:prstGeom>
+          <a:noFill/>
+          <a:ln/>
+        </p:spPr>
+        <p:txBody>
+          <a:bodyPr wrap="square" lIns="0" tIns="0" rIns="0" bIns="0" rtlCol="0" anchor="ctr"/>
+          <a:lstStyle/>
+          <a:p>
+            <a:pPr marL="0" indent="0">
+              <a:buNone/>
+            </a:pPr>
+            <a:r>
+              <a:rPr lang="en-US" sz="1300" b="1" dirty="0">
+                <a:solidFill>
+                  <a:srgbClr val="FFFFFF"/>
+                </a:solidFill>
+                <a:latin typeface="Trebuchet MS" pitchFamily="34" charset="0"/>
+                <a:ea typeface="Trebuchet MS" pitchFamily="34" charset="-122"/>
+                <a:cs typeface="Trebuchet MS" pitchFamily="34" charset="-120"/>
+              </a:rPr>
+              <a:t>Manual &amp; error-prone</a:t>
+            </a:r>
+            <a:endParaRPr lang="en-US" sz="1300" dirty="0"/>
+          </a:p>
+        </p:txBody>
+      </p:sp>
+      <p:sp>
+        <p:nvSpPr>
+          <p:cNvPr id="17" name="Text 12"/>
+          <p:cNvSpPr/>
+          <p:nvPr/>
+        </p:nvSpPr>
+        <p:spPr>
+          <a:xfrm>
+            <a:off x="5440680" y="2660904"/>
+            <a:ext cx="3017520" cy="256032"/>
+          </a:xfrm>
+          <a:prstGeom prst="rect">
+            <a:avLst/>
+          </a:prstGeom>
+          <a:noFill/>
+          <a:ln/>
+        </p:spPr>
+        <p:txBody>
+          <a:bodyPr wrap="square" lIns="0" tIns="0" rIns="0" bIns="0" rtlCol="0" anchor="ctr"/>
+          <a:lstStyle/>
+          <a:p>
+            <a:pPr marL="0" indent="0">
+              <a:buNone/>
+            </a:pPr>
+            <a:r>
+              <a:rPr lang="en-US" sz="1000" dirty="0">
+                <a:solidFill>
+                  <a:srgbClr val="8A9BB0"/>
+                </a:solidFill>
+                <a:latin typeface="Calibri" pitchFamily="34" charset="0"/>
+                <a:ea typeface="Calibri" pitchFamily="34" charset="-122"/>
+                <a:cs typeface="Calibri" pitchFamily="34" charset="-120"/>
+              </a:rPr>
+              <a:t>NULL, Missing, N/A, unknow — all mean the same thing</a:t>
+            </a:r>
+            <a:endParaRPr lang="en-US" sz="1000" dirty="0"/>
+          </a:p>
+        </p:txBody>
+      </p:sp>
+      <p:sp>
+        <p:nvSpPr>
+          <p:cNvPr id="18" name="Shape 13"/>
+          <p:cNvSpPr/>
+          <p:nvPr/>
+        </p:nvSpPr>
+        <p:spPr>
+          <a:xfrm>
+            <a:off x="548640" y="3337560"/>
+            <a:ext cx="8046720" cy="640080"/>
+          </a:xfrm>
+          <a:prstGeom prst="rect">
+            <a:avLst/>
+          </a:prstGeom>
+          <a:solidFill>
+            <a:srgbClr val="132B42"/>
+          </a:solidFill>
+          <a:ln/>
+        </p:spPr>
+        <p:txBody>
+          <a:bodyPr/>
+          <a:lstStyle/>
+          <a:p>
+            <a:endParaRPr lang="en-US"/>
+          </a:p>
+        </p:txBody>
+      </p:sp>
+      <p:sp>
+        <p:nvSpPr>
+          <p:cNvPr id="19" name="Text 14"/>
+          <p:cNvSpPr/>
+          <p:nvPr/>
+        </p:nvSpPr>
+        <p:spPr>
+          <a:xfrm>
+            <a:off x="822960" y="3383280"/>
+            <a:ext cx="7498080" cy="548640"/>
+          </a:xfrm>
+          <a:prstGeom prst="rect">
+            <a:avLst/>
+          </a:prstGeom>
+          <a:noFill/>
+          <a:ln/>
+        </p:spPr>
+        <p:txBody>
+          <a:bodyPr wrap="square" lIns="0" tIns="0" rIns="0" bIns="0" rtlCol="0" anchor="ctr"/>
+          <a:lstStyle/>
+          <a:p>
+            <a:pPr marL="0" indent="0">
+              <a:buNone/>
+            </a:pPr>
+            <a:r>
+              <a:rPr lang="en-US" sz="1100" i="1" dirty="0">
+                <a:solidFill>
+                  <a:srgbClr val="8A9BB0"/>
+                </a:solidFill>
+                <a:latin typeface="Calibri" pitchFamily="34" charset="0"/>
+                <a:ea typeface="Calibri" pitchFamily="34" charset="-122"/>
+                <a:cs typeface="Calibri" pitchFamily="34" charset="-120"/>
+              </a:rPr>
+              <a:t>"Current harmonization requires numerous manual steps, leading to inefficiency and limited scalability."  — You </a:t>
+            </a:r>
+            <a:r>
+              <a:rPr lang="en-US" sz="1100" i="1">
+                <a:solidFill>
+                  <a:srgbClr val="8A9BB0"/>
+                </a:solidFill>
+                <a:latin typeface="Calibri" pitchFamily="34" charset="0"/>
+                <a:ea typeface="Calibri" pitchFamily="34" charset="-122"/>
+                <a:cs typeface="Calibri" pitchFamily="34" charset="-120"/>
+              </a:rPr>
+              <a:t>own words!</a:t>
             </a:r>
             <a:endParaRPr lang="en-US" sz="1100" dirty="0"/>
           </a:p>
@@ -2496,7 +2315,7 @@
           <a:bodyPr wrap="square" lIns="0" tIns="0" rIns="0" bIns="0" rtlCol="0" anchor="ctr"/>
           <a:lstStyle/>
           <a:p>
-            <a:pPr algn="r" indent="0" marL="0">
+            <a:pPr marL="0" indent="0" algn="r">
               <a:buNone/>
             </a:pPr>
             <a:r>
@@ -2530,6 +2349,7 @@
         <a:solidFill>
           <a:srgbClr val="0B1929"/>
         </a:solidFill>
+        <a:effectLst/>
       </p:bgPr>
     </p:bg>
     <p:spTree>
@@ -2565,6 +2385,13 @@
           </a:solidFill>
           <a:ln/>
         </p:spPr>
+        <p:txBody>
+          <a:bodyPr/>
+          <a:lstStyle/>
+          <a:p>
+            <a:endParaRPr lang="en-US"/>
+          </a:p>
+        </p:txBody>
       </p:sp>
       <p:sp>
         <p:nvSpPr>
@@ -2587,7 +2414,7 @@
           <a:bodyPr wrap="square" lIns="0" tIns="0" rIns="0" bIns="0" rtlCol="0" anchor="ctr"/>
           <a:lstStyle/>
           <a:p>
-            <a:pPr indent="0" marL="0">
+            <a:pPr marL="0" indent="0">
               <a:buNone/>
             </a:pPr>
             <a:r>
@@ -2626,7 +2453,7 @@
           <a:bodyPr wrap="square" lIns="0" tIns="0" rIns="0" bIns="0" rtlCol="0" anchor="ctr"/>
           <a:lstStyle/>
           <a:p>
-            <a:pPr indent="0" marL="0">
+            <a:pPr marL="0" indent="0">
               <a:buNone/>
             </a:pPr>
             <a:r>
@@ -2663,187 +2490,24 @@
           </a:solidFill>
           <a:ln/>
           <a:effectLst>
-            <a:outerShdw sx="100000" sy="100000" kx="0" ky="0" algn="bl" rotWithShape="0" blurRad="101600" dist="38100" dir="8100000">
+            <a:outerShdw blurRad="101600" dist="38100" dir="8100000" algn="bl" rotWithShape="0">
               <a:srgbClr val="000000">
                 <a:alpha val="25000"/>
               </a:srgbClr>
             </a:outerShdw>
           </a:effectLst>
         </p:spPr>
+        <p:txBody>
+          <a:bodyPr/>
+          <a:lstStyle/>
+          <a:p>
+            <a:endParaRPr lang="en-US"/>
+          </a:p>
+        </p:txBody>
       </p:sp>
       <p:pic>
         <p:nvPicPr>
-          <p:cNvPr id="6" name="Image 0" descr="preencoded.png">    </p:cNvPr>
-          <p:cNvPicPr>
-            <a:picLocks noChangeAspect="1"/>
-          </p:cNvPicPr>
-          <p:nvPr/>
-        </p:nvPicPr>
-        <p:blipFill>
-          <a:blip r:embed="rId1"/>
-          <a:stretch>
-            <a:fillRect/>
-          </a:stretch>
-        </p:blipFill>
-        <p:spPr>
-          <a:xfrm>
-            <a:off x="1207008" y="1554480"/>
-            <a:ext cx="548640" cy="548640"/>
-          </a:xfrm>
-          <a:prstGeom prst="rect">
-            <a:avLst/>
-          </a:prstGeom>
-        </p:spPr>
-      </p:pic>
-      <p:sp>
-        <p:nvSpPr>
-          <p:cNvPr id="7" name="Text 4"/>
-          <p:cNvSpPr/>
-          <p:nvPr/>
-        </p:nvSpPr>
-        <p:spPr>
-          <a:xfrm>
-            <a:off x="640080" y="2148840"/>
-            <a:ext cx="1691640" cy="320040"/>
-          </a:xfrm>
-          <a:prstGeom prst="rect">
-            <a:avLst/>
-          </a:prstGeom>
-          <a:noFill/>
-          <a:ln/>
-        </p:spPr>
-        <p:txBody>
-          <a:bodyPr wrap="square" lIns="0" tIns="0" rIns="0" bIns="0" rtlCol="0" anchor="ctr"/>
-          <a:lstStyle/>
-          <a:p>
-            <a:pPr algn="ctr" indent="0" marL="0">
-              <a:buNone/>
-            </a:pPr>
-            <a:r>
-              <a:rPr lang="en-US" sz="1400" b="1" spc="200" kern="0" dirty="0">
-                <a:solidFill>
-                  <a:srgbClr val="FFFFFF"/>
-                </a:solidFill>
-                <a:latin typeface="Trebuchet MS" pitchFamily="34" charset="0"/>
-                <a:ea typeface="Trebuchet MS" pitchFamily="34" charset="-122"/>
-                <a:cs typeface="Trebuchet MS" pitchFamily="34" charset="-120"/>
-              </a:rPr>
-              <a:t>INGEST</a:t>
-            </a:r>
-            <a:endParaRPr lang="en-US" sz="1400" dirty="0"/>
-          </a:p>
-        </p:txBody>
-      </p:sp>
-      <p:sp>
-        <p:nvSpPr>
-          <p:cNvPr id="8" name="Text 5"/>
-          <p:cNvSpPr/>
-          <p:nvPr/>
-        </p:nvSpPr>
-        <p:spPr>
-          <a:xfrm>
-            <a:off x="640080" y="2468880"/>
-            <a:ext cx="1691640" cy="457200"/>
-          </a:xfrm>
-          <a:prstGeom prst="rect">
-            <a:avLst/>
-          </a:prstGeom>
-          <a:noFill/>
-          <a:ln/>
-        </p:spPr>
-        <p:txBody>
-          <a:bodyPr wrap="square" lIns="0" tIns="0" rIns="0" bIns="0" rtlCol="0" anchor="ctr"/>
-          <a:lstStyle/>
-          <a:p>
-            <a:pPr algn="ctr" indent="0" marL="0">
-              <a:buNone/>
-            </a:pPr>
-            <a:r>
-              <a:rPr lang="en-US" sz="1050" dirty="0">
-                <a:solidFill>
-                  <a:srgbClr val="E8F1EE"/>
-                </a:solidFill>
-                <a:latin typeface="Calibri" pitchFamily="34" charset="0"/>
-                <a:ea typeface="Calibri" pitchFamily="34" charset="-122"/>
-                <a:cs typeface="Calibri" pitchFamily="34" charset="-120"/>
-              </a:rPr>
-              <a:t>CSV, XLSX,</a:t>
-            </a:r>
-            <a:endParaRPr lang="en-US" sz="1050" dirty="0"/>
-          </a:p>
-          <a:p>
-            <a:pPr algn="ctr" indent="0" marL="0">
-              <a:buNone/>
-            </a:pPr>
-            <a:r>
-              <a:rPr lang="en-US" sz="1050" dirty="0">
-                <a:solidFill>
-                  <a:srgbClr val="E8F1EE"/>
-                </a:solidFill>
-                <a:latin typeface="Calibri" pitchFamily="34" charset="0"/>
-                <a:ea typeface="Calibri" pitchFamily="34" charset="-122"/>
-                <a:cs typeface="Calibri" pitchFamily="34" charset="-120"/>
-              </a:rPr>
-              <a:t>PDF, Free Text</a:t>
-            </a:r>
-            <a:endParaRPr lang="en-US" sz="1050" dirty="0"/>
-          </a:p>
-        </p:txBody>
-      </p:sp>
-      <p:pic>
-        <p:nvPicPr>
-          <p:cNvPr id="9" name="Image 1" descr="preencoded.png">    </p:cNvPr>
-          <p:cNvPicPr>
-            <a:picLocks noChangeAspect="1"/>
-          </p:cNvPicPr>
-          <p:nvPr/>
-        </p:nvPicPr>
-        <p:blipFill>
-          <a:blip r:embed="rId2"/>
-          <a:stretch>
-            <a:fillRect/>
-          </a:stretch>
-        </p:blipFill>
-        <p:spPr>
-          <a:xfrm>
-            <a:off x="2468880" y="1965960"/>
-            <a:ext cx="228600" cy="228600"/>
-          </a:xfrm>
-          <a:prstGeom prst="rect">
-            <a:avLst/>
-          </a:prstGeom>
-        </p:spPr>
-      </p:pic>
-      <p:sp>
-        <p:nvSpPr>
-          <p:cNvPr id="10" name="Shape 6"/>
-          <p:cNvSpPr/>
-          <p:nvPr/>
-        </p:nvSpPr>
-        <p:spPr>
-          <a:xfrm>
-            <a:off x="2697480" y="1417320"/>
-            <a:ext cx="1874520" cy="1645920"/>
-          </a:xfrm>
-          <a:prstGeom prst="rect">
-            <a:avLst/>
-          </a:prstGeom>
-          <a:solidFill>
-            <a:srgbClr val="0A7070"/>
-          </a:solidFill>
-          <a:ln/>
-          <a:effectLst>
-            <a:outerShdw sx="100000" sy="100000" kx="0" ky="0" algn="bl" rotWithShape="0" blurRad="101600" dist="38100" dir="8100000">
-              <a:srgbClr val="000000">
-                <a:alpha val="25000"/>
-              </a:srgbClr>
-            </a:outerShdw>
-          </a:effectLst>
-        </p:spPr>
-      </p:sp>
-      <p:pic>
-        <p:nvPicPr>
-          <p:cNvPr id="11" name="Image 2" descr="preencoded.png">    </p:cNvPr>
+          <p:cNvPr id="6" name="Image 0" descr="preencoded.png"/>
           <p:cNvPicPr>
             <a:picLocks noChangeAspect="1"/>
           </p:cNvPicPr>
@@ -2857,7 +2521,7 @@
         </p:blipFill>
         <p:spPr>
           <a:xfrm>
-            <a:off x="3355848" y="1554480"/>
+            <a:off x="1207008" y="1554480"/>
             <a:ext cx="548640" cy="548640"/>
           </a:xfrm>
           <a:prstGeom prst="rect">
@@ -2867,13 +2531,13 @@
       </p:pic>
       <p:sp>
         <p:nvSpPr>
-          <p:cNvPr id="12" name="Text 7"/>
-          <p:cNvSpPr/>
-          <p:nvPr/>
-        </p:nvSpPr>
-        <p:spPr>
-          <a:xfrm>
-            <a:off x="2788920" y="2148840"/>
+          <p:cNvPr id="7" name="Text 4"/>
+          <p:cNvSpPr/>
+          <p:nvPr/>
+        </p:nvSpPr>
+        <p:spPr>
+          <a:xfrm>
+            <a:off x="640080" y="2148840"/>
             <a:ext cx="1691640" cy="320040"/>
           </a:xfrm>
           <a:prstGeom prst="rect">
@@ -2886,11 +2550,11 @@
           <a:bodyPr wrap="square" lIns="0" tIns="0" rIns="0" bIns="0" rtlCol="0" anchor="ctr"/>
           <a:lstStyle/>
           <a:p>
-            <a:pPr algn="ctr" indent="0" marL="0">
-              <a:buNone/>
-            </a:pPr>
-            <a:r>
-              <a:rPr lang="en-US" sz="1400" b="1" spc="200" kern="0" dirty="0">
+            <a:pPr marL="0" indent="0" algn="ctr">
+              <a:buNone/>
+            </a:pPr>
+            <a:r>
+              <a:rPr lang="en-US" sz="1400" b="1" kern="0" spc="200" dirty="0">
                 <a:solidFill>
                   <a:srgbClr val="FFFFFF"/>
                 </a:solidFill>
@@ -2898,7 +2562,7 @@
                 <a:ea typeface="Trebuchet MS" pitchFamily="34" charset="-122"/>
                 <a:cs typeface="Trebuchet MS" pitchFamily="34" charset="-120"/>
               </a:rPr>
-              <a:t>ANALYZE</a:t>
+              <a:t>INGEST</a:t>
             </a:r>
             <a:endParaRPr lang="en-US" sz="1400" dirty="0"/>
           </a:p>
@@ -2906,13 +2570,13 @@
       </p:sp>
       <p:sp>
         <p:nvSpPr>
-          <p:cNvPr id="13" name="Text 8"/>
-          <p:cNvSpPr/>
-          <p:nvPr/>
-        </p:nvSpPr>
-        <p:spPr>
-          <a:xfrm>
-            <a:off x="2788920" y="2468880"/>
+          <p:cNvPr id="8" name="Text 5"/>
+          <p:cNvSpPr/>
+          <p:nvPr/>
+        </p:nvSpPr>
+        <p:spPr>
+          <a:xfrm>
+            <a:off x="640080" y="2468880"/>
             <a:ext cx="1691640" cy="457200"/>
           </a:xfrm>
           <a:prstGeom prst="rect">
@@ -2925,7 +2589,7 @@
           <a:bodyPr wrap="square" lIns="0" tIns="0" rIns="0" bIns="0" rtlCol="0" anchor="ctr"/>
           <a:lstStyle/>
           <a:p>
-            <a:pPr algn="ctr" indent="0" marL="0">
+            <a:pPr marL="0" indent="0" algn="ctr">
               <a:buNone/>
             </a:pPr>
             <a:r>
@@ -2937,12 +2601,12 @@
                 <a:ea typeface="Calibri" pitchFamily="34" charset="-122"/>
                 <a:cs typeface="Calibri" pitchFamily="34" charset="-120"/>
               </a:rPr>
-              <a:t>Quality scores,</a:t>
+              <a:t>CSV, XLSX,</a:t>
             </a:r>
             <a:endParaRPr lang="en-US" sz="1050" dirty="0"/>
           </a:p>
           <a:p>
-            <a:pPr algn="ctr" indent="0" marL="0">
+            <a:pPr marL="0" indent="0" algn="ctr">
               <a:buNone/>
             </a:pPr>
             <a:r>
@@ -2954,7 +2618,7 @@
                 <a:ea typeface="Calibri" pitchFamily="34" charset="-122"/>
                 <a:cs typeface="Calibri" pitchFamily="34" charset="-120"/>
               </a:rPr>
-              <a:t>anomalies, nulls</a:t>
+              <a:t>PDF, Free Text</a:t>
             </a:r>
             <a:endParaRPr lang="en-US" sz="1050" dirty="0"/>
           </a:p>
@@ -2962,7 +2626,7 @@
       </p:sp>
       <p:pic>
         <p:nvPicPr>
-          <p:cNvPr id="14" name="Image 3" descr="preencoded.png">    </p:cNvPr>
+          <p:cNvPr id="9" name="Image 1" descr="preencoded.png"/>
           <p:cNvPicPr>
             <a:picLocks noChangeAspect="1"/>
           </p:cNvPicPr>
@@ -2976,7 +2640,7 @@
         </p:blipFill>
         <p:spPr>
           <a:xfrm>
-            <a:off x="4617720" y="1965960"/>
+            <a:off x="2468880" y="1965960"/>
             <a:ext cx="228600" cy="228600"/>
           </a:xfrm>
           <a:prstGeom prst="rect">
@@ -2986,34 +2650,41 @@
       </p:pic>
       <p:sp>
         <p:nvSpPr>
-          <p:cNvPr id="15" name="Shape 9"/>
-          <p:cNvSpPr/>
-          <p:nvPr/>
-        </p:nvSpPr>
-        <p:spPr>
-          <a:xfrm>
-            <a:off x="4846320" y="1417320"/>
+          <p:cNvPr id="10" name="Shape 6"/>
+          <p:cNvSpPr/>
+          <p:nvPr/>
+        </p:nvSpPr>
+        <p:spPr>
+          <a:xfrm>
+            <a:off x="2697480" y="1417320"/>
             <a:ext cx="1874520" cy="1645920"/>
           </a:xfrm>
           <a:prstGeom prst="rect">
             <a:avLst/>
           </a:prstGeom>
           <a:solidFill>
-            <a:srgbClr val="086060"/>
+            <a:srgbClr val="0A7070"/>
           </a:solidFill>
           <a:ln/>
           <a:effectLst>
-            <a:outerShdw sx="100000" sy="100000" kx="0" ky="0" algn="bl" rotWithShape="0" blurRad="101600" dist="38100" dir="8100000">
+            <a:outerShdw blurRad="101600" dist="38100" dir="8100000" algn="bl" rotWithShape="0">
               <a:srgbClr val="000000">
                 <a:alpha val="25000"/>
               </a:srgbClr>
             </a:outerShdw>
           </a:effectLst>
         </p:spPr>
+        <p:txBody>
+          <a:bodyPr/>
+          <a:lstStyle/>
+          <a:p>
+            <a:endParaRPr lang="en-US"/>
+          </a:p>
+        </p:txBody>
       </p:sp>
       <p:pic>
         <p:nvPicPr>
-          <p:cNvPr id="16" name="Image 4" descr="preencoded.png">    </p:cNvPr>
+          <p:cNvPr id="11" name="Image 2" descr="preencoded.png"/>
           <p:cNvPicPr>
             <a:picLocks noChangeAspect="1"/>
           </p:cNvPicPr>
@@ -3027,7 +2698,7 @@
         </p:blipFill>
         <p:spPr>
           <a:xfrm>
-            <a:off x="5504688" y="1554480"/>
+            <a:off x="3355848" y="1554480"/>
             <a:ext cx="548640" cy="548640"/>
           </a:xfrm>
           <a:prstGeom prst="rect">
@@ -3037,13 +2708,13 @@
       </p:pic>
       <p:sp>
         <p:nvSpPr>
-          <p:cNvPr id="17" name="Text 10"/>
-          <p:cNvSpPr/>
-          <p:nvPr/>
-        </p:nvSpPr>
-        <p:spPr>
-          <a:xfrm>
-            <a:off x="4937760" y="2148840"/>
+          <p:cNvPr id="12" name="Text 7"/>
+          <p:cNvSpPr/>
+          <p:nvPr/>
+        </p:nvSpPr>
+        <p:spPr>
+          <a:xfrm>
+            <a:off x="2788920" y="2148840"/>
             <a:ext cx="1691640" cy="320040"/>
           </a:xfrm>
           <a:prstGeom prst="rect">
@@ -3056,11 +2727,11 @@
           <a:bodyPr wrap="square" lIns="0" tIns="0" rIns="0" bIns="0" rtlCol="0" anchor="ctr"/>
           <a:lstStyle/>
           <a:p>
-            <a:pPr algn="ctr" indent="0" marL="0">
-              <a:buNone/>
-            </a:pPr>
-            <a:r>
-              <a:rPr lang="en-US" sz="1400" b="1" spc="200" kern="0" dirty="0">
+            <a:pPr marL="0" indent="0" algn="ctr">
+              <a:buNone/>
+            </a:pPr>
+            <a:r>
+              <a:rPr lang="en-US" sz="1400" b="1" kern="0" spc="200" dirty="0">
                 <a:solidFill>
                   <a:srgbClr val="FFFFFF"/>
                 </a:solidFill>
@@ -3068,7 +2739,7 @@
                 <a:ea typeface="Trebuchet MS" pitchFamily="34" charset="-122"/>
                 <a:cs typeface="Trebuchet MS" pitchFamily="34" charset="-120"/>
               </a:rPr>
-              <a:t>AI REPAIR</a:t>
+              <a:t>ANALYZE</a:t>
             </a:r>
             <a:endParaRPr lang="en-US" sz="1400" dirty="0"/>
           </a:p>
@@ -3076,13 +2747,13 @@
       </p:sp>
       <p:sp>
         <p:nvSpPr>
-          <p:cNvPr id="18" name="Text 11"/>
-          <p:cNvSpPr/>
-          <p:nvPr/>
-        </p:nvSpPr>
-        <p:spPr>
-          <a:xfrm>
-            <a:off x="4937760" y="2468880"/>
+          <p:cNvPr id="13" name="Text 8"/>
+          <p:cNvSpPr/>
+          <p:nvPr/>
+        </p:nvSpPr>
+        <p:spPr>
+          <a:xfrm>
+            <a:off x="2788920" y="2468880"/>
             <a:ext cx="1691640" cy="457200"/>
           </a:xfrm>
           <a:prstGeom prst="rect">
@@ -3095,7 +2766,7 @@
           <a:bodyPr wrap="square" lIns="0" tIns="0" rIns="0" bIns="0" rtlCol="0" anchor="ctr"/>
           <a:lstStyle/>
           <a:p>
-            <a:pPr algn="ctr" indent="0" marL="0">
+            <a:pPr marL="0" indent="0" algn="ctr">
               <a:buNone/>
             </a:pPr>
             <a:r>
@@ -3107,12 +2778,12 @@
                 <a:ea typeface="Calibri" pitchFamily="34" charset="-122"/>
                 <a:cs typeface="Calibri" pitchFamily="34" charset="-120"/>
               </a:rPr>
-              <a:t>ML + Claude</a:t>
+              <a:t>Quality scores,</a:t>
             </a:r>
             <a:endParaRPr lang="en-US" sz="1050" dirty="0"/>
           </a:p>
           <a:p>
-            <a:pPr algn="ctr" indent="0" marL="0">
+            <a:pPr marL="0" indent="0" algn="ctr">
               <a:buNone/>
             </a:pPr>
             <a:r>
@@ -3124,7 +2795,7 @@
                 <a:ea typeface="Calibri" pitchFamily="34" charset="-122"/>
                 <a:cs typeface="Calibri" pitchFamily="34" charset="-120"/>
               </a:rPr>
-              <a:t>auto-correction</a:t>
+              <a:t>anomalies, nulls</a:t>
             </a:r>
             <a:endParaRPr lang="en-US" sz="1050" dirty="0"/>
           </a:p>
@@ -3132,7 +2803,65 @@
       </p:sp>
       <p:pic>
         <p:nvPicPr>
-          <p:cNvPr id="19" name="Image 5" descr="preencoded.png">    </p:cNvPr>
+          <p:cNvPr id="14" name="Image 3" descr="preencoded.png"/>
+          <p:cNvPicPr>
+            <a:picLocks noChangeAspect="1"/>
+          </p:cNvPicPr>
+          <p:nvPr/>
+        </p:nvPicPr>
+        <p:blipFill>
+          <a:blip r:embed="rId4"/>
+          <a:stretch>
+            <a:fillRect/>
+          </a:stretch>
+        </p:blipFill>
+        <p:spPr>
+          <a:xfrm>
+            <a:off x="4617720" y="1965960"/>
+            <a:ext cx="228600" cy="228600"/>
+          </a:xfrm>
+          <a:prstGeom prst="rect">
+            <a:avLst/>
+          </a:prstGeom>
+        </p:spPr>
+      </p:pic>
+      <p:sp>
+        <p:nvSpPr>
+          <p:cNvPr id="15" name="Shape 9"/>
+          <p:cNvSpPr/>
+          <p:nvPr/>
+        </p:nvSpPr>
+        <p:spPr>
+          <a:xfrm>
+            <a:off x="4846320" y="1417320"/>
+            <a:ext cx="1874520" cy="1645920"/>
+          </a:xfrm>
+          <a:prstGeom prst="rect">
+            <a:avLst/>
+          </a:prstGeom>
+          <a:solidFill>
+            <a:srgbClr val="086060"/>
+          </a:solidFill>
+          <a:ln/>
+          <a:effectLst>
+            <a:outerShdw blurRad="101600" dist="38100" dir="8100000" algn="bl" rotWithShape="0">
+              <a:srgbClr val="000000">
+                <a:alpha val="25000"/>
+              </a:srgbClr>
+            </a:outerShdw>
+          </a:effectLst>
+        </p:spPr>
+        <p:txBody>
+          <a:bodyPr/>
+          <a:lstStyle/>
+          <a:p>
+            <a:endParaRPr lang="en-US"/>
+          </a:p>
+        </p:txBody>
+      </p:sp>
+      <p:pic>
+        <p:nvPicPr>
+          <p:cNvPr id="16" name="Image 4" descr="preencoded.png"/>
           <p:cNvPicPr>
             <a:picLocks noChangeAspect="1"/>
           </p:cNvPicPr>
@@ -3146,6 +2875,125 @@
         </p:blipFill>
         <p:spPr>
           <a:xfrm>
+            <a:off x="5504688" y="1554480"/>
+            <a:ext cx="548640" cy="548640"/>
+          </a:xfrm>
+          <a:prstGeom prst="rect">
+            <a:avLst/>
+          </a:prstGeom>
+        </p:spPr>
+      </p:pic>
+      <p:sp>
+        <p:nvSpPr>
+          <p:cNvPr id="17" name="Text 10"/>
+          <p:cNvSpPr/>
+          <p:nvPr/>
+        </p:nvSpPr>
+        <p:spPr>
+          <a:xfrm>
+            <a:off x="4937760" y="2148840"/>
+            <a:ext cx="1691640" cy="320040"/>
+          </a:xfrm>
+          <a:prstGeom prst="rect">
+            <a:avLst/>
+          </a:prstGeom>
+          <a:noFill/>
+          <a:ln/>
+        </p:spPr>
+        <p:txBody>
+          <a:bodyPr wrap="square" lIns="0" tIns="0" rIns="0" bIns="0" rtlCol="0" anchor="ctr"/>
+          <a:lstStyle/>
+          <a:p>
+            <a:pPr marL="0" indent="0" algn="ctr">
+              <a:buNone/>
+            </a:pPr>
+            <a:r>
+              <a:rPr lang="en-US" sz="1400" b="1" kern="0" spc="200" dirty="0">
+                <a:solidFill>
+                  <a:srgbClr val="FFFFFF"/>
+                </a:solidFill>
+                <a:latin typeface="Trebuchet MS" pitchFamily="34" charset="0"/>
+                <a:ea typeface="Trebuchet MS" pitchFamily="34" charset="-122"/>
+                <a:cs typeface="Trebuchet MS" pitchFamily="34" charset="-120"/>
+              </a:rPr>
+              <a:t>AI REPAIR</a:t>
+            </a:r>
+            <a:endParaRPr lang="en-US" sz="1400" dirty="0"/>
+          </a:p>
+        </p:txBody>
+      </p:sp>
+      <p:sp>
+        <p:nvSpPr>
+          <p:cNvPr id="18" name="Text 11"/>
+          <p:cNvSpPr/>
+          <p:nvPr/>
+        </p:nvSpPr>
+        <p:spPr>
+          <a:xfrm>
+            <a:off x="4937760" y="2468880"/>
+            <a:ext cx="1691640" cy="457200"/>
+          </a:xfrm>
+          <a:prstGeom prst="rect">
+            <a:avLst/>
+          </a:prstGeom>
+          <a:noFill/>
+          <a:ln/>
+        </p:spPr>
+        <p:txBody>
+          <a:bodyPr wrap="square" lIns="0" tIns="0" rIns="0" bIns="0" rtlCol="0" anchor="ctr"/>
+          <a:lstStyle/>
+          <a:p>
+            <a:pPr marL="0" indent="0" algn="ctr">
+              <a:buNone/>
+            </a:pPr>
+            <a:r>
+              <a:rPr lang="en-US" sz="1050" dirty="0">
+                <a:solidFill>
+                  <a:srgbClr val="E8F1EE"/>
+                </a:solidFill>
+                <a:latin typeface="Calibri" pitchFamily="34" charset="0"/>
+                <a:ea typeface="Calibri" pitchFamily="34" charset="-122"/>
+                <a:cs typeface="Calibri" pitchFamily="34" charset="-120"/>
+              </a:rPr>
+              <a:t>ML + Claude</a:t>
+            </a:r>
+            <a:endParaRPr lang="en-US" sz="1050" dirty="0"/>
+          </a:p>
+          <a:p>
+            <a:pPr marL="0" indent="0" algn="ctr">
+              <a:buNone/>
+            </a:pPr>
+            <a:r>
+              <a:rPr lang="en-US" sz="1050" dirty="0">
+                <a:solidFill>
+                  <a:srgbClr val="E8F1EE"/>
+                </a:solidFill>
+                <a:latin typeface="Calibri" pitchFamily="34" charset="0"/>
+                <a:ea typeface="Calibri" pitchFamily="34" charset="-122"/>
+                <a:cs typeface="Calibri" pitchFamily="34" charset="-120"/>
+              </a:rPr>
+              <a:t>auto-correction</a:t>
+            </a:r>
+            <a:endParaRPr lang="en-US" sz="1050" dirty="0"/>
+          </a:p>
+        </p:txBody>
+      </p:sp>
+      <p:pic>
+        <p:nvPicPr>
+          <p:cNvPr id="19" name="Image 5" descr="preencoded.png"/>
+          <p:cNvPicPr>
+            <a:picLocks noChangeAspect="1"/>
+          </p:cNvPicPr>
+          <p:nvPr/>
+        </p:nvPicPr>
+        <p:blipFill>
+          <a:blip r:embed="rId4"/>
+          <a:stretch>
+            <a:fillRect/>
+          </a:stretch>
+        </p:blipFill>
+        <p:spPr>
+          <a:xfrm>
             <a:off x="6766560" y="1965960"/>
             <a:ext cx="228600" cy="228600"/>
           </a:xfrm>
@@ -3173,17 +3021,24 @@
           </a:solidFill>
           <a:ln/>
           <a:effectLst>
-            <a:outerShdw sx="100000" sy="100000" kx="0" ky="0" algn="bl" rotWithShape="0" blurRad="101600" dist="38100" dir="8100000">
+            <a:outerShdw blurRad="101600" dist="38100" dir="8100000" algn="bl" rotWithShape="0">
               <a:srgbClr val="000000">
                 <a:alpha val="25000"/>
               </a:srgbClr>
             </a:outerShdw>
           </a:effectLst>
         </p:spPr>
+        <p:txBody>
+          <a:bodyPr/>
+          <a:lstStyle/>
+          <a:p>
+            <a:endParaRPr lang="en-US"/>
+          </a:p>
+        </p:txBody>
       </p:sp>
       <p:pic>
         <p:nvPicPr>
-          <p:cNvPr id="21" name="Image 6" descr="preencoded.png">    </p:cNvPr>
+          <p:cNvPr id="21" name="Image 6" descr="preencoded.png"/>
           <p:cNvPicPr>
             <a:picLocks noChangeAspect="1"/>
           </p:cNvPicPr>
@@ -3226,11 +3081,11 @@
           <a:bodyPr wrap="square" lIns="0" tIns="0" rIns="0" bIns="0" rtlCol="0" anchor="ctr"/>
           <a:lstStyle/>
           <a:p>
-            <a:pPr algn="ctr" indent="0" marL="0">
-              <a:buNone/>
-            </a:pPr>
-            <a:r>
-              <a:rPr lang="en-US" sz="1400" b="1" spc="200" kern="0" dirty="0">
+            <a:pPr marL="0" indent="0" algn="ctr">
+              <a:buNone/>
+            </a:pPr>
+            <a:r>
+              <a:rPr lang="en-US" sz="1400" b="1" kern="0" spc="200" dirty="0">
                 <a:solidFill>
                   <a:srgbClr val="FFFFFF"/>
                 </a:solidFill>
@@ -3265,7 +3120,7 @@
           <a:bodyPr wrap="square" lIns="0" tIns="0" rIns="0" bIns="0" rtlCol="0" anchor="ctr"/>
           <a:lstStyle/>
           <a:p>
-            <a:pPr algn="ctr" indent="0" marL="0">
+            <a:pPr marL="0" indent="0" algn="ctr">
               <a:buNone/>
             </a:pPr>
             <a:r>
@@ -3282,7 +3137,7 @@
             <a:endParaRPr lang="en-US" sz="1050" dirty="0"/>
           </a:p>
           <a:p>
-            <a:pPr algn="ctr" indent="0" marL="0">
+            <a:pPr marL="0" indent="0" algn="ctr">
               <a:buNone/>
             </a:pPr>
             <a:r>
@@ -3319,13 +3174,20 @@
           </a:solidFill>
           <a:ln/>
           <a:effectLst>
-            <a:outerShdw sx="100000" sy="100000" kx="0" ky="0" algn="bl" rotWithShape="0" blurRad="101600" dist="38100" dir="8100000">
+            <a:outerShdw blurRad="101600" dist="38100" dir="8100000" algn="bl" rotWithShape="0">
               <a:srgbClr val="000000">
                 <a:alpha val="25000"/>
               </a:srgbClr>
             </a:outerShdw>
           </a:effectLst>
         </p:spPr>
+        <p:txBody>
+          <a:bodyPr/>
+          <a:lstStyle/>
+          <a:p>
+            <a:endParaRPr lang="en-US"/>
+          </a:p>
+        </p:txBody>
       </p:sp>
       <p:sp>
         <p:nvSpPr>
@@ -3348,7 +3210,7 @@
           <a:bodyPr wrap="square" lIns="0" tIns="0" rIns="0" bIns="0" rtlCol="0" anchor="ctr"/>
           <a:lstStyle/>
           <a:p>
-            <a:pPr indent="0" marL="0">
+            <a:pPr marL="0" indent="0">
               <a:buNone/>
             </a:pPr>
             <a:r>
@@ -3387,7 +3249,7 @@
           <a:bodyPr wrap="square" lIns="0" tIns="0" rIns="0" bIns="0" rtlCol="0" anchor="ctr"/>
           <a:lstStyle/>
           <a:p>
-            <a:pPr indent="0" marL="0">
+            <a:pPr marL="0" indent="0">
               <a:buNone/>
             </a:pPr>
             <a:r>
@@ -3426,7 +3288,7 @@
           <a:bodyPr wrap="square" lIns="0" tIns="0" rIns="0" bIns="0" rtlCol="0" anchor="ctr"/>
           <a:lstStyle/>
           <a:p>
-            <a:pPr indent="0" marL="0">
+            <a:pPr marL="0" indent="0">
               <a:buNone/>
             </a:pPr>
             <a:r>
@@ -3465,7 +3327,7 @@
           <a:bodyPr wrap="square" lIns="0" tIns="0" rIns="0" bIns="0" rtlCol="0" anchor="ctr"/>
           <a:lstStyle/>
           <a:p>
-            <a:pPr indent="0" marL="0">
+            <a:pPr marL="0" indent="0">
               <a:buNone/>
             </a:pPr>
             <a:r>
@@ -3504,7 +3366,7 @@
           <a:bodyPr wrap="square" lIns="0" tIns="0" rIns="0" bIns="0" rtlCol="0" anchor="ctr"/>
           <a:lstStyle/>
           <a:p>
-            <a:pPr indent="0" marL="0">
+            <a:pPr marL="0" indent="0">
               <a:buNone/>
             </a:pPr>
             <a:r>
@@ -3543,7 +3405,7 @@
           <a:bodyPr wrap="square" lIns="0" tIns="0" rIns="0" bIns="0" rtlCol="0" anchor="ctr"/>
           <a:lstStyle/>
           <a:p>
-            <a:pPr indent="0" marL="0">
+            <a:pPr marL="0" indent="0">
               <a:buNone/>
             </a:pPr>
             <a:r>
@@ -3582,7 +3444,7 @@
           <a:bodyPr wrap="square" lIns="0" tIns="0" rIns="0" bIns="0" rtlCol="0" anchor="ctr"/>
           <a:lstStyle/>
           <a:p>
-            <a:pPr indent="0" marL="0">
+            <a:pPr marL="0" indent="0">
               <a:buNone/>
             </a:pPr>
             <a:r>
@@ -3594,7 +3456,7 @@
                 <a:ea typeface="Calibri" pitchFamily="34" charset="-122"/>
                 <a:cs typeface="Calibri" pitchFamily="34" charset="-120"/>
               </a:rPr>
-              <a:t>Claude API · Structured output · Auto-repair</a:t>
+              <a:t>Claude API · Auto-repair</a:t>
             </a:r>
             <a:endParaRPr lang="en-US" sz="1000" dirty="0"/>
           </a:p>
@@ -3621,7 +3483,7 @@
           <a:bodyPr wrap="square" lIns="0" tIns="0" rIns="0" bIns="0" rtlCol="0" anchor="ctr"/>
           <a:lstStyle/>
           <a:p>
-            <a:pPr indent="0" marL="0">
+            <a:pPr marL="0" indent="0">
               <a:buNone/>
             </a:pPr>
             <a:r>
@@ -3660,7 +3522,7 @@
           <a:bodyPr wrap="square" lIns="0" tIns="0" rIns="0" bIns="0" rtlCol="0" anchor="ctr"/>
           <a:lstStyle/>
           <a:p>
-            <a:pPr indent="0" marL="0">
+            <a:pPr marL="0" indent="0">
               <a:buNone/>
             </a:pPr>
             <a:r>
@@ -3699,7 +3561,7 @@
           <a:bodyPr wrap="square" lIns="0" tIns="0" rIns="0" bIns="0" rtlCol="0" anchor="ctr"/>
           <a:lstStyle/>
           <a:p>
-            <a:pPr algn="r" indent="0" marL="0">
+            <a:pPr marL="0" indent="0" algn="r">
               <a:buNone/>
             </a:pPr>
             <a:r>
@@ -3733,6 +3595,7 @@
         <a:solidFill>
           <a:srgbClr val="0B1929"/>
         </a:solidFill>
+        <a:effectLst/>
       </p:bgPr>
     </p:bg>
     <p:spTree>
@@ -3768,6 +3631,13 @@
           </a:solidFill>
           <a:ln/>
         </p:spPr>
+        <p:txBody>
+          <a:bodyPr/>
+          <a:lstStyle/>
+          <a:p>
+            <a:endParaRPr lang="en-US"/>
+          </a:p>
+        </p:txBody>
       </p:sp>
       <p:sp>
         <p:nvSpPr>
@@ -3790,7 +3660,7 @@
           <a:bodyPr wrap="square" lIns="0" tIns="0" rIns="0" bIns="0" rtlCol="0" anchor="ctr"/>
           <a:lstStyle/>
           <a:p>
-            <a:pPr indent="0" marL="0">
+            <a:pPr marL="0" indent="0">
               <a:buNone/>
             </a:pPr>
             <a:r>
@@ -3827,13 +3697,20 @@
           </a:solidFill>
           <a:ln/>
           <a:effectLst>
-            <a:outerShdw sx="100000" sy="100000" kx="0" ky="0" algn="bl" rotWithShape="0" blurRad="101600" dist="38100" dir="8100000">
+            <a:outerShdw blurRad="101600" dist="38100" dir="8100000" algn="bl" rotWithShape="0">
               <a:srgbClr val="000000">
                 <a:alpha val="25000"/>
               </a:srgbClr>
             </a:outerShdw>
           </a:effectLst>
         </p:spPr>
+        <p:txBody>
+          <a:bodyPr/>
+          <a:lstStyle/>
+          <a:p>
+            <a:endParaRPr lang="en-US"/>
+          </a:p>
+        </p:txBody>
       </p:sp>
       <p:sp>
         <p:nvSpPr>
@@ -3856,7 +3733,7 @@
           <a:bodyPr wrap="square" lIns="0" tIns="0" rIns="0" bIns="0" rtlCol="0" anchor="ctr"/>
           <a:lstStyle/>
           <a:p>
-            <a:pPr indent="0" marL="0">
+            <a:pPr marL="0" indent="0">
               <a:buNone/>
             </a:pPr>
             <a:r>
@@ -3876,133 +3753,7 @@
       </p:sp>
       <p:pic>
         <p:nvPicPr>
-          <p:cNvPr id="6" name="Image 0" descr="preencoded.png">    </p:cNvPr>
-          <p:cNvPicPr>
-            <a:picLocks noChangeAspect="1"/>
-          </p:cNvPicPr>
-          <p:nvPr/>
-        </p:nvPicPr>
-        <p:blipFill>
-          <a:blip r:embed="rId1"/>
-          <a:stretch>
-            <a:fillRect/>
-          </a:stretch>
-        </p:blipFill>
-        <p:spPr>
-          <a:xfrm>
-            <a:off x="822960" y="1572768"/>
-            <a:ext cx="201168" cy="201168"/>
-          </a:xfrm>
-          <a:prstGeom prst="rect">
-            <a:avLst/>
-          </a:prstGeom>
-        </p:spPr>
-      </p:pic>
-      <p:sp>
-        <p:nvSpPr>
-          <p:cNvPr id="7" name="Text 4"/>
-          <p:cNvSpPr/>
-          <p:nvPr/>
-        </p:nvSpPr>
-        <p:spPr>
-          <a:xfrm>
-            <a:off x="1143000" y="1536192"/>
-            <a:ext cx="3200400" cy="292608"/>
-          </a:xfrm>
-          <a:prstGeom prst="rect">
-            <a:avLst/>
-          </a:prstGeom>
-          <a:noFill/>
-          <a:ln/>
-        </p:spPr>
-        <p:txBody>
-          <a:bodyPr wrap="square" lIns="0" tIns="0" rIns="0" bIns="0" rtlCol="0" anchor="ctr"/>
-          <a:lstStyle/>
-          <a:p>
-            <a:pPr indent="0" marL="0">
-              <a:buNone/>
-            </a:pPr>
-            <a:r>
-              <a:rPr lang="en-US" sz="1050" dirty="0">
-                <a:solidFill>
-                  <a:srgbClr val="CBD5E1"/>
-                </a:solidFill>
-                <a:latin typeface="Calibri" pitchFamily="34" charset="0"/>
-                <a:ea typeface="Calibri" pitchFamily="34" charset="-122"/>
-                <a:cs typeface="Calibri" pitchFamily="34" charset="-120"/>
-              </a:rPr>
-              <a:t>CSV / XLSX / PDF — any format accepted</a:t>
-            </a:r>
-            <a:endParaRPr lang="en-US" sz="1050" dirty="0"/>
-          </a:p>
-        </p:txBody>
-      </p:sp>
-      <p:pic>
-        <p:nvPicPr>
-          <p:cNvPr id="8" name="Image 1" descr="preencoded.png">    </p:cNvPr>
-          <p:cNvPicPr>
-            <a:picLocks noChangeAspect="1"/>
-          </p:cNvPicPr>
-          <p:nvPr/>
-        </p:nvPicPr>
-        <p:blipFill>
-          <a:blip r:embed="rId2"/>
-          <a:stretch>
-            <a:fillRect/>
-          </a:stretch>
-        </p:blipFill>
-        <p:spPr>
-          <a:xfrm>
-            <a:off x="822960" y="1911096"/>
-            <a:ext cx="201168" cy="201168"/>
-          </a:xfrm>
-          <a:prstGeom prst="rect">
-            <a:avLst/>
-          </a:prstGeom>
-        </p:spPr>
-      </p:pic>
-      <p:sp>
-        <p:nvSpPr>
-          <p:cNvPr id="9" name="Text 5"/>
-          <p:cNvSpPr/>
-          <p:nvPr/>
-        </p:nvSpPr>
-        <p:spPr>
-          <a:xfrm>
-            <a:off x="1143000" y="1874520"/>
-            <a:ext cx="3200400" cy="292608"/>
-          </a:xfrm>
-          <a:prstGeom prst="rect">
-            <a:avLst/>
-          </a:prstGeom>
-          <a:noFill/>
-          <a:ln/>
-        </p:spPr>
-        <p:txBody>
-          <a:bodyPr wrap="square" lIns="0" tIns="0" rIns="0" bIns="0" rtlCol="0" anchor="ctr"/>
-          <a:lstStyle/>
-          <a:p>
-            <a:pPr indent="0" marL="0">
-              <a:buNone/>
-            </a:pPr>
-            <a:r>
-              <a:rPr lang="en-US" sz="1050" dirty="0">
-                <a:solidFill>
-                  <a:srgbClr val="CBD5E1"/>
-                </a:solidFill>
-                <a:latin typeface="Calibri" pitchFamily="34" charset="0"/>
-                <a:ea typeface="Calibri" pitchFamily="34" charset="-122"/>
-                <a:cs typeface="Calibri" pitchFamily="34" charset="-120"/>
-              </a:rPr>
-              <a:t>Auto-detects delimiter (comma, semicolon, tab, pipe)</a:t>
-            </a:r>
-            <a:endParaRPr lang="en-US" sz="1050" dirty="0"/>
-          </a:p>
-        </p:txBody>
-      </p:sp>
-      <p:pic>
-        <p:nvPicPr>
-          <p:cNvPr id="10" name="Image 2" descr="preencoded.png">    </p:cNvPr>
+          <p:cNvPr id="6" name="Image 0" descr="preencoded.png"/>
           <p:cNvPicPr>
             <a:picLocks noChangeAspect="1"/>
           </p:cNvPicPr>
@@ -4016,7 +3767,7 @@
         </p:blipFill>
         <p:spPr>
           <a:xfrm>
-            <a:off x="822960" y="2249424"/>
+            <a:off x="822960" y="1572768"/>
             <a:ext cx="201168" cy="201168"/>
           </a:xfrm>
           <a:prstGeom prst="rect">
@@ -4026,13 +3777,13 @@
       </p:pic>
       <p:sp>
         <p:nvSpPr>
-          <p:cNvPr id="11" name="Text 6"/>
-          <p:cNvSpPr/>
-          <p:nvPr/>
-        </p:nvSpPr>
-        <p:spPr>
-          <a:xfrm>
-            <a:off x="1143000" y="2212848"/>
+          <p:cNvPr id="7" name="Text 4"/>
+          <p:cNvSpPr/>
+          <p:nvPr/>
+        </p:nvSpPr>
+        <p:spPr>
+          <a:xfrm>
+            <a:off x="1143000" y="1536192"/>
             <a:ext cx="3200400" cy="292608"/>
           </a:xfrm>
           <a:prstGeom prst="rect">
@@ -4045,7 +3796,7 @@
           <a:bodyPr wrap="square" lIns="0" tIns="0" rIns="0" bIns="0" rtlCol="0" anchor="ctr"/>
           <a:lstStyle/>
           <a:p>
-            <a:pPr indent="0" marL="0">
+            <a:pPr marL="0" indent="0">
               <a:buNone/>
             </a:pPr>
             <a:r>
@@ -4057,7 +3808,7 @@
                 <a:ea typeface="Calibri" pitchFamily="34" charset="-122"/>
                 <a:cs typeface="Calibri" pitchFamily="34" charset="-120"/>
               </a:rPr>
-              <a:t>Handles encoding: UTF-8, Latin-1 fallback</a:t>
+              <a:t>CSV / XLSX / PDF — any format accepted</a:t>
             </a:r>
             <a:endParaRPr lang="en-US" sz="1050" dirty="0"/>
           </a:p>
@@ -4065,21 +3816,21 @@
       </p:sp>
       <p:pic>
         <p:nvPicPr>
-          <p:cNvPr id="12" name="Image 3" descr="preencoded.png">    </p:cNvPr>
+          <p:cNvPr id="8" name="Image 1" descr="preencoded.png"/>
           <p:cNvPicPr>
             <a:picLocks noChangeAspect="1"/>
           </p:cNvPicPr>
           <p:nvPr/>
         </p:nvPicPr>
         <p:blipFill>
-          <a:blip r:embed="rId4"/>
+          <a:blip r:embed="rId3"/>
           <a:stretch>
             <a:fillRect/>
           </a:stretch>
         </p:blipFill>
         <p:spPr>
           <a:xfrm>
-            <a:off x="822960" y="2587752"/>
+            <a:off x="822960" y="1911096"/>
             <a:ext cx="201168" cy="201168"/>
           </a:xfrm>
           <a:prstGeom prst="rect">
@@ -4089,13 +3840,13 @@
       </p:pic>
       <p:sp>
         <p:nvSpPr>
-          <p:cNvPr id="13" name="Text 7"/>
-          <p:cNvSpPr/>
-          <p:nvPr/>
-        </p:nvSpPr>
-        <p:spPr>
-          <a:xfrm>
-            <a:off x="1143000" y="2551176"/>
+          <p:cNvPr id="9" name="Text 5"/>
+          <p:cNvSpPr/>
+          <p:nvPr/>
+        </p:nvSpPr>
+        <p:spPr>
+          <a:xfrm>
+            <a:off x="1143000" y="1874520"/>
             <a:ext cx="3200400" cy="292608"/>
           </a:xfrm>
           <a:prstGeom prst="rect">
@@ -4108,7 +3859,7 @@
           <a:bodyPr wrap="square" lIns="0" tIns="0" rIns="0" bIns="0" rtlCol="0" anchor="ctr"/>
           <a:lstStyle/>
           <a:p>
-            <a:pPr indent="0" marL="0">
+            <a:pPr marL="0" indent="0">
               <a:buNone/>
             </a:pPr>
             <a:r>
@@ -4120,7 +3871,7 @@
                 <a:ea typeface="Calibri" pitchFamily="34" charset="-122"/>
                 <a:cs typeface="Calibri" pitchFamily="34" charset="-120"/>
               </a:rPr>
-              <a:t>Sentinel normalization: NULL, Missing, N/A, unknow → NaN</a:t>
+              <a:t>Auto-detects delimiter (comma, semicolon, tab, pipe)</a:t>
             </a:r>
             <a:endParaRPr lang="en-US" sz="1050" dirty="0"/>
           </a:p>
@@ -4128,21 +3879,21 @@
       </p:sp>
       <p:pic>
         <p:nvPicPr>
-          <p:cNvPr id="14" name="Image 4" descr="preencoded.png">    </p:cNvPr>
+          <p:cNvPr id="10" name="Image 2" descr="preencoded.png"/>
           <p:cNvPicPr>
             <a:picLocks noChangeAspect="1"/>
           </p:cNvPicPr>
           <p:nvPr/>
         </p:nvPicPr>
         <p:blipFill>
-          <a:blip r:embed="rId5"/>
+          <a:blip r:embed="rId3"/>
           <a:stretch>
             <a:fillRect/>
           </a:stretch>
         </p:blipFill>
         <p:spPr>
           <a:xfrm>
-            <a:off x="822960" y="2926080"/>
+            <a:off x="822960" y="2249424"/>
             <a:ext cx="201168" cy="201168"/>
           </a:xfrm>
           <a:prstGeom prst="rect">
@@ -4152,13 +3903,13 @@
       </p:pic>
       <p:sp>
         <p:nvSpPr>
-          <p:cNvPr id="15" name="Text 8"/>
-          <p:cNvSpPr/>
-          <p:nvPr/>
-        </p:nvSpPr>
-        <p:spPr>
-          <a:xfrm>
-            <a:off x="1143000" y="2889504"/>
+          <p:cNvPr id="11" name="Text 6"/>
+          <p:cNvSpPr/>
+          <p:nvPr/>
+        </p:nvSpPr>
+        <p:spPr>
+          <a:xfrm>
+            <a:off x="1143000" y="2212848"/>
             <a:ext cx="3200400" cy="292608"/>
           </a:xfrm>
           <a:prstGeom prst="rect">
@@ -4171,7 +3922,7 @@
           <a:bodyPr wrap="square" lIns="0" tIns="0" rIns="0" bIns="0" rtlCol="0" anchor="ctr"/>
           <a:lstStyle/>
           <a:p>
-            <a:pPr indent="0" marL="0">
+            <a:pPr marL="0" indent="0">
               <a:buNone/>
             </a:pPr>
             <a:r>
@@ -4183,7 +3934,7 @@
                 <a:ea typeface="Calibri" pitchFamily="34" charset="-122"/>
                 <a:cs typeface="Calibri" pitchFamily="34" charset="-120"/>
               </a:rPr>
-              <a:t>case_id format normalization (CASE-0135, 0135, 135 → int)</a:t>
+              <a:t>Handles encoding: UTF-8, Latin-1 fallback</a:t>
             </a:r>
             <a:endParaRPr lang="en-US" sz="1050" dirty="0"/>
           </a:p>
@@ -4191,21 +3942,21 @@
       </p:sp>
       <p:pic>
         <p:nvPicPr>
-          <p:cNvPr id="16" name="Image 5" descr="preencoded.png">    </p:cNvPr>
+          <p:cNvPr id="12" name="Image 3" descr="preencoded.png"/>
           <p:cNvPicPr>
             <a:picLocks noChangeAspect="1"/>
           </p:cNvPicPr>
           <p:nvPr/>
         </p:nvPicPr>
         <p:blipFill>
-          <a:blip r:embed="rId6"/>
+          <a:blip r:embed="rId3"/>
           <a:stretch>
             <a:fillRect/>
           </a:stretch>
         </p:blipFill>
         <p:spPr>
           <a:xfrm>
-            <a:off x="822960" y="3264408"/>
+            <a:off x="822960" y="2587752"/>
             <a:ext cx="201168" cy="201168"/>
           </a:xfrm>
           <a:prstGeom prst="rect">
@@ -4215,13 +3966,13 @@
       </p:pic>
       <p:sp>
         <p:nvSpPr>
-          <p:cNvPr id="17" name="Text 9"/>
-          <p:cNvSpPr/>
-          <p:nvPr/>
-        </p:nvSpPr>
-        <p:spPr>
-          <a:xfrm>
-            <a:off x="1143000" y="3227832"/>
+          <p:cNvPr id="13" name="Text 7"/>
+          <p:cNvSpPr/>
+          <p:nvPr/>
+        </p:nvSpPr>
+        <p:spPr>
+          <a:xfrm>
+            <a:off x="1143000" y="2551176"/>
             <a:ext cx="3200400" cy="292608"/>
           </a:xfrm>
           <a:prstGeom prst="rect">
@@ -4234,7 +3985,7 @@
           <a:bodyPr wrap="square" lIns="0" tIns="0" rIns="0" bIns="0" rtlCol="0" anchor="ctr"/>
           <a:lstStyle/>
           <a:p>
-            <a:pPr indent="0" marL="0">
+            <a:pPr marL="0" indent="0">
               <a:buNone/>
             </a:pPr>
             <a:r>
@@ -4246,7 +3997,7 @@
                 <a:ea typeface="Calibri" pitchFamily="34" charset="-122"/>
                 <a:cs typeface="Calibri" pitchFamily="34" charset="-120"/>
               </a:rPr>
-              <a:t>PDF nursing reports parsed via pdfplumber</a:t>
+              <a:t>Sentinel normalization: NULL, Missing, N/A, unknow → NaN</a:t>
             </a:r>
             <a:endParaRPr lang="en-US" sz="1050" dirty="0"/>
           </a:p>
@@ -4254,21 +4005,21 @@
       </p:sp>
       <p:pic>
         <p:nvPicPr>
-          <p:cNvPr id="18" name="Image 6" descr="preencoded.png">    </p:cNvPr>
+          <p:cNvPr id="14" name="Image 4" descr="preencoded.png"/>
           <p:cNvPicPr>
             <a:picLocks noChangeAspect="1"/>
           </p:cNvPicPr>
           <p:nvPr/>
         </p:nvPicPr>
         <p:blipFill>
-          <a:blip r:embed="rId7"/>
+          <a:blip r:embed="rId3"/>
           <a:stretch>
             <a:fillRect/>
           </a:stretch>
         </p:blipFill>
         <p:spPr>
           <a:xfrm>
-            <a:off x="822960" y="3602736"/>
+            <a:off x="822960" y="2926080"/>
             <a:ext cx="201168" cy="201168"/>
           </a:xfrm>
           <a:prstGeom prst="rect">
@@ -4278,13 +4029,13 @@
       </p:pic>
       <p:sp>
         <p:nvSpPr>
-          <p:cNvPr id="19" name="Text 10"/>
-          <p:cNvSpPr/>
-          <p:nvPr/>
-        </p:nvSpPr>
-        <p:spPr>
-          <a:xfrm>
-            <a:off x="1143000" y="3566160"/>
+          <p:cNvPr id="15" name="Text 8"/>
+          <p:cNvSpPr/>
+          <p:nvPr/>
+        </p:nvSpPr>
+        <p:spPr>
+          <a:xfrm>
+            <a:off x="1143000" y="2889504"/>
             <a:ext cx="3200400" cy="292608"/>
           </a:xfrm>
           <a:prstGeom prst="rect">
@@ -4297,7 +4048,7 @@
           <a:bodyPr wrap="square" lIns="0" tIns="0" rIns="0" bIns="0" rtlCol="0" anchor="ctr"/>
           <a:lstStyle/>
           <a:p>
-            <a:pPr indent="0" marL="0">
+            <a:pPr marL="0" indent="0">
               <a:buNone/>
             </a:pPr>
             <a:r>
@@ -4309,6 +4060,132 @@
                 <a:ea typeface="Calibri" pitchFamily="34" charset="-122"/>
                 <a:cs typeface="Calibri" pitchFamily="34" charset="-120"/>
               </a:rPr>
+              <a:t>case_id format normalization (CASE-0135, 0135, 135 → int)</a:t>
+            </a:r>
+            <a:endParaRPr lang="en-US" sz="1050" dirty="0"/>
+          </a:p>
+        </p:txBody>
+      </p:sp>
+      <p:pic>
+        <p:nvPicPr>
+          <p:cNvPr id="16" name="Image 5" descr="preencoded.png"/>
+          <p:cNvPicPr>
+            <a:picLocks noChangeAspect="1"/>
+          </p:cNvPicPr>
+          <p:nvPr/>
+        </p:nvPicPr>
+        <p:blipFill>
+          <a:blip r:embed="rId3"/>
+          <a:stretch>
+            <a:fillRect/>
+          </a:stretch>
+        </p:blipFill>
+        <p:spPr>
+          <a:xfrm>
+            <a:off x="822960" y="3264408"/>
+            <a:ext cx="201168" cy="201168"/>
+          </a:xfrm>
+          <a:prstGeom prst="rect">
+            <a:avLst/>
+          </a:prstGeom>
+        </p:spPr>
+      </p:pic>
+      <p:sp>
+        <p:nvSpPr>
+          <p:cNvPr id="17" name="Text 9"/>
+          <p:cNvSpPr/>
+          <p:nvPr/>
+        </p:nvSpPr>
+        <p:spPr>
+          <a:xfrm>
+            <a:off x="1143000" y="3227832"/>
+            <a:ext cx="3200400" cy="292608"/>
+          </a:xfrm>
+          <a:prstGeom prst="rect">
+            <a:avLst/>
+          </a:prstGeom>
+          <a:noFill/>
+          <a:ln/>
+        </p:spPr>
+        <p:txBody>
+          <a:bodyPr wrap="square" lIns="0" tIns="0" rIns="0" bIns="0" rtlCol="0" anchor="ctr"/>
+          <a:lstStyle/>
+          <a:p>
+            <a:pPr marL="0" indent="0">
+              <a:buNone/>
+            </a:pPr>
+            <a:r>
+              <a:rPr lang="en-US" sz="1050" dirty="0">
+                <a:solidFill>
+                  <a:srgbClr val="CBD5E1"/>
+                </a:solidFill>
+                <a:latin typeface="Calibri" pitchFamily="34" charset="0"/>
+                <a:ea typeface="Calibri" pitchFamily="34" charset="-122"/>
+                <a:cs typeface="Calibri" pitchFamily="34" charset="-120"/>
+              </a:rPr>
+              <a:t>PDF nursing reports parsed via pdfplumber</a:t>
+            </a:r>
+            <a:endParaRPr lang="en-US" sz="1050" dirty="0"/>
+          </a:p>
+        </p:txBody>
+      </p:sp>
+      <p:pic>
+        <p:nvPicPr>
+          <p:cNvPr id="18" name="Image 6" descr="preencoded.png"/>
+          <p:cNvPicPr>
+            <a:picLocks noChangeAspect="1"/>
+          </p:cNvPicPr>
+          <p:nvPr/>
+        </p:nvPicPr>
+        <p:blipFill>
+          <a:blip r:embed="rId3"/>
+          <a:stretch>
+            <a:fillRect/>
+          </a:stretch>
+        </p:blipFill>
+        <p:spPr>
+          <a:xfrm>
+            <a:off x="822960" y="3602736"/>
+            <a:ext cx="201168" cy="201168"/>
+          </a:xfrm>
+          <a:prstGeom prst="rect">
+            <a:avLst/>
+          </a:prstGeom>
+        </p:spPr>
+      </p:pic>
+      <p:sp>
+        <p:nvSpPr>
+          <p:cNvPr id="19" name="Text 10"/>
+          <p:cNvSpPr/>
+          <p:nvPr/>
+        </p:nvSpPr>
+        <p:spPr>
+          <a:xfrm>
+            <a:off x="1143000" y="3566160"/>
+            <a:ext cx="3200400" cy="292608"/>
+          </a:xfrm>
+          <a:prstGeom prst="rect">
+            <a:avLst/>
+          </a:prstGeom>
+          <a:noFill/>
+          <a:ln/>
+        </p:spPr>
+        <p:txBody>
+          <a:bodyPr wrap="square" lIns="0" tIns="0" rIns="0" bIns="0" rtlCol="0" anchor="ctr"/>
+          <a:lstStyle/>
+          <a:p>
+            <a:pPr marL="0" indent="0">
+              <a:buNone/>
+            </a:pPr>
+            <a:r>
+              <a:rPr lang="en-US" sz="1050" dirty="0">
+                <a:solidFill>
+                  <a:srgbClr val="CBD5E1"/>
+                </a:solidFill>
+                <a:latin typeface="Calibri" pitchFamily="34" charset="0"/>
+                <a:ea typeface="Calibri" pitchFamily="34" charset="-122"/>
+                <a:cs typeface="Calibri" pitchFamily="34" charset="-120"/>
+              </a:rPr>
               <a:t>Corrupted XLSX → auto-fallback to CSV parsing</a:t>
             </a:r>
             <a:endParaRPr lang="en-US" sz="1050" dirty="0"/>
@@ -4334,13 +4211,20 @@
           </a:solidFill>
           <a:ln/>
           <a:effectLst>
-            <a:outerShdw sx="100000" sy="100000" kx="0" ky="0" algn="bl" rotWithShape="0" blurRad="101600" dist="38100" dir="8100000">
+            <a:outerShdw blurRad="101600" dist="38100" dir="8100000" algn="bl" rotWithShape="0">
               <a:srgbClr val="000000">
                 <a:alpha val="25000"/>
               </a:srgbClr>
             </a:outerShdw>
           </a:effectLst>
         </p:spPr>
+        <p:txBody>
+          <a:bodyPr/>
+          <a:lstStyle/>
+          <a:p>
+            <a:endParaRPr lang="en-US"/>
+          </a:p>
+        </p:txBody>
       </p:sp>
       <p:sp>
         <p:nvSpPr>
@@ -4363,7 +4247,7 @@
           <a:bodyPr wrap="square" lIns="0" tIns="0" rIns="0" bIns="0" rtlCol="0" anchor="ctr"/>
           <a:lstStyle/>
           <a:p>
-            <a:pPr indent="0" marL="0">
+            <a:pPr marL="0" indent="0">
               <a:buNone/>
             </a:pPr>
             <a:r>
@@ -4400,6 +4284,13 @@
           </a:solidFill>
           <a:ln/>
         </p:spPr>
+        <p:txBody>
+          <a:bodyPr/>
+          <a:lstStyle/>
+          <a:p>
+            <a:endParaRPr lang="en-US"/>
+          </a:p>
+        </p:txBody>
       </p:sp>
       <p:sp>
         <p:nvSpPr>
@@ -4422,7 +4313,7 @@
           <a:bodyPr wrap="square" lIns="0" tIns="0" rIns="0" bIns="0" rtlCol="0" anchor="ctr"/>
           <a:lstStyle/>
           <a:p>
-            <a:pPr indent="0" marL="0">
+            <a:pPr marL="0" indent="0">
               <a:buNone/>
             </a:pPr>
             <a:r>
@@ -4461,7 +4352,7 @@
           <a:bodyPr wrap="square" lIns="0" tIns="0" rIns="0" bIns="0" rtlCol="0" anchor="ctr"/>
           <a:lstStyle/>
           <a:p>
-            <a:pPr indent="0" marL="0">
+            <a:pPr marL="0" indent="0">
               <a:buNone/>
             </a:pPr>
             <a:r>
@@ -4498,6 +4389,13 @@
           </a:solidFill>
           <a:ln/>
         </p:spPr>
+        <p:txBody>
+          <a:bodyPr/>
+          <a:lstStyle/>
+          <a:p>
+            <a:endParaRPr lang="en-US"/>
+          </a:p>
+        </p:txBody>
       </p:sp>
       <p:sp>
         <p:nvSpPr>
@@ -4520,7 +4418,7 @@
           <a:bodyPr wrap="square" lIns="0" tIns="0" rIns="0" bIns="0" rtlCol="0" anchor="ctr"/>
           <a:lstStyle/>
           <a:p>
-            <a:pPr indent="0" marL="0">
+            <a:pPr marL="0" indent="0">
               <a:buNone/>
             </a:pPr>
             <a:r>
@@ -4559,7 +4457,7 @@
           <a:bodyPr wrap="square" lIns="0" tIns="0" rIns="0" bIns="0" rtlCol="0" anchor="ctr"/>
           <a:lstStyle/>
           <a:p>
-            <a:pPr indent="0" marL="0">
+            <a:pPr marL="0" indent="0">
               <a:buNone/>
             </a:pPr>
             <a:r>
@@ -4596,6 +4494,13 @@
           </a:solidFill>
           <a:ln/>
         </p:spPr>
+        <p:txBody>
+          <a:bodyPr/>
+          <a:lstStyle/>
+          <a:p>
+            <a:endParaRPr lang="en-US"/>
+          </a:p>
+        </p:txBody>
       </p:sp>
       <p:sp>
         <p:nvSpPr>
@@ -4618,7 +4523,7 @@
           <a:bodyPr wrap="square" lIns="0" tIns="0" rIns="0" bIns="0" rtlCol="0" anchor="ctr"/>
           <a:lstStyle/>
           <a:p>
-            <a:pPr indent="0" marL="0">
+            <a:pPr marL="0" indent="0">
               <a:buNone/>
             </a:pPr>
             <a:r>
@@ -4657,7 +4562,7 @@
           <a:bodyPr wrap="square" lIns="0" tIns="0" rIns="0" bIns="0" rtlCol="0" anchor="ctr"/>
           <a:lstStyle/>
           <a:p>
-            <a:pPr indent="0" marL="0">
+            <a:pPr marL="0" indent="0">
               <a:buNone/>
             </a:pPr>
             <a:r>
@@ -4694,6 +4599,13 @@
           </a:solidFill>
           <a:ln/>
         </p:spPr>
+        <p:txBody>
+          <a:bodyPr/>
+          <a:lstStyle/>
+          <a:p>
+            <a:endParaRPr lang="en-US"/>
+          </a:p>
+        </p:txBody>
       </p:sp>
       <p:sp>
         <p:nvSpPr>
@@ -4716,7 +4628,7 @@
           <a:bodyPr wrap="square" lIns="0" tIns="0" rIns="0" bIns="0" rtlCol="0" anchor="ctr"/>
           <a:lstStyle/>
           <a:p>
-            <a:pPr indent="0" marL="0">
+            <a:pPr marL="0" indent="0">
               <a:buNone/>
             </a:pPr>
             <a:r>
@@ -4755,7 +4667,7 @@
           <a:bodyPr wrap="square" lIns="0" tIns="0" rIns="0" bIns="0" rtlCol="0" anchor="ctr"/>
           <a:lstStyle/>
           <a:p>
-            <a:pPr indent="0" marL="0">
+            <a:pPr marL="0" indent="0">
               <a:buNone/>
             </a:pPr>
             <a:r>
@@ -4792,6 +4704,13 @@
           </a:solidFill>
           <a:ln/>
         </p:spPr>
+        <p:txBody>
+          <a:bodyPr/>
+          <a:lstStyle/>
+          <a:p>
+            <a:endParaRPr lang="en-US"/>
+          </a:p>
+        </p:txBody>
       </p:sp>
       <p:sp>
         <p:nvSpPr>
@@ -4814,7 +4733,7 @@
           <a:bodyPr wrap="square" lIns="0" tIns="0" rIns="0" bIns="0" rtlCol="0" anchor="ctr"/>
           <a:lstStyle/>
           <a:p>
-            <a:pPr indent="0" marL="0">
+            <a:pPr marL="0" indent="0">
               <a:buNone/>
             </a:pPr>
             <a:r>
@@ -4853,7 +4772,7 @@
           <a:bodyPr wrap="square" lIns="0" tIns="0" rIns="0" bIns="0" rtlCol="0" anchor="ctr"/>
           <a:lstStyle/>
           <a:p>
-            <a:pPr indent="0" marL="0">
+            <a:pPr marL="0" indent="0">
               <a:buNone/>
             </a:pPr>
             <a:r>
@@ -4892,7 +4811,7 @@
           <a:bodyPr wrap="square" lIns="0" tIns="0" rIns="0" bIns="0" rtlCol="0" anchor="ctr"/>
           <a:lstStyle/>
           <a:p>
-            <a:pPr algn="r" indent="0" marL="0">
+            <a:pPr marL="0" indent="0" algn="r">
               <a:buNone/>
             </a:pPr>
             <a:r>
@@ -4926,6 +4845,7 @@
         <a:solidFill>
           <a:srgbClr val="0B1929"/>
         </a:solidFill>
+        <a:effectLst/>
       </p:bgPr>
     </p:bg>
     <p:spTree>
@@ -4961,6 +4881,13 @@
           </a:solidFill>
           <a:ln/>
         </p:spPr>
+        <p:txBody>
+          <a:bodyPr/>
+          <a:lstStyle/>
+          <a:p>
+            <a:endParaRPr lang="en-US"/>
+          </a:p>
+        </p:txBody>
       </p:sp>
       <p:sp>
         <p:nvSpPr>
@@ -4983,7 +4910,7 @@
           <a:bodyPr wrap="square" lIns="0" tIns="0" rIns="0" bIns="0" rtlCol="0" anchor="ctr"/>
           <a:lstStyle/>
           <a:p>
-            <a:pPr indent="0" marL="0">
+            <a:pPr marL="0" indent="0">
               <a:buNone/>
             </a:pPr>
             <a:r>
@@ -5020,24 +4947,31 @@
           </a:solidFill>
           <a:ln/>
           <a:effectLst>
-            <a:outerShdw sx="100000" sy="100000" kx="0" ky="0" algn="bl" rotWithShape="0" blurRad="101600" dist="38100" dir="8100000">
+            <a:outerShdw blurRad="101600" dist="38100" dir="8100000" algn="bl" rotWithShape="0">
               <a:srgbClr val="000000">
                 <a:alpha val="25000"/>
               </a:srgbClr>
             </a:outerShdw>
           </a:effectLst>
         </p:spPr>
+        <p:txBody>
+          <a:bodyPr/>
+          <a:lstStyle/>
+          <a:p>
+            <a:endParaRPr lang="en-US"/>
+          </a:p>
+        </p:txBody>
       </p:sp>
       <p:pic>
         <p:nvPicPr>
-          <p:cNvPr id="5" name="Image 0" descr="preencoded.png">    </p:cNvPr>
+          <p:cNvPr id="5" name="Image 0" descr="preencoded.png"/>
           <p:cNvPicPr>
             <a:picLocks noChangeAspect="1"/>
           </p:cNvPicPr>
           <p:nvPr/>
         </p:nvPicPr>
         <p:blipFill>
-          <a:blip r:embed="rId1"/>
+          <a:blip r:embed="rId3"/>
           <a:stretch>
             <a:fillRect/>
           </a:stretch>
@@ -5073,7 +5007,7 @@
           <a:bodyPr wrap="square" lIns="0" tIns="0" rIns="0" bIns="0" rtlCol="0" anchor="ctr"/>
           <a:lstStyle/>
           <a:p>
-            <a:pPr indent="0" marL="0">
+            <a:pPr marL="0" indent="0">
               <a:buNone/>
             </a:pPr>
             <a:r>
@@ -5112,7 +5046,7 @@
           <a:bodyPr wrap="square" lIns="0" tIns="0" rIns="0" bIns="0" rtlCol="0" anchor="ctr"/>
           <a:lstStyle/>
           <a:p>
-            <a:pPr indent="0" marL="0">
+            <a:pPr marL="0" indent="0">
               <a:buNone/>
             </a:pPr>
             <a:r>
@@ -5151,7 +5085,7 @@
           <a:bodyPr wrap="square" lIns="0" tIns="0" rIns="0" bIns="0" rtlCol="0" anchor="ctr"/>
           <a:lstStyle/>
           <a:p>
-            <a:pPr indent="0" marL="0">
+            <a:pPr marL="0" indent="0">
               <a:buNone/>
             </a:pPr>
             <a:r>
@@ -5190,7 +5124,7 @@
           <a:bodyPr wrap="square" lIns="0" tIns="0" rIns="0" bIns="0" rtlCol="0" anchor="ctr"/>
           <a:lstStyle/>
           <a:p>
-            <a:pPr indent="0" marL="0">
+            <a:pPr marL="0" indent="0">
               <a:buNone/>
             </a:pPr>
             <a:r>
@@ -5229,7 +5163,7 @@
           <a:bodyPr wrap="square" lIns="0" tIns="0" rIns="0" bIns="0" rtlCol="0" anchor="ctr"/>
           <a:lstStyle/>
           <a:p>
-            <a:pPr indent="0" marL="0">
+            <a:pPr marL="0" indent="0">
               <a:buNone/>
             </a:pPr>
             <a:r>
@@ -5266,24 +5200,31 @@
           </a:solidFill>
           <a:ln/>
           <a:effectLst>
-            <a:outerShdw sx="100000" sy="100000" kx="0" ky="0" algn="bl" rotWithShape="0" blurRad="101600" dist="38100" dir="8100000">
+            <a:outerShdw blurRad="101600" dist="38100" dir="8100000" algn="bl" rotWithShape="0">
               <a:srgbClr val="000000">
                 <a:alpha val="25000"/>
               </a:srgbClr>
             </a:outerShdw>
           </a:effectLst>
         </p:spPr>
+        <p:txBody>
+          <a:bodyPr/>
+          <a:lstStyle/>
+          <a:p>
+            <a:endParaRPr lang="en-US"/>
+          </a:p>
+        </p:txBody>
       </p:sp>
       <p:pic>
         <p:nvPicPr>
-          <p:cNvPr id="12" name="Image 1" descr="preencoded.png">    </p:cNvPr>
+          <p:cNvPr id="12" name="Image 1" descr="preencoded.png"/>
           <p:cNvPicPr>
             <a:picLocks noChangeAspect="1"/>
           </p:cNvPicPr>
           <p:nvPr/>
         </p:nvPicPr>
         <p:blipFill>
-          <a:blip r:embed="rId2"/>
+          <a:blip r:embed="rId4"/>
           <a:stretch>
             <a:fillRect/>
           </a:stretch>
@@ -5319,7 +5260,7 @@
           <a:bodyPr wrap="square" lIns="0" tIns="0" rIns="0" bIns="0" rtlCol="0" anchor="ctr"/>
           <a:lstStyle/>
           <a:p>
-            <a:pPr indent="0" marL="0">
+            <a:pPr marL="0" indent="0">
               <a:buNone/>
             </a:pPr>
             <a:r>
@@ -5358,7 +5299,7 @@
           <a:bodyPr wrap="square" lIns="0" tIns="0" rIns="0" bIns="0" rtlCol="0" anchor="ctr"/>
           <a:lstStyle/>
           <a:p>
-            <a:pPr indent="0" marL="0">
+            <a:pPr marL="0" indent="0">
               <a:buNone/>
             </a:pPr>
             <a:r>
@@ -5397,7 +5338,7 @@
           <a:bodyPr wrap="square" lIns="0" tIns="0" rIns="0" bIns="0" rtlCol="0" anchor="ctr"/>
           <a:lstStyle/>
           <a:p>
-            <a:pPr indent="0" marL="0">
+            <a:pPr marL="0" indent="0">
               <a:buNone/>
             </a:pPr>
             <a:r>
@@ -5436,7 +5377,7 @@
           <a:bodyPr wrap="square" lIns="0" tIns="0" rIns="0" bIns="0" rtlCol="0" anchor="ctr"/>
           <a:lstStyle/>
           <a:p>
-            <a:pPr indent="0" marL="0">
+            <a:pPr marL="0" indent="0">
               <a:buNone/>
             </a:pPr>
             <a:r>
@@ -5475,7 +5416,7 @@
           <a:bodyPr wrap="square" lIns="0" tIns="0" rIns="0" bIns="0" rtlCol="0" anchor="ctr"/>
           <a:lstStyle/>
           <a:p>
-            <a:pPr indent="0" marL="0">
+            <a:pPr marL="0" indent="0">
               <a:buNone/>
             </a:pPr>
             <a:r>
@@ -5512,13 +5453,20 @@
           </a:solidFill>
           <a:ln/>
           <a:effectLst>
-            <a:outerShdw sx="100000" sy="100000" kx="0" ky="0" algn="bl" rotWithShape="0" blurRad="101600" dist="38100" dir="8100000">
+            <a:outerShdw blurRad="101600" dist="38100" dir="8100000" algn="bl" rotWithShape="0">
               <a:srgbClr val="000000">
                 <a:alpha val="25000"/>
               </a:srgbClr>
             </a:outerShdw>
           </a:effectLst>
         </p:spPr>
+        <p:txBody>
+          <a:bodyPr/>
+          <a:lstStyle/>
+          <a:p>
+            <a:endParaRPr lang="en-US"/>
+          </a:p>
+        </p:txBody>
       </p:sp>
       <p:sp>
         <p:nvSpPr>
@@ -5541,7 +5489,7 @@
           <a:bodyPr wrap="square" lIns="0" tIns="0" rIns="0" bIns="0" rtlCol="0" anchor="ctr"/>
           <a:lstStyle/>
           <a:p>
-            <a:pPr indent="0" marL="0">
+            <a:pPr marL="0" indent="0">
               <a:buNone/>
             </a:pPr>
             <a:r>
@@ -5580,7 +5528,7 @@
           <a:bodyPr wrap="square" lIns="0" tIns="0" rIns="0" bIns="0" rtlCol="0" anchor="ctr"/>
           <a:lstStyle/>
           <a:p>
-            <a:pPr indent="0" marL="0">
+            <a:pPr marL="0" indent="0">
               <a:buNone/>
             </a:pPr>
             <a:r>
@@ -5619,7 +5567,7 @@
           <a:bodyPr wrap="square" lIns="0" tIns="0" rIns="0" bIns="0" rtlCol="0" anchor="ctr"/>
           <a:lstStyle/>
           <a:p>
-            <a:pPr indent="0" marL="0">
+            <a:pPr marL="0" indent="0">
               <a:buNone/>
             </a:pPr>
             <a:r>
@@ -5658,7 +5606,7 @@
           <a:bodyPr wrap="square" lIns="0" tIns="0" rIns="0" bIns="0" rtlCol="0" anchor="ctr"/>
           <a:lstStyle/>
           <a:p>
-            <a:pPr indent="0" marL="0">
+            <a:pPr marL="0" indent="0">
               <a:buNone/>
             </a:pPr>
             <a:r>
@@ -5697,7 +5645,7 @@
           <a:bodyPr wrap="square" lIns="0" tIns="0" rIns="0" bIns="0" rtlCol="0" anchor="ctr"/>
           <a:lstStyle/>
           <a:p>
-            <a:pPr indent="0" marL="0">
+            <a:pPr marL="0" indent="0">
               <a:buNone/>
             </a:pPr>
             <a:r>
@@ -5736,7 +5684,7 @@
           <a:bodyPr wrap="square" lIns="0" tIns="0" rIns="0" bIns="0" rtlCol="0" anchor="ctr"/>
           <a:lstStyle/>
           <a:p>
-            <a:pPr indent="0" marL="0">
+            <a:pPr marL="0" indent="0">
               <a:buNone/>
             </a:pPr>
             <a:r>
@@ -5775,7 +5723,7 @@
           <a:bodyPr wrap="square" lIns="0" tIns="0" rIns="0" bIns="0" rtlCol="0" anchor="ctr"/>
           <a:lstStyle/>
           <a:p>
-            <a:pPr indent="0" marL="0">
+            <a:pPr marL="0" indent="0">
               <a:buNone/>
             </a:pPr>
             <a:r>
@@ -5814,7 +5762,7 @@
           <a:bodyPr wrap="square" lIns="0" tIns="0" rIns="0" bIns="0" rtlCol="0" anchor="ctr"/>
           <a:lstStyle/>
           <a:p>
-            <a:pPr indent="0" marL="0">
+            <a:pPr marL="0" indent="0">
               <a:buNone/>
             </a:pPr>
             <a:r>
@@ -5853,7 +5801,7 @@
           <a:bodyPr wrap="square" lIns="0" tIns="0" rIns="0" bIns="0" rtlCol="0" anchor="ctr"/>
           <a:lstStyle/>
           <a:p>
-            <a:pPr indent="0" marL="0">
+            <a:pPr marL="0" indent="0">
               <a:buNone/>
             </a:pPr>
             <a:r>
@@ -5892,7 +5840,7 @@
           <a:bodyPr wrap="square" lIns="0" tIns="0" rIns="0" bIns="0" rtlCol="0" anchor="ctr"/>
           <a:lstStyle/>
           <a:p>
-            <a:pPr algn="r" indent="0" marL="0">
+            <a:pPr marL="0" indent="0" algn="r">
               <a:buNone/>
             </a:pPr>
             <a:r>
@@ -5926,6 +5874,7 @@
         <a:solidFill>
           <a:srgbClr val="0B1929"/>
         </a:solidFill>
+        <a:effectLst/>
       </p:bgPr>
     </p:bg>
     <p:spTree>
@@ -5961,6 +5910,13 @@
           </a:solidFill>
           <a:ln/>
         </p:spPr>
+        <p:txBody>
+          <a:bodyPr/>
+          <a:lstStyle/>
+          <a:p>
+            <a:endParaRPr lang="en-US"/>
+          </a:p>
+        </p:txBody>
       </p:sp>
       <p:sp>
         <p:nvSpPr>
@@ -5983,7 +5939,7 @@
           <a:bodyPr wrap="square" lIns="0" tIns="0" rIns="0" bIns="0" rtlCol="0" anchor="ctr"/>
           <a:lstStyle/>
           <a:p>
-            <a:pPr indent="0" marL="0">
+            <a:pPr marL="0" indent="0">
               <a:buNone/>
             </a:pPr>
             <a:r>
@@ -6020,24 +5976,31 @@
           </a:solidFill>
           <a:ln/>
           <a:effectLst>
-            <a:outerShdw sx="100000" sy="100000" kx="0" ky="0" algn="bl" rotWithShape="0" blurRad="101600" dist="38100" dir="8100000">
+            <a:outerShdw blurRad="101600" dist="38100" dir="8100000" algn="bl" rotWithShape="0">
               <a:srgbClr val="000000">
                 <a:alpha val="25000"/>
               </a:srgbClr>
             </a:outerShdw>
           </a:effectLst>
         </p:spPr>
+        <p:txBody>
+          <a:bodyPr/>
+          <a:lstStyle/>
+          <a:p>
+            <a:endParaRPr lang="en-US"/>
+          </a:p>
+        </p:txBody>
       </p:sp>
       <p:pic>
         <p:nvPicPr>
-          <p:cNvPr id="5" name="Image 0" descr="preencoded.png">    </p:cNvPr>
+          <p:cNvPr id="5" name="Image 0" descr="preencoded.png"/>
           <p:cNvPicPr>
             <a:picLocks noChangeAspect="1"/>
           </p:cNvPicPr>
           <p:nvPr/>
         </p:nvPicPr>
         <p:blipFill>
-          <a:blip r:embed="rId1"/>
+          <a:blip r:embed="rId3"/>
           <a:stretch>
             <a:fillRect/>
           </a:stretch>
@@ -6073,7 +6036,7 @@
           <a:bodyPr wrap="square" lIns="0" tIns="0" rIns="0" bIns="0" rtlCol="0" anchor="ctr"/>
           <a:lstStyle/>
           <a:p>
-            <a:pPr indent="0" marL="0">
+            <a:pPr marL="0" indent="0">
               <a:buNone/>
             </a:pPr>
             <a:r>
@@ -6112,7 +6075,7 @@
           <a:bodyPr wrap="square" lIns="0" tIns="0" rIns="0" bIns="0" rtlCol="0" anchor="ctr"/>
           <a:lstStyle/>
           <a:p>
-            <a:pPr indent="0" marL="0">
+            <a:pPr marL="0" indent="0">
               <a:buNone/>
             </a:pPr>
             <a:r>
@@ -6151,7 +6114,7 @@
           <a:bodyPr wrap="square" lIns="0" tIns="0" rIns="0" bIns="0" rtlCol="0" anchor="ctr"/>
           <a:lstStyle/>
           <a:p>
-            <a:pPr indent="0" marL="0">
+            <a:pPr marL="0" indent="0">
               <a:buNone/>
             </a:pPr>
             <a:r>
@@ -6190,7 +6153,7 @@
           <a:bodyPr wrap="square" lIns="0" tIns="0" rIns="0" bIns="0" rtlCol="0" anchor="ctr"/>
           <a:lstStyle/>
           <a:p>
-            <a:pPr indent="0" marL="0">
+            <a:pPr marL="0" indent="0">
               <a:buNone/>
             </a:pPr>
             <a:r>
@@ -6229,7 +6192,7 @@
           <a:bodyPr wrap="square" lIns="0" tIns="0" rIns="0" bIns="0" rtlCol="0" anchor="ctr"/>
           <a:lstStyle/>
           <a:p>
-            <a:pPr indent="0" marL="0">
+            <a:pPr marL="0" indent="0">
               <a:buNone/>
             </a:pPr>
             <a:r>
@@ -6268,7 +6231,7 @@
           <a:bodyPr wrap="square" lIns="0" tIns="0" rIns="0" bIns="0" rtlCol="0" anchor="ctr"/>
           <a:lstStyle/>
           <a:p>
-            <a:pPr indent="0" marL="0">
+            <a:pPr marL="0" indent="0">
               <a:buNone/>
             </a:pPr>
             <a:r>
@@ -6307,7 +6270,7 @@
           <a:bodyPr wrap="square" lIns="0" tIns="0" rIns="0" bIns="0" rtlCol="0" anchor="ctr"/>
           <a:lstStyle/>
           <a:p>
-            <a:pPr indent="0" marL="0">
+            <a:pPr marL="0" indent="0">
               <a:buNone/>
             </a:pPr>
             <a:r>
@@ -6346,7 +6309,7 @@
           <a:bodyPr wrap="square" lIns="0" tIns="0" rIns="0" bIns="0" rtlCol="0" anchor="ctr"/>
           <a:lstStyle/>
           <a:p>
-            <a:pPr indent="0" marL="0">
+            <a:pPr marL="0" indent="0">
               <a:buNone/>
             </a:pPr>
             <a:r>
@@ -6385,7 +6348,7 @@
           <a:bodyPr wrap="square" lIns="0" tIns="0" rIns="0" bIns="0" rtlCol="0" anchor="ctr"/>
           <a:lstStyle/>
           <a:p>
-            <a:pPr indent="0" marL="0">
+            <a:pPr marL="0" indent="0">
               <a:buNone/>
             </a:pPr>
             <a:r>
@@ -6422,24 +6385,31 @@
           </a:solidFill>
           <a:ln/>
           <a:effectLst>
-            <a:outerShdw sx="100000" sy="100000" kx="0" ky="0" algn="bl" rotWithShape="0" blurRad="101600" dist="38100" dir="8100000">
+            <a:outerShdw blurRad="101600" dist="38100" dir="8100000" algn="bl" rotWithShape="0">
               <a:srgbClr val="000000">
                 <a:alpha val="25000"/>
               </a:srgbClr>
             </a:outerShdw>
           </a:effectLst>
         </p:spPr>
+        <p:txBody>
+          <a:bodyPr/>
+          <a:lstStyle/>
+          <a:p>
+            <a:endParaRPr lang="en-US"/>
+          </a:p>
+        </p:txBody>
       </p:sp>
       <p:pic>
         <p:nvPicPr>
-          <p:cNvPr id="16" name="Image 1" descr="preencoded.png">    </p:cNvPr>
+          <p:cNvPr id="16" name="Image 1" descr="preencoded.png"/>
           <p:cNvPicPr>
             <a:picLocks noChangeAspect="1"/>
           </p:cNvPicPr>
           <p:nvPr/>
         </p:nvPicPr>
         <p:blipFill>
-          <a:blip r:embed="rId2"/>
+          <a:blip r:embed="rId4"/>
           <a:stretch>
             <a:fillRect/>
           </a:stretch>
@@ -6475,7 +6445,7 @@
           <a:bodyPr wrap="square" lIns="0" tIns="0" rIns="0" bIns="0" rtlCol="0" anchor="ctr"/>
           <a:lstStyle/>
           <a:p>
-            <a:pPr indent="0" marL="0">
+            <a:pPr marL="0" indent="0">
               <a:buNone/>
             </a:pPr>
             <a:r>
@@ -6514,7 +6484,7 @@
           <a:bodyPr wrap="square" lIns="0" tIns="0" rIns="0" bIns="0" rtlCol="0" anchor="ctr"/>
           <a:lstStyle/>
           <a:p>
-            <a:pPr indent="0" marL="0">
+            <a:pPr marL="0" indent="0">
               <a:buNone/>
             </a:pPr>
             <a:r>
@@ -6553,7 +6523,7 @@
           <a:bodyPr wrap="square" lIns="0" tIns="0" rIns="0" bIns="0" rtlCol="0" anchor="ctr"/>
           <a:lstStyle/>
           <a:p>
-            <a:pPr indent="0" marL="0">
+            <a:pPr marL="0" indent="0">
               <a:buNone/>
             </a:pPr>
             <a:r>
@@ -6592,7 +6562,7 @@
           <a:bodyPr wrap="square" lIns="0" tIns="0" rIns="0" bIns="0" rtlCol="0" anchor="ctr"/>
           <a:lstStyle/>
           <a:p>
-            <a:pPr indent="0" marL="0">
+            <a:pPr marL="0" indent="0">
               <a:buNone/>
             </a:pPr>
             <a:r>
@@ -6631,7 +6601,7 @@
           <a:bodyPr wrap="square" lIns="0" tIns="0" rIns="0" bIns="0" rtlCol="0" anchor="ctr"/>
           <a:lstStyle/>
           <a:p>
-            <a:pPr indent="0" marL="0">
+            <a:pPr marL="0" indent="0">
               <a:buNone/>
             </a:pPr>
             <a:r>
@@ -6670,7 +6640,7 @@
           <a:bodyPr wrap="square" lIns="0" tIns="0" rIns="0" bIns="0" rtlCol="0" anchor="ctr"/>
           <a:lstStyle/>
           <a:p>
-            <a:pPr indent="0" marL="0">
+            <a:pPr marL="0" indent="0">
               <a:buNone/>
             </a:pPr>
             <a:r>
@@ -6709,7 +6679,7 @@
           <a:bodyPr wrap="square" lIns="0" tIns="0" rIns="0" bIns="0" rtlCol="0" anchor="ctr"/>
           <a:lstStyle/>
           <a:p>
-            <a:pPr indent="0" marL="0">
+            <a:pPr marL="0" indent="0">
               <a:buNone/>
             </a:pPr>
             <a:r>
@@ -6748,7 +6718,7 @@
           <a:bodyPr wrap="square" lIns="0" tIns="0" rIns="0" bIns="0" rtlCol="0" anchor="ctr"/>
           <a:lstStyle/>
           <a:p>
-            <a:pPr indent="0" marL="0">
+            <a:pPr marL="0" indent="0">
               <a:buNone/>
             </a:pPr>
             <a:r>
@@ -6787,7 +6757,7 @@
           <a:bodyPr wrap="square" lIns="0" tIns="0" rIns="0" bIns="0" rtlCol="0" anchor="ctr"/>
           <a:lstStyle/>
           <a:p>
-            <a:pPr indent="0" marL="0">
+            <a:pPr marL="0" indent="0">
               <a:buNone/>
             </a:pPr>
             <a:r>
@@ -6826,7 +6796,7 @@
           <a:bodyPr wrap="square" lIns="0" tIns="0" rIns="0" bIns="0" rtlCol="0" anchor="ctr"/>
           <a:lstStyle/>
           <a:p>
-            <a:pPr algn="r" indent="0" marL="0">
+            <a:pPr marL="0" indent="0" algn="r">
               <a:buNone/>
             </a:pPr>
             <a:r>
@@ -6860,6 +6830,7 @@
         <a:solidFill>
           <a:srgbClr val="0B1929"/>
         </a:solidFill>
+        <a:effectLst/>
       </p:bgPr>
     </p:bg>
     <p:spTree>
@@ -6895,6 +6866,13 @@
           </a:solidFill>
           <a:ln/>
         </p:spPr>
+        <p:txBody>
+          <a:bodyPr/>
+          <a:lstStyle/>
+          <a:p>
+            <a:endParaRPr lang="en-US"/>
+          </a:p>
+        </p:txBody>
       </p:sp>
       <p:sp>
         <p:nvSpPr>
@@ -6917,7 +6895,7 @@
           <a:bodyPr wrap="square" lIns="0" tIns="0" rIns="0" bIns="0" rtlCol="0" anchor="ctr"/>
           <a:lstStyle/>
           <a:p>
-            <a:pPr indent="0" marL="0">
+            <a:pPr marL="0" indent="0">
               <a:buNone/>
             </a:pPr>
             <a:r>
@@ -6954,13 +6932,20 @@
           </a:solidFill>
           <a:ln/>
           <a:effectLst>
-            <a:outerShdw sx="100000" sy="100000" kx="0" ky="0" algn="bl" rotWithShape="0" blurRad="101600" dist="38100" dir="8100000">
+            <a:outerShdw blurRad="101600" dist="38100" dir="8100000" algn="bl" rotWithShape="0">
               <a:srgbClr val="000000">
                 <a:alpha val="25000"/>
               </a:srgbClr>
             </a:outerShdw>
           </a:effectLst>
         </p:spPr>
+        <p:txBody>
+          <a:bodyPr/>
+          <a:lstStyle/>
+          <a:p>
+            <a:endParaRPr lang="en-US"/>
+          </a:p>
+        </p:txBody>
       </p:sp>
       <p:sp>
         <p:nvSpPr>
@@ -6983,7 +6968,7 @@
           <a:bodyPr wrap="square" lIns="0" tIns="0" rIns="0" bIns="0" rtlCol="0" anchor="ctr"/>
           <a:lstStyle/>
           <a:p>
-            <a:pPr indent="0" marL="0">
+            <a:pPr marL="0" indent="0">
               <a:buNone/>
             </a:pPr>
             <a:r>
@@ -7022,7 +7007,7 @@
           <a:bodyPr wrap="square" lIns="0" tIns="0" rIns="0" bIns="0" rtlCol="0" anchor="ctr"/>
           <a:lstStyle/>
           <a:p>
-            <a:pPr indent="0" marL="0">
+            <a:pPr marL="0" indent="0">
               <a:buNone/>
             </a:pPr>
             <a:r>
@@ -7061,7 +7046,7 @@
           <a:bodyPr wrap="square" lIns="0" tIns="0" rIns="0" bIns="0" rtlCol="0" anchor="ctr"/>
           <a:lstStyle/>
           <a:p>
-            <a:pPr indent="0" marL="0">
+            <a:pPr marL="0" indent="0">
               <a:buNone/>
             </a:pPr>
             <a:r>
@@ -7100,7 +7085,7 @@
           <a:bodyPr wrap="square" lIns="0" tIns="0" rIns="0" bIns="0" rtlCol="0" anchor="ctr"/>
           <a:lstStyle/>
           <a:p>
-            <a:pPr indent="0" marL="0">
+            <a:pPr marL="0" indent="0">
               <a:buNone/>
             </a:pPr>
             <a:r>
@@ -7139,7 +7124,7 @@
           <a:bodyPr wrap="square" lIns="0" tIns="0" rIns="0" bIns="0" rtlCol="0" anchor="ctr"/>
           <a:lstStyle/>
           <a:p>
-            <a:pPr indent="0" marL="0">
+            <a:pPr marL="0" indent="0">
               <a:buNone/>
             </a:pPr>
             <a:r>
@@ -7178,7 +7163,7 @@
           <a:bodyPr wrap="square" lIns="0" tIns="0" rIns="0" bIns="0" rtlCol="0" anchor="ctr"/>
           <a:lstStyle/>
           <a:p>
-            <a:pPr indent="0" marL="0">
+            <a:pPr marL="0" indent="0">
               <a:buNone/>
             </a:pPr>
             <a:r>
@@ -7217,7 +7202,7 @@
           <a:bodyPr wrap="square" lIns="0" tIns="0" rIns="0" bIns="0" rtlCol="0" anchor="ctr"/>
           <a:lstStyle/>
           <a:p>
-            <a:pPr indent="0" marL="0">
+            <a:pPr marL="0" indent="0">
               <a:buNone/>
             </a:pPr>
             <a:r>
@@ -7254,13 +7239,20 @@
           </a:solidFill>
           <a:ln/>
           <a:effectLst>
-            <a:outerShdw sx="100000" sy="100000" kx="0" ky="0" algn="bl" rotWithShape="0" blurRad="101600" dist="38100" dir="8100000">
+            <a:outerShdw blurRad="101600" dist="38100" dir="8100000" algn="bl" rotWithShape="0">
               <a:srgbClr val="000000">
                 <a:alpha val="25000"/>
               </a:srgbClr>
             </a:outerShdw>
           </a:effectLst>
         </p:spPr>
+        <p:txBody>
+          <a:bodyPr/>
+          <a:lstStyle/>
+          <a:p>
+            <a:endParaRPr lang="en-US"/>
+          </a:p>
+        </p:txBody>
       </p:sp>
       <p:sp>
         <p:nvSpPr>
@@ -7283,7 +7275,7 @@
           <a:bodyPr wrap="square" lIns="0" tIns="0" rIns="0" bIns="0" rtlCol="0" anchor="ctr"/>
           <a:lstStyle/>
           <a:p>
-            <a:pPr indent="0" marL="0">
+            <a:pPr marL="0" indent="0">
               <a:buNone/>
             </a:pPr>
             <a:r>
@@ -7322,7 +7314,7 @@
           <a:bodyPr wrap="square" lIns="0" tIns="0" rIns="0" bIns="0" rtlCol="0" anchor="ctr"/>
           <a:lstStyle/>
           <a:p>
-            <a:pPr indent="0" marL="0">
+            <a:pPr marL="0" indent="0">
               <a:buNone/>
             </a:pPr>
             <a:r>
@@ -7361,7 +7353,7 @@
           <a:bodyPr wrap="square" lIns="0" tIns="0" rIns="0" bIns="0" rtlCol="0" anchor="ctr"/>
           <a:lstStyle/>
           <a:p>
-            <a:pPr indent="0" marL="0">
+            <a:pPr marL="0" indent="0">
               <a:buNone/>
             </a:pPr>
             <a:r>
@@ -7400,7 +7392,7 @@
           <a:bodyPr wrap="square" lIns="0" tIns="0" rIns="0" bIns="0" rtlCol="0" anchor="ctr"/>
           <a:lstStyle/>
           <a:p>
-            <a:pPr indent="0" marL="0">
+            <a:pPr marL="0" indent="0">
               <a:buNone/>
             </a:pPr>
             <a:r>
@@ -7439,7 +7431,7 @@
           <a:bodyPr wrap="square" lIns="0" tIns="0" rIns="0" bIns="0" rtlCol="0" anchor="ctr"/>
           <a:lstStyle/>
           <a:p>
-            <a:pPr indent="0" marL="0">
+            <a:pPr marL="0" indent="0">
               <a:buNone/>
             </a:pPr>
             <a:r>
@@ -7478,7 +7470,7 @@
           <a:bodyPr wrap="square" lIns="0" tIns="0" rIns="0" bIns="0" rtlCol="0" anchor="ctr"/>
           <a:lstStyle/>
           <a:p>
-            <a:pPr indent="0" marL="0">
+            <a:pPr marL="0" indent="0">
               <a:buNone/>
             </a:pPr>
             <a:r>
@@ -7517,7 +7509,7 @@
           <a:bodyPr wrap="square" lIns="0" tIns="0" rIns="0" bIns="0" rtlCol="0" anchor="ctr"/>
           <a:lstStyle/>
           <a:p>
-            <a:pPr indent="0" marL="0">
+            <a:pPr marL="0" indent="0">
               <a:buNone/>
             </a:pPr>
             <a:r>
@@ -7556,7 +7548,7 @@
           <a:bodyPr wrap="square" lIns="0" tIns="0" rIns="0" bIns="0" rtlCol="0" anchor="ctr"/>
           <a:lstStyle/>
           <a:p>
-            <a:pPr indent="0" marL="0">
+            <a:pPr marL="0" indent="0">
               <a:buNone/>
             </a:pPr>
             <a:r>
@@ -7593,13 +7585,20 @@
           </a:solidFill>
           <a:ln/>
           <a:effectLst>
-            <a:outerShdw sx="100000" sy="100000" kx="0" ky="0" algn="bl" rotWithShape="0" blurRad="101600" dist="38100" dir="8100000">
+            <a:outerShdw blurRad="101600" dist="38100" dir="8100000" algn="bl" rotWithShape="0">
               <a:srgbClr val="000000">
                 <a:alpha val="25000"/>
               </a:srgbClr>
             </a:outerShdw>
           </a:effectLst>
         </p:spPr>
+        <p:txBody>
+          <a:bodyPr/>
+          <a:lstStyle/>
+          <a:p>
+            <a:endParaRPr lang="en-US"/>
+          </a:p>
+        </p:txBody>
       </p:sp>
       <p:sp>
         <p:nvSpPr>
@@ -7622,7 +7621,7 @@
           <a:bodyPr wrap="square" lIns="0" tIns="0" rIns="0" bIns="0" rtlCol="0" anchor="ctr"/>
           <a:lstStyle/>
           <a:p>
-            <a:pPr indent="0" marL="0">
+            <a:pPr marL="0" indent="0">
               <a:buNone/>
             </a:pPr>
             <a:r>
@@ -7659,288 +7658,17 @@
           </a:solidFill>
           <a:ln/>
         </p:spPr>
+        <p:txBody>
+          <a:bodyPr/>
+          <a:lstStyle/>
+          <a:p>
+            <a:endParaRPr lang="en-US"/>
+          </a:p>
+        </p:txBody>
       </p:sp>
       <p:pic>
         <p:nvPicPr>
-          <p:cNvPr id="24" name="Image 0" descr="preencoded.png">    </p:cNvPr>
-          <p:cNvPicPr>
-            <a:picLocks noChangeAspect="1"/>
-          </p:cNvPicPr>
-          <p:nvPr/>
-        </p:nvPicPr>
-        <p:blipFill>
-          <a:blip r:embed="rId1"/>
-          <a:stretch>
-            <a:fillRect/>
-          </a:stretch>
-        </p:blipFill>
-        <p:spPr>
-          <a:xfrm>
-            <a:off x="1280160" y="3346704"/>
-            <a:ext cx="292608" cy="292608"/>
-          </a:xfrm>
-          <a:prstGeom prst="rect">
-            <a:avLst/>
-          </a:prstGeom>
-        </p:spPr>
-      </p:pic>
-      <p:sp>
-        <p:nvSpPr>
-          <p:cNvPr id="25" name="Text 22"/>
-          <p:cNvSpPr/>
-          <p:nvPr/>
-        </p:nvSpPr>
-        <p:spPr>
-          <a:xfrm>
-            <a:off x="822960" y="3657600"/>
-            <a:ext cx="1325880" cy="182880"/>
-          </a:xfrm>
-          <a:prstGeom prst="rect">
-            <a:avLst/>
-          </a:prstGeom>
-          <a:noFill/>
-          <a:ln/>
-        </p:spPr>
-        <p:txBody>
-          <a:bodyPr wrap="square" lIns="0" tIns="0" rIns="0" bIns="0" rtlCol="0" anchor="ctr"/>
-          <a:lstStyle/>
-          <a:p>
-            <a:pPr algn="ctr" indent="0" marL="0">
-              <a:buNone/>
-            </a:pPr>
-            <a:r>
-              <a:rPr lang="en-US" sz="1000" b="1" dirty="0">
-                <a:solidFill>
-                  <a:srgbClr val="00A896"/>
-                </a:solidFill>
-                <a:latin typeface="Trebuchet MS" pitchFamily="34" charset="0"/>
-                <a:ea typeface="Trebuchet MS" pitchFamily="34" charset="-122"/>
-                <a:cs typeface="Trebuchet MS" pitchFamily="34" charset="-120"/>
-              </a:rPr>
-              <a:t>Labs</a:t>
-            </a:r>
-            <a:endParaRPr lang="en-US" sz="1000" dirty="0"/>
-          </a:p>
-        </p:txBody>
-      </p:sp>
-      <p:sp>
-        <p:nvSpPr>
-          <p:cNvPr id="26" name="Text 23"/>
-          <p:cNvSpPr/>
-          <p:nvPr/>
-        </p:nvSpPr>
-        <p:spPr>
-          <a:xfrm>
-            <a:off x="822960" y="3840480"/>
-            <a:ext cx="1325880" cy="320040"/>
-          </a:xfrm>
-          <a:prstGeom prst="rect">
-            <a:avLst/>
-          </a:prstGeom>
-          <a:noFill/>
-          <a:ln/>
-        </p:spPr>
-        <p:txBody>
-          <a:bodyPr wrap="square" lIns="0" tIns="0" rIns="0" bIns="0" rtlCol="0" anchor="ctr"/>
-          <a:lstStyle/>
-          <a:p>
-            <a:pPr algn="ctr" indent="0" marL="0">
-              <a:buNone/>
-            </a:pPr>
-            <a:r>
-              <a:rPr lang="en-US" sz="800" dirty="0">
-                <a:solidFill>
-                  <a:srgbClr val="8A9BB0"/>
-                </a:solidFill>
-                <a:latin typeface="Calibri" pitchFamily="34" charset="0"/>
-                <a:ea typeface="Calibri" pitchFamily="34" charset="-122"/>
-                <a:cs typeface="Calibri" pitchFamily="34" charset="-120"/>
-              </a:rPr>
-              <a:t>Sodium, Creatinine,</a:t>
-            </a:r>
-            <a:endParaRPr lang="en-US" sz="800" dirty="0"/>
-          </a:p>
-          <a:p>
-            <a:pPr algn="ctr" indent="0" marL="0">
-              <a:buNone/>
-            </a:pPr>
-            <a:r>
-              <a:rPr lang="en-US" sz="800" dirty="0">
-                <a:solidFill>
-                  <a:srgbClr val="8A9BB0"/>
-                </a:solidFill>
-                <a:latin typeface="Calibri" pitchFamily="34" charset="0"/>
-                <a:ea typeface="Calibri" pitchFamily="34" charset="-122"/>
-                <a:cs typeface="Calibri" pitchFamily="34" charset="-120"/>
-              </a:rPr>
-              <a:t>eGFR, Glucose...</a:t>
-            </a:r>
-            <a:endParaRPr lang="en-US" sz="800" dirty="0"/>
-          </a:p>
-        </p:txBody>
-      </p:sp>
-      <p:sp>
-        <p:nvSpPr>
-          <p:cNvPr id="27" name="Shape 24"/>
-          <p:cNvSpPr/>
-          <p:nvPr/>
-        </p:nvSpPr>
-        <p:spPr>
-          <a:xfrm>
-            <a:off x="2386584" y="3291840"/>
-            <a:ext cx="1417320" cy="914400"/>
-          </a:xfrm>
-          <a:prstGeom prst="rect">
-            <a:avLst/>
-          </a:prstGeom>
-          <a:solidFill>
-            <a:srgbClr val="0F2135"/>
-          </a:solidFill>
-          <a:ln/>
-        </p:spPr>
-      </p:sp>
-      <p:pic>
-        <p:nvPicPr>
-          <p:cNvPr id="28" name="Image 1" descr="preencoded.png">    </p:cNvPr>
-          <p:cNvPicPr>
-            <a:picLocks noChangeAspect="1"/>
-          </p:cNvPicPr>
-          <p:nvPr/>
-        </p:nvPicPr>
-        <p:blipFill>
-          <a:blip r:embed="rId2"/>
-          <a:stretch>
-            <a:fillRect/>
-          </a:stretch>
-        </p:blipFill>
-        <p:spPr>
-          <a:xfrm>
-            <a:off x="2889504" y="3346704"/>
-            <a:ext cx="292608" cy="292608"/>
-          </a:xfrm>
-          <a:prstGeom prst="rect">
-            <a:avLst/>
-          </a:prstGeom>
-        </p:spPr>
-      </p:pic>
-      <p:sp>
-        <p:nvSpPr>
-          <p:cNvPr id="29" name="Text 25"/>
-          <p:cNvSpPr/>
-          <p:nvPr/>
-        </p:nvSpPr>
-        <p:spPr>
-          <a:xfrm>
-            <a:off x="2432304" y="3657600"/>
-            <a:ext cx="1325880" cy="182880"/>
-          </a:xfrm>
-          <a:prstGeom prst="rect">
-            <a:avLst/>
-          </a:prstGeom>
-          <a:noFill/>
-          <a:ln/>
-        </p:spPr>
-        <p:txBody>
-          <a:bodyPr wrap="square" lIns="0" tIns="0" rIns="0" bIns="0" rtlCol="0" anchor="ctr"/>
-          <a:lstStyle/>
-          <a:p>
-            <a:pPr algn="ctr" indent="0" marL="0">
-              <a:buNone/>
-            </a:pPr>
-            <a:r>
-              <a:rPr lang="en-US" sz="1000" b="1" dirty="0">
-                <a:solidFill>
-                  <a:srgbClr val="00A896"/>
-                </a:solidFill>
-                <a:latin typeface="Trebuchet MS" pitchFamily="34" charset="0"/>
-                <a:ea typeface="Trebuchet MS" pitchFamily="34" charset="-122"/>
-                <a:cs typeface="Trebuchet MS" pitchFamily="34" charset="-120"/>
-              </a:rPr>
-              <a:t>Devices</a:t>
-            </a:r>
-            <a:endParaRPr lang="en-US" sz="1000" dirty="0"/>
-          </a:p>
-        </p:txBody>
-      </p:sp>
-      <p:sp>
-        <p:nvSpPr>
-          <p:cNvPr id="30" name="Text 26"/>
-          <p:cNvSpPr/>
-          <p:nvPr/>
-        </p:nvSpPr>
-        <p:spPr>
-          <a:xfrm>
-            <a:off x="2432304" y="3840480"/>
-            <a:ext cx="1325880" cy="320040"/>
-          </a:xfrm>
-          <a:prstGeom prst="rect">
-            <a:avLst/>
-          </a:prstGeom>
-          <a:noFill/>
-          <a:ln/>
-        </p:spPr>
-        <p:txBody>
-          <a:bodyPr wrap="square" lIns="0" tIns="0" rIns="0" bIns="0" rtlCol="0" anchor="ctr"/>
-          <a:lstStyle/>
-          <a:p>
-            <a:pPr algn="ctr" indent="0" marL="0">
-              <a:buNone/>
-            </a:pPr>
-            <a:r>
-              <a:rPr lang="en-US" sz="800" dirty="0">
-                <a:solidFill>
-                  <a:srgbClr val="8A9BB0"/>
-                </a:solidFill>
-                <a:latin typeface="Calibri" pitchFamily="34" charset="0"/>
-                <a:ea typeface="Calibri" pitchFamily="34" charset="-122"/>
-                <a:cs typeface="Calibri" pitchFamily="34" charset="-120"/>
-              </a:rPr>
-              <a:t>Movement index,</a:t>
-            </a:r>
-            <a:endParaRPr lang="en-US" sz="800" dirty="0"/>
-          </a:p>
-          <a:p>
-            <a:pPr algn="ctr" indent="0" marL="0">
-              <a:buNone/>
-            </a:pPr>
-            <a:r>
-              <a:rPr lang="en-US" sz="800" dirty="0">
-                <a:solidFill>
-                  <a:srgbClr val="8A9BB0"/>
-                </a:solidFill>
-                <a:latin typeface="Calibri" pitchFamily="34" charset="0"/>
-                <a:ea typeface="Calibri" pitchFamily="34" charset="-122"/>
-                <a:cs typeface="Calibri" pitchFamily="34" charset="-120"/>
-              </a:rPr>
-              <a:t>fall events, bed exits</a:t>
-            </a:r>
-            <a:endParaRPr lang="en-US" sz="800" dirty="0"/>
-          </a:p>
-        </p:txBody>
-      </p:sp>
-      <p:sp>
-        <p:nvSpPr>
-          <p:cNvPr id="31" name="Shape 27"/>
-          <p:cNvSpPr/>
-          <p:nvPr/>
-        </p:nvSpPr>
-        <p:spPr>
-          <a:xfrm>
-            <a:off x="3995928" y="3291840"/>
-            <a:ext cx="1417320" cy="914400"/>
-          </a:xfrm>
-          <a:prstGeom prst="rect">
-            <a:avLst/>
-          </a:prstGeom>
-          <a:solidFill>
-            <a:srgbClr val="0F2135"/>
-          </a:solidFill>
-          <a:ln/>
-        </p:spPr>
-      </p:sp>
-      <p:pic>
-        <p:nvPicPr>
-          <p:cNvPr id="32" name="Image 2" descr="preencoded.png">    </p:cNvPr>
+          <p:cNvPr id="24" name="Image 0" descr="preencoded.png"/>
           <p:cNvPicPr>
             <a:picLocks noChangeAspect="1"/>
           </p:cNvPicPr>
@@ -7954,7 +7682,7 @@
         </p:blipFill>
         <p:spPr>
           <a:xfrm>
-            <a:off x="4498848" y="3346704"/>
+            <a:off x="1280160" y="3346704"/>
             <a:ext cx="292608" cy="292608"/>
           </a:xfrm>
           <a:prstGeom prst="rect">
@@ -7964,13 +7692,13 @@
       </p:pic>
       <p:sp>
         <p:nvSpPr>
-          <p:cNvPr id="33" name="Text 28"/>
-          <p:cNvSpPr/>
-          <p:nvPr/>
-        </p:nvSpPr>
-        <p:spPr>
-          <a:xfrm>
-            <a:off x="4041648" y="3657600"/>
+          <p:cNvPr id="25" name="Text 22"/>
+          <p:cNvSpPr/>
+          <p:nvPr/>
+        </p:nvSpPr>
+        <p:spPr>
+          <a:xfrm>
+            <a:off x="822960" y="3657600"/>
             <a:ext cx="1325880" cy="182880"/>
           </a:xfrm>
           <a:prstGeom prst="rect">
@@ -7983,7 +7711,7 @@
           <a:bodyPr wrap="square" lIns="0" tIns="0" rIns="0" bIns="0" rtlCol="0" anchor="ctr"/>
           <a:lstStyle/>
           <a:p>
-            <a:pPr algn="ctr" indent="0" marL="0">
+            <a:pPr marL="0" indent="0" algn="ctr">
               <a:buNone/>
             </a:pPr>
             <a:r>
@@ -7995,7 +7723,7 @@
                 <a:ea typeface="Trebuchet MS" pitchFamily="34" charset="-122"/>
                 <a:cs typeface="Trebuchet MS" pitchFamily="34" charset="-120"/>
               </a:rPr>
-              <a:t>Meds</a:t>
+              <a:t>Labs</a:t>
             </a:r>
             <a:endParaRPr lang="en-US" sz="1000" dirty="0"/>
           </a:p>
@@ -8003,13 +7731,13 @@
       </p:sp>
       <p:sp>
         <p:nvSpPr>
-          <p:cNvPr id="34" name="Text 29"/>
-          <p:cNvSpPr/>
-          <p:nvPr/>
-        </p:nvSpPr>
-        <p:spPr>
-          <a:xfrm>
-            <a:off x="4041648" y="3840480"/>
+          <p:cNvPr id="26" name="Text 23"/>
+          <p:cNvSpPr/>
+          <p:nvPr/>
+        </p:nvSpPr>
+        <p:spPr>
+          <a:xfrm>
+            <a:off x="822960" y="3840480"/>
             <a:ext cx="1325880" cy="320040"/>
           </a:xfrm>
           <a:prstGeom prst="rect">
@@ -8022,7 +7750,7 @@
           <a:bodyPr wrap="square" lIns="0" tIns="0" rIns="0" bIns="0" rtlCol="0" anchor="ctr"/>
           <a:lstStyle/>
           <a:p>
-            <a:pPr algn="ctr" indent="0" marL="0">
+            <a:pPr marL="0" indent="0" algn="ctr">
               <a:buNone/>
             </a:pPr>
             <a:r>
@@ -8034,12 +7762,12 @@
                 <a:ea typeface="Calibri" pitchFamily="34" charset="-122"/>
                 <a:cs typeface="Calibri" pitchFamily="34" charset="-120"/>
               </a:rPr>
-              <a:t>Orders, doses,</a:t>
+              <a:t>Sodium, Creatinine,</a:t>
             </a:r>
             <a:endParaRPr lang="en-US" sz="800" dirty="0"/>
           </a:p>
           <a:p>
-            <a:pPr algn="ctr" indent="0" marL="0">
+            <a:pPr marL="0" indent="0" algn="ctr">
               <a:buNone/>
             </a:pPr>
             <a:r>
@@ -8051,7 +7779,7 @@
                 <a:ea typeface="Calibri" pitchFamily="34" charset="-122"/>
                 <a:cs typeface="Calibri" pitchFamily="34" charset="-120"/>
               </a:rPr>
-              <a:t>administration status</a:t>
+              <a:t>eGFR, Glucose...</a:t>
             </a:r>
             <a:endParaRPr lang="en-US" sz="800" dirty="0"/>
           </a:p>
@@ -8059,13 +7787,13 @@
       </p:sp>
       <p:sp>
         <p:nvSpPr>
-          <p:cNvPr id="35" name="Shape 30"/>
-          <p:cNvSpPr/>
-          <p:nvPr/>
-        </p:nvSpPr>
-        <p:spPr>
-          <a:xfrm>
-            <a:off x="5605272" y="3291840"/>
+          <p:cNvPr id="27" name="Shape 24"/>
+          <p:cNvSpPr/>
+          <p:nvPr/>
+        </p:nvSpPr>
+        <p:spPr>
+          <a:xfrm>
+            <a:off x="2386584" y="3291840"/>
             <a:ext cx="1417320" cy="914400"/>
           </a:xfrm>
           <a:prstGeom prst="rect">
@@ -8076,10 +7804,17 @@
           </a:solidFill>
           <a:ln/>
         </p:spPr>
+        <p:txBody>
+          <a:bodyPr/>
+          <a:lstStyle/>
+          <a:p>
+            <a:endParaRPr lang="en-US"/>
+          </a:p>
+        </p:txBody>
       </p:sp>
       <p:pic>
         <p:nvPicPr>
-          <p:cNvPr id="36" name="Image 3" descr="preencoded.png">    </p:cNvPr>
+          <p:cNvPr id="28" name="Image 1" descr="preencoded.png"/>
           <p:cNvPicPr>
             <a:picLocks noChangeAspect="1"/>
           </p:cNvPicPr>
@@ -8093,7 +7828,7 @@
         </p:blipFill>
         <p:spPr>
           <a:xfrm>
-            <a:off x="6108192" y="3346704"/>
+            <a:off x="2889504" y="3346704"/>
             <a:ext cx="292608" cy="292608"/>
           </a:xfrm>
           <a:prstGeom prst="rect">
@@ -8103,13 +7838,13 @@
       </p:pic>
       <p:sp>
         <p:nvSpPr>
-          <p:cNvPr id="37" name="Text 31"/>
-          <p:cNvSpPr/>
-          <p:nvPr/>
-        </p:nvSpPr>
-        <p:spPr>
-          <a:xfrm>
-            <a:off x="5650992" y="3657600"/>
+          <p:cNvPr id="29" name="Text 25"/>
+          <p:cNvSpPr/>
+          <p:nvPr/>
+        </p:nvSpPr>
+        <p:spPr>
+          <a:xfrm>
+            <a:off x="2432304" y="3657600"/>
             <a:ext cx="1325880" cy="182880"/>
           </a:xfrm>
           <a:prstGeom prst="rect">
@@ -8122,7 +7857,7 @@
           <a:bodyPr wrap="square" lIns="0" tIns="0" rIns="0" bIns="0" rtlCol="0" anchor="ctr"/>
           <a:lstStyle/>
           <a:p>
-            <a:pPr algn="ctr" indent="0" marL="0">
+            <a:pPr marL="0" indent="0" algn="ctr">
               <a:buNone/>
             </a:pPr>
             <a:r>
@@ -8134,7 +7869,7 @@
                 <a:ea typeface="Trebuchet MS" pitchFamily="34" charset="-122"/>
                 <a:cs typeface="Trebuchet MS" pitchFamily="34" charset="-120"/>
               </a:rPr>
-              <a:t>Notes</a:t>
+              <a:t>Devices</a:t>
             </a:r>
             <a:endParaRPr lang="en-US" sz="1000" dirty="0"/>
           </a:p>
@@ -8142,13 +7877,13 @@
       </p:sp>
       <p:sp>
         <p:nvSpPr>
-          <p:cNvPr id="38" name="Text 32"/>
-          <p:cNvSpPr/>
-          <p:nvPr/>
-        </p:nvSpPr>
-        <p:spPr>
-          <a:xfrm>
-            <a:off x="5650992" y="3840480"/>
+          <p:cNvPr id="30" name="Text 26"/>
+          <p:cNvSpPr/>
+          <p:nvPr/>
+        </p:nvSpPr>
+        <p:spPr>
+          <a:xfrm>
+            <a:off x="2432304" y="3840480"/>
             <a:ext cx="1325880" cy="320040"/>
           </a:xfrm>
           <a:prstGeom prst="rect">
@@ -8161,7 +7896,7 @@
           <a:bodyPr wrap="square" lIns="0" tIns="0" rIns="0" bIns="0" rtlCol="0" anchor="ctr"/>
           <a:lstStyle/>
           <a:p>
-            <a:pPr algn="ctr" indent="0" marL="0">
+            <a:pPr marL="0" indent="0" algn="ctr">
               <a:buNone/>
             </a:pPr>
             <a:r>
@@ -8173,12 +7908,12 @@
                 <a:ea typeface="Calibri" pitchFamily="34" charset="-122"/>
                 <a:cs typeface="Calibri" pitchFamily="34" charset="-120"/>
               </a:rPr>
-              <a:t>Nursing free-text,</a:t>
+              <a:t>Movement index,</a:t>
             </a:r>
             <a:endParaRPr lang="en-US" sz="800" dirty="0"/>
           </a:p>
           <a:p>
-            <a:pPr algn="ctr" indent="0" marL="0">
+            <a:pPr marL="0" indent="0" algn="ctr">
               <a:buNone/>
             </a:pPr>
             <a:r>
@@ -8190,7 +7925,7 @@
                 <a:ea typeface="Calibri" pitchFamily="34" charset="-122"/>
                 <a:cs typeface="Calibri" pitchFamily="34" charset="-120"/>
               </a:rPr>
-              <a:t>observations</a:t>
+              <a:t>fall events, bed exits</a:t>
             </a:r>
             <a:endParaRPr lang="en-US" sz="800" dirty="0"/>
           </a:p>
@@ -8198,13 +7933,13 @@
       </p:sp>
       <p:sp>
         <p:nvSpPr>
-          <p:cNvPr id="39" name="Shape 33"/>
-          <p:cNvSpPr/>
-          <p:nvPr/>
-        </p:nvSpPr>
-        <p:spPr>
-          <a:xfrm>
-            <a:off x="7214616" y="3291840"/>
+          <p:cNvPr id="31" name="Shape 27"/>
+          <p:cNvSpPr/>
+          <p:nvPr/>
+        </p:nvSpPr>
+        <p:spPr>
+          <a:xfrm>
+            <a:off x="3995928" y="3291840"/>
             <a:ext cx="1417320" cy="914400"/>
           </a:xfrm>
           <a:prstGeom prst="rect">
@@ -8215,10 +7950,17 @@
           </a:solidFill>
           <a:ln/>
         </p:spPr>
+        <p:txBody>
+          <a:bodyPr/>
+          <a:lstStyle/>
+          <a:p>
+            <a:endParaRPr lang="en-US"/>
+          </a:p>
+        </p:txBody>
       </p:sp>
       <p:pic>
         <p:nvPicPr>
-          <p:cNvPr id="40" name="Image 4" descr="preencoded.png">    </p:cNvPr>
+          <p:cNvPr id="32" name="Image 2" descr="preencoded.png"/>
           <p:cNvPicPr>
             <a:picLocks noChangeAspect="1"/>
           </p:cNvPicPr>
@@ -8232,7 +7974,7 @@
         </p:blipFill>
         <p:spPr>
           <a:xfrm>
-            <a:off x="7717536" y="3346704"/>
+            <a:off x="4498848" y="3346704"/>
             <a:ext cx="292608" cy="292608"/>
           </a:xfrm>
           <a:prstGeom prst="rect">
@@ -8242,13 +7984,13 @@
       </p:pic>
       <p:sp>
         <p:nvSpPr>
-          <p:cNvPr id="41" name="Text 34"/>
-          <p:cNvSpPr/>
-          <p:nvPr/>
-        </p:nvSpPr>
-        <p:spPr>
-          <a:xfrm>
-            <a:off x="7260336" y="3657600"/>
+          <p:cNvPr id="33" name="Text 28"/>
+          <p:cNvSpPr/>
+          <p:nvPr/>
+        </p:nvSpPr>
+        <p:spPr>
+          <a:xfrm>
+            <a:off x="4041648" y="3657600"/>
             <a:ext cx="1325880" cy="182880"/>
           </a:xfrm>
           <a:prstGeom prst="rect">
@@ -8261,7 +8003,7 @@
           <a:bodyPr wrap="square" lIns="0" tIns="0" rIns="0" bIns="0" rtlCol="0" anchor="ctr"/>
           <a:lstStyle/>
           <a:p>
-            <a:pPr algn="ctr" indent="0" marL="0">
+            <a:pPr marL="0" indent="0" algn="ctr">
               <a:buNone/>
             </a:pPr>
             <a:r>
@@ -8273,7 +8015,7 @@
                 <a:ea typeface="Trebuchet MS" pitchFamily="34" charset="-122"/>
                 <a:cs typeface="Trebuchet MS" pitchFamily="34" charset="-120"/>
               </a:rPr>
-              <a:t>ICD-10</a:t>
+              <a:t>Meds</a:t>
             </a:r>
             <a:endParaRPr lang="en-US" sz="1000" dirty="0"/>
           </a:p>
@@ -8281,13 +8023,13 @@
       </p:sp>
       <p:sp>
         <p:nvSpPr>
-          <p:cNvPr id="42" name="Text 35"/>
-          <p:cNvSpPr/>
-          <p:nvPr/>
-        </p:nvSpPr>
-        <p:spPr>
-          <a:xfrm>
-            <a:off x="7260336" y="3840480"/>
+          <p:cNvPr id="34" name="Text 29"/>
+          <p:cNvSpPr/>
+          <p:nvPr/>
+        </p:nvSpPr>
+        <p:spPr>
+          <a:xfrm>
+            <a:off x="4041648" y="3840480"/>
             <a:ext cx="1325880" cy="320040"/>
           </a:xfrm>
           <a:prstGeom prst="rect">
@@ -8300,7 +8042,7 @@
           <a:bodyPr wrap="square" lIns="0" tIns="0" rIns="0" bIns="0" rtlCol="0" anchor="ctr"/>
           <a:lstStyle/>
           <a:p>
-            <a:pPr algn="ctr" indent="0" marL="0">
+            <a:pPr marL="0" indent="0" algn="ctr">
               <a:buNone/>
             </a:pPr>
             <a:r>
@@ -8312,12 +8054,12 @@
                 <a:ea typeface="Calibri" pitchFamily="34" charset="-122"/>
                 <a:cs typeface="Calibri" pitchFamily="34" charset="-120"/>
               </a:rPr>
-              <a:t>Primary &amp; secondary</a:t>
+              <a:t>Orders, doses,</a:t>
             </a:r>
             <a:endParaRPr lang="en-US" sz="800" dirty="0"/>
           </a:p>
           <a:p>
-            <a:pPr algn="ctr" indent="0" marL="0">
+            <a:pPr marL="0" indent="0" algn="ctr">
               <a:buNone/>
             </a:pPr>
             <a:r>
@@ -8329,6 +8071,298 @@
                 <a:ea typeface="Calibri" pitchFamily="34" charset="-122"/>
                 <a:cs typeface="Calibri" pitchFamily="34" charset="-120"/>
               </a:rPr>
+              <a:t>administration status</a:t>
+            </a:r>
+            <a:endParaRPr lang="en-US" sz="800" dirty="0"/>
+          </a:p>
+        </p:txBody>
+      </p:sp>
+      <p:sp>
+        <p:nvSpPr>
+          <p:cNvPr id="35" name="Shape 30"/>
+          <p:cNvSpPr/>
+          <p:nvPr/>
+        </p:nvSpPr>
+        <p:spPr>
+          <a:xfrm>
+            <a:off x="5605272" y="3291840"/>
+            <a:ext cx="1417320" cy="914400"/>
+          </a:xfrm>
+          <a:prstGeom prst="rect">
+            <a:avLst/>
+          </a:prstGeom>
+          <a:solidFill>
+            <a:srgbClr val="0F2135"/>
+          </a:solidFill>
+          <a:ln/>
+        </p:spPr>
+        <p:txBody>
+          <a:bodyPr/>
+          <a:lstStyle/>
+          <a:p>
+            <a:endParaRPr lang="en-US"/>
+          </a:p>
+        </p:txBody>
+      </p:sp>
+      <p:pic>
+        <p:nvPicPr>
+          <p:cNvPr id="36" name="Image 3" descr="preencoded.png"/>
+          <p:cNvPicPr>
+            <a:picLocks noChangeAspect="1"/>
+          </p:cNvPicPr>
+          <p:nvPr/>
+        </p:nvPicPr>
+        <p:blipFill>
+          <a:blip r:embed="rId5"/>
+          <a:stretch>
+            <a:fillRect/>
+          </a:stretch>
+        </p:blipFill>
+        <p:spPr>
+          <a:xfrm>
+            <a:off x="6108192" y="3346704"/>
+            <a:ext cx="292608" cy="292608"/>
+          </a:xfrm>
+          <a:prstGeom prst="rect">
+            <a:avLst/>
+          </a:prstGeom>
+        </p:spPr>
+      </p:pic>
+      <p:sp>
+        <p:nvSpPr>
+          <p:cNvPr id="37" name="Text 31"/>
+          <p:cNvSpPr/>
+          <p:nvPr/>
+        </p:nvSpPr>
+        <p:spPr>
+          <a:xfrm>
+            <a:off x="5650992" y="3657600"/>
+            <a:ext cx="1325880" cy="182880"/>
+          </a:xfrm>
+          <a:prstGeom prst="rect">
+            <a:avLst/>
+          </a:prstGeom>
+          <a:noFill/>
+          <a:ln/>
+        </p:spPr>
+        <p:txBody>
+          <a:bodyPr wrap="square" lIns="0" tIns="0" rIns="0" bIns="0" rtlCol="0" anchor="ctr"/>
+          <a:lstStyle/>
+          <a:p>
+            <a:pPr marL="0" indent="0" algn="ctr">
+              <a:buNone/>
+            </a:pPr>
+            <a:r>
+              <a:rPr lang="en-US" sz="1000" b="1" dirty="0">
+                <a:solidFill>
+                  <a:srgbClr val="00A896"/>
+                </a:solidFill>
+                <a:latin typeface="Trebuchet MS" pitchFamily="34" charset="0"/>
+                <a:ea typeface="Trebuchet MS" pitchFamily="34" charset="-122"/>
+                <a:cs typeface="Trebuchet MS" pitchFamily="34" charset="-120"/>
+              </a:rPr>
+              <a:t>Notes</a:t>
+            </a:r>
+            <a:endParaRPr lang="en-US" sz="1000" dirty="0"/>
+          </a:p>
+        </p:txBody>
+      </p:sp>
+      <p:sp>
+        <p:nvSpPr>
+          <p:cNvPr id="38" name="Text 32"/>
+          <p:cNvSpPr/>
+          <p:nvPr/>
+        </p:nvSpPr>
+        <p:spPr>
+          <a:xfrm>
+            <a:off x="5650992" y="3840480"/>
+            <a:ext cx="1325880" cy="320040"/>
+          </a:xfrm>
+          <a:prstGeom prst="rect">
+            <a:avLst/>
+          </a:prstGeom>
+          <a:noFill/>
+          <a:ln/>
+        </p:spPr>
+        <p:txBody>
+          <a:bodyPr wrap="square" lIns="0" tIns="0" rIns="0" bIns="0" rtlCol="0" anchor="ctr"/>
+          <a:lstStyle/>
+          <a:p>
+            <a:pPr marL="0" indent="0" algn="ctr">
+              <a:buNone/>
+            </a:pPr>
+            <a:r>
+              <a:rPr lang="en-US" sz="800" dirty="0">
+                <a:solidFill>
+                  <a:srgbClr val="8A9BB0"/>
+                </a:solidFill>
+                <a:latin typeface="Calibri" pitchFamily="34" charset="0"/>
+                <a:ea typeface="Calibri" pitchFamily="34" charset="-122"/>
+                <a:cs typeface="Calibri" pitchFamily="34" charset="-120"/>
+              </a:rPr>
+              <a:t>Nursing free-text,</a:t>
+            </a:r>
+            <a:endParaRPr lang="en-US" sz="800" dirty="0"/>
+          </a:p>
+          <a:p>
+            <a:pPr marL="0" indent="0" algn="ctr">
+              <a:buNone/>
+            </a:pPr>
+            <a:r>
+              <a:rPr lang="en-US" sz="800" dirty="0">
+                <a:solidFill>
+                  <a:srgbClr val="8A9BB0"/>
+                </a:solidFill>
+                <a:latin typeface="Calibri" pitchFamily="34" charset="0"/>
+                <a:ea typeface="Calibri" pitchFamily="34" charset="-122"/>
+                <a:cs typeface="Calibri" pitchFamily="34" charset="-120"/>
+              </a:rPr>
+              <a:t>observations</a:t>
+            </a:r>
+            <a:endParaRPr lang="en-US" sz="800" dirty="0"/>
+          </a:p>
+        </p:txBody>
+      </p:sp>
+      <p:sp>
+        <p:nvSpPr>
+          <p:cNvPr id="39" name="Shape 33"/>
+          <p:cNvSpPr/>
+          <p:nvPr/>
+        </p:nvSpPr>
+        <p:spPr>
+          <a:xfrm>
+            <a:off x="7214616" y="3291840"/>
+            <a:ext cx="1417320" cy="914400"/>
+          </a:xfrm>
+          <a:prstGeom prst="rect">
+            <a:avLst/>
+          </a:prstGeom>
+          <a:solidFill>
+            <a:srgbClr val="0F2135"/>
+          </a:solidFill>
+          <a:ln/>
+        </p:spPr>
+        <p:txBody>
+          <a:bodyPr/>
+          <a:lstStyle/>
+          <a:p>
+            <a:endParaRPr lang="en-US"/>
+          </a:p>
+        </p:txBody>
+      </p:sp>
+      <p:pic>
+        <p:nvPicPr>
+          <p:cNvPr id="40" name="Image 4" descr="preencoded.png"/>
+          <p:cNvPicPr>
+            <a:picLocks noChangeAspect="1"/>
+          </p:cNvPicPr>
+          <p:nvPr/>
+        </p:nvPicPr>
+        <p:blipFill>
+          <a:blip r:embed="rId6"/>
+          <a:stretch>
+            <a:fillRect/>
+          </a:stretch>
+        </p:blipFill>
+        <p:spPr>
+          <a:xfrm>
+            <a:off x="7717536" y="3346704"/>
+            <a:ext cx="292608" cy="292608"/>
+          </a:xfrm>
+          <a:prstGeom prst="rect">
+            <a:avLst/>
+          </a:prstGeom>
+        </p:spPr>
+      </p:pic>
+      <p:sp>
+        <p:nvSpPr>
+          <p:cNvPr id="41" name="Text 34"/>
+          <p:cNvSpPr/>
+          <p:nvPr/>
+        </p:nvSpPr>
+        <p:spPr>
+          <a:xfrm>
+            <a:off x="7260336" y="3657600"/>
+            <a:ext cx="1325880" cy="182880"/>
+          </a:xfrm>
+          <a:prstGeom prst="rect">
+            <a:avLst/>
+          </a:prstGeom>
+          <a:noFill/>
+          <a:ln/>
+        </p:spPr>
+        <p:txBody>
+          <a:bodyPr wrap="square" lIns="0" tIns="0" rIns="0" bIns="0" rtlCol="0" anchor="ctr"/>
+          <a:lstStyle/>
+          <a:p>
+            <a:pPr marL="0" indent="0" algn="ctr">
+              <a:buNone/>
+            </a:pPr>
+            <a:r>
+              <a:rPr lang="en-US" sz="1000" b="1" dirty="0">
+                <a:solidFill>
+                  <a:srgbClr val="00A896"/>
+                </a:solidFill>
+                <a:latin typeface="Trebuchet MS" pitchFamily="34" charset="0"/>
+                <a:ea typeface="Trebuchet MS" pitchFamily="34" charset="-122"/>
+                <a:cs typeface="Trebuchet MS" pitchFamily="34" charset="-120"/>
+              </a:rPr>
+              <a:t>ICD-10</a:t>
+            </a:r>
+            <a:endParaRPr lang="en-US" sz="1000" dirty="0"/>
+          </a:p>
+        </p:txBody>
+      </p:sp>
+      <p:sp>
+        <p:nvSpPr>
+          <p:cNvPr id="42" name="Text 35"/>
+          <p:cNvSpPr/>
+          <p:nvPr/>
+        </p:nvSpPr>
+        <p:spPr>
+          <a:xfrm>
+            <a:off x="7260336" y="3840480"/>
+            <a:ext cx="1325880" cy="320040"/>
+          </a:xfrm>
+          <a:prstGeom prst="rect">
+            <a:avLst/>
+          </a:prstGeom>
+          <a:noFill/>
+          <a:ln/>
+        </p:spPr>
+        <p:txBody>
+          <a:bodyPr wrap="square" lIns="0" tIns="0" rIns="0" bIns="0" rtlCol="0" anchor="ctr"/>
+          <a:lstStyle/>
+          <a:p>
+            <a:pPr marL="0" indent="0" algn="ctr">
+              <a:buNone/>
+            </a:pPr>
+            <a:r>
+              <a:rPr lang="en-US" sz="800" dirty="0">
+                <a:solidFill>
+                  <a:srgbClr val="8A9BB0"/>
+                </a:solidFill>
+                <a:latin typeface="Calibri" pitchFamily="34" charset="0"/>
+                <a:ea typeface="Calibri" pitchFamily="34" charset="-122"/>
+                <a:cs typeface="Calibri" pitchFamily="34" charset="-120"/>
+              </a:rPr>
+              <a:t>Primary &amp; secondary</a:t>
+            </a:r>
+            <a:endParaRPr lang="en-US" sz="800" dirty="0"/>
+          </a:p>
+          <a:p>
+            <a:pPr marL="0" indent="0" algn="ctr">
+              <a:buNone/>
+            </a:pPr>
+            <a:r>
+              <a:rPr lang="en-US" sz="800" dirty="0">
+                <a:solidFill>
+                  <a:srgbClr val="8A9BB0"/>
+                </a:solidFill>
+                <a:latin typeface="Calibri" pitchFamily="34" charset="0"/>
+                <a:ea typeface="Calibri" pitchFamily="34" charset="-122"/>
+                <a:cs typeface="Calibri" pitchFamily="34" charset="-120"/>
+              </a:rPr>
               <a:t>diagnoses, OPS codes</a:t>
             </a:r>
             <a:endParaRPr lang="en-US" sz="800" dirty="0"/>
@@ -8356,7 +8390,7 @@
           <a:bodyPr wrap="square" lIns="0" tIns="0" rIns="0" bIns="0" rtlCol="0" anchor="ctr"/>
           <a:lstStyle/>
           <a:p>
-            <a:pPr algn="r" indent="0" marL="0">
+            <a:pPr marL="0" indent="0" algn="r">
               <a:buNone/>
             </a:pPr>
             <a:r>
@@ -8390,6 +8424,7 @@
         <a:solidFill>
           <a:srgbClr val="0B1929"/>
         </a:solidFill>
+        <a:effectLst/>
       </p:bgPr>
     </p:bg>
     <p:spTree>
@@ -8425,6 +8460,13 @@
           </a:solidFill>
           <a:ln/>
         </p:spPr>
+        <p:txBody>
+          <a:bodyPr/>
+          <a:lstStyle/>
+          <a:p>
+            <a:endParaRPr lang="en-US"/>
+          </a:p>
+        </p:txBody>
       </p:sp>
       <p:sp>
         <p:nvSpPr>
@@ -8447,7 +8489,7 @@
           <a:bodyPr wrap="square" lIns="0" tIns="0" rIns="0" bIns="0" rtlCol="0" anchor="ctr"/>
           <a:lstStyle/>
           <a:p>
-            <a:pPr indent="0" marL="0">
+            <a:pPr marL="0" indent="0">
               <a:buNone/>
             </a:pPr>
             <a:r>
@@ -8486,7 +8528,7 @@
           <a:bodyPr wrap="square" lIns="0" tIns="0" rIns="0" bIns="0" rtlCol="0" anchor="ctr"/>
           <a:lstStyle/>
           <a:p>
-            <a:pPr indent="0" marL="0">
+            <a:pPr marL="0" indent="0">
               <a:buNone/>
             </a:pPr>
             <a:r>
@@ -8523,6 +8565,13 @@
           </a:solidFill>
           <a:ln/>
         </p:spPr>
+        <p:txBody>
+          <a:bodyPr/>
+          <a:lstStyle/>
+          <a:p>
+            <a:endParaRPr lang="en-US"/>
+          </a:p>
+        </p:txBody>
       </p:sp>
       <p:sp>
         <p:nvSpPr>
@@ -8545,7 +8594,7 @@
           <a:bodyPr wrap="square" lIns="0" tIns="0" rIns="0" bIns="0" rtlCol="0" anchor="ctr"/>
           <a:lstStyle/>
           <a:p>
-            <a:pPr algn="ctr" indent="0" marL="0">
+            <a:pPr marL="0" indent="0" algn="ctr">
               <a:buNone/>
             </a:pPr>
             <a:r>
@@ -8582,13 +8631,20 @@
           </a:solidFill>
           <a:ln/>
           <a:effectLst>
-            <a:outerShdw sx="100000" sy="100000" kx="0" ky="0" algn="bl" rotWithShape="0" blurRad="101600" dist="38100" dir="8100000">
+            <a:outerShdw blurRad="101600" dist="38100" dir="8100000" algn="bl" rotWithShape="0">
               <a:srgbClr val="000000">
                 <a:alpha val="25000"/>
               </a:srgbClr>
             </a:outerShdw>
           </a:effectLst>
         </p:spPr>
+        <p:txBody>
+          <a:bodyPr/>
+          <a:lstStyle/>
+          <a:p>
+            <a:endParaRPr lang="en-US"/>
+          </a:p>
+        </p:txBody>
       </p:sp>
       <p:sp>
         <p:nvSpPr>
@@ -8611,7 +8667,7 @@
           <a:bodyPr wrap="square" lIns="0" tIns="0" rIns="0" bIns="0" rtlCol="0" anchor="ctr"/>
           <a:lstStyle/>
           <a:p>
-            <a:pPr indent="0" marL="0">
+            <a:pPr marL="0" indent="0">
               <a:buNone/>
             </a:pPr>
             <a:r>
@@ -8650,7 +8706,7 @@
           <a:bodyPr wrap="square" lIns="0" tIns="0" rIns="0" bIns="0" rtlCol="0" anchor="ctr"/>
           <a:lstStyle/>
           <a:p>
-            <a:pPr indent="0" marL="0">
+            <a:pPr marL="0" indent="0">
               <a:buNone/>
             </a:pPr>
             <a:r>
@@ -8687,6 +8743,13 @@
           </a:solidFill>
           <a:ln/>
         </p:spPr>
+        <p:txBody>
+          <a:bodyPr/>
+          <a:lstStyle/>
+          <a:p>
+            <a:endParaRPr lang="en-US"/>
+          </a:p>
+        </p:txBody>
       </p:sp>
       <p:sp>
         <p:nvSpPr>
@@ -8709,7 +8772,7 @@
           <a:bodyPr wrap="square" lIns="0" tIns="0" rIns="0" bIns="0" rtlCol="0" anchor="ctr"/>
           <a:lstStyle/>
           <a:p>
-            <a:pPr algn="ctr" indent="0" marL="0">
+            <a:pPr marL="0" indent="0" algn="ctr">
               <a:buNone/>
             </a:pPr>
             <a:r>
@@ -8746,13 +8809,20 @@
           </a:solidFill>
           <a:ln/>
           <a:effectLst>
-            <a:outerShdw sx="100000" sy="100000" kx="0" ky="0" algn="bl" rotWithShape="0" blurRad="101600" dist="38100" dir="8100000">
+            <a:outerShdw blurRad="101600" dist="38100" dir="8100000" algn="bl" rotWithShape="0">
               <a:srgbClr val="000000">
                 <a:alpha val="25000"/>
               </a:srgbClr>
             </a:outerShdw>
           </a:effectLst>
         </p:spPr>
+        <p:txBody>
+          <a:bodyPr/>
+          <a:lstStyle/>
+          <a:p>
+            <a:endParaRPr lang="en-US"/>
+          </a:p>
+        </p:txBody>
       </p:sp>
       <p:sp>
         <p:nvSpPr>
@@ -8775,7 +8845,7 @@
           <a:bodyPr wrap="square" lIns="0" tIns="0" rIns="0" bIns="0" rtlCol="0" anchor="ctr"/>
           <a:lstStyle/>
           <a:p>
-            <a:pPr indent="0" marL="0">
+            <a:pPr marL="0" indent="0">
               <a:buNone/>
             </a:pPr>
             <a:r>
@@ -8814,7 +8884,7 @@
           <a:bodyPr wrap="square" lIns="0" tIns="0" rIns="0" bIns="0" rtlCol="0" anchor="ctr"/>
           <a:lstStyle/>
           <a:p>
-            <a:pPr indent="0" marL="0">
+            <a:pPr marL="0" indent="0">
               <a:buNone/>
             </a:pPr>
             <a:r>
@@ -8851,6 +8921,13 @@
           </a:solidFill>
           <a:ln/>
         </p:spPr>
+        <p:txBody>
+          <a:bodyPr/>
+          <a:lstStyle/>
+          <a:p>
+            <a:endParaRPr lang="en-US"/>
+          </a:p>
+        </p:txBody>
       </p:sp>
       <p:sp>
         <p:nvSpPr>
@@ -8873,7 +8950,7 @@
           <a:bodyPr wrap="square" lIns="0" tIns="0" rIns="0" bIns="0" rtlCol="0" anchor="ctr"/>
           <a:lstStyle/>
           <a:p>
-            <a:pPr algn="ctr" indent="0" marL="0">
+            <a:pPr marL="0" indent="0" algn="ctr">
               <a:buNone/>
             </a:pPr>
             <a:r>
@@ -8910,13 +8987,20 @@
           </a:solidFill>
           <a:ln/>
           <a:effectLst>
-            <a:outerShdw sx="100000" sy="100000" kx="0" ky="0" algn="bl" rotWithShape="0" blurRad="101600" dist="38100" dir="8100000">
+            <a:outerShdw blurRad="101600" dist="38100" dir="8100000" algn="bl" rotWithShape="0">
               <a:srgbClr val="000000">
                 <a:alpha val="25000"/>
               </a:srgbClr>
             </a:outerShdw>
           </a:effectLst>
         </p:spPr>
+        <p:txBody>
+          <a:bodyPr/>
+          <a:lstStyle/>
+          <a:p>
+            <a:endParaRPr lang="en-US"/>
+          </a:p>
+        </p:txBody>
       </p:sp>
       <p:sp>
         <p:nvSpPr>
@@ -8939,7 +9023,7 @@
           <a:bodyPr wrap="square" lIns="0" tIns="0" rIns="0" bIns="0" rtlCol="0" anchor="ctr"/>
           <a:lstStyle/>
           <a:p>
-            <a:pPr indent="0" marL="0">
+            <a:pPr marL="0" indent="0">
               <a:buNone/>
             </a:pPr>
             <a:r>
@@ -8978,7 +9062,7 @@
           <a:bodyPr wrap="square" lIns="0" tIns="0" rIns="0" bIns="0" rtlCol="0" anchor="ctr"/>
           <a:lstStyle/>
           <a:p>
-            <a:pPr indent="0" marL="0">
+            <a:pPr marL="0" indent="0">
               <a:buNone/>
             </a:pPr>
             <a:r>
@@ -9015,6 +9099,13 @@
           </a:solidFill>
           <a:ln/>
         </p:spPr>
+        <p:txBody>
+          <a:bodyPr/>
+          <a:lstStyle/>
+          <a:p>
+            <a:endParaRPr lang="en-US"/>
+          </a:p>
+        </p:txBody>
       </p:sp>
       <p:sp>
         <p:nvSpPr>
@@ -9037,7 +9128,7 @@
           <a:bodyPr wrap="square" lIns="0" tIns="0" rIns="0" bIns="0" rtlCol="0" anchor="ctr"/>
           <a:lstStyle/>
           <a:p>
-            <a:pPr algn="ctr" indent="0" marL="0">
+            <a:pPr marL="0" indent="0" algn="ctr">
               <a:buNone/>
             </a:pPr>
             <a:r>
@@ -9074,13 +9165,20 @@
           </a:solidFill>
           <a:ln/>
           <a:effectLst>
-            <a:outerShdw sx="100000" sy="100000" kx="0" ky="0" algn="bl" rotWithShape="0" blurRad="101600" dist="38100" dir="8100000">
+            <a:outerShdw blurRad="101600" dist="38100" dir="8100000" algn="bl" rotWithShape="0">
               <a:srgbClr val="000000">
                 <a:alpha val="25000"/>
               </a:srgbClr>
             </a:outerShdw>
           </a:effectLst>
         </p:spPr>
+        <p:txBody>
+          <a:bodyPr/>
+          <a:lstStyle/>
+          <a:p>
+            <a:endParaRPr lang="en-US"/>
+          </a:p>
+        </p:txBody>
       </p:sp>
       <p:sp>
         <p:nvSpPr>
@@ -9103,7 +9201,7 @@
           <a:bodyPr wrap="square" lIns="0" tIns="0" rIns="0" bIns="0" rtlCol="0" anchor="ctr"/>
           <a:lstStyle/>
           <a:p>
-            <a:pPr indent="0" marL="0">
+            <a:pPr marL="0" indent="0">
               <a:buNone/>
             </a:pPr>
             <a:r>
@@ -9142,7 +9240,7 @@
           <a:bodyPr wrap="square" lIns="0" tIns="0" rIns="0" bIns="0" rtlCol="0" anchor="ctr"/>
           <a:lstStyle/>
           <a:p>
-            <a:pPr indent="0" marL="0">
+            <a:pPr marL="0" indent="0">
               <a:buNone/>
             </a:pPr>
             <a:r>
@@ -9179,6 +9277,13 @@
           </a:solidFill>
           <a:ln/>
         </p:spPr>
+        <p:txBody>
+          <a:bodyPr/>
+          <a:lstStyle/>
+          <a:p>
+            <a:endParaRPr lang="en-US"/>
+          </a:p>
+        </p:txBody>
       </p:sp>
       <p:sp>
         <p:nvSpPr>
@@ -9201,7 +9306,7 @@
           <a:bodyPr wrap="square" lIns="0" tIns="0" rIns="0" bIns="0" rtlCol="0" anchor="ctr"/>
           <a:lstStyle/>
           <a:p>
-            <a:pPr algn="ctr" indent="0" marL="0">
+            <a:pPr marL="0" indent="0" algn="ctr">
               <a:buNone/>
             </a:pPr>
             <a:r>
@@ -9238,13 +9343,20 @@
           </a:solidFill>
           <a:ln/>
           <a:effectLst>
-            <a:outerShdw sx="100000" sy="100000" kx="0" ky="0" algn="bl" rotWithShape="0" blurRad="101600" dist="38100" dir="8100000">
+            <a:outerShdw blurRad="101600" dist="38100" dir="8100000" algn="bl" rotWithShape="0">
               <a:srgbClr val="000000">
                 <a:alpha val="25000"/>
               </a:srgbClr>
             </a:outerShdw>
           </a:effectLst>
         </p:spPr>
+        <p:txBody>
+          <a:bodyPr/>
+          <a:lstStyle/>
+          <a:p>
+            <a:endParaRPr lang="en-US"/>
+          </a:p>
+        </p:txBody>
       </p:sp>
       <p:sp>
         <p:nvSpPr>
@@ -9267,7 +9379,7 @@
           <a:bodyPr wrap="square" lIns="0" tIns="0" rIns="0" bIns="0" rtlCol="0" anchor="ctr"/>
           <a:lstStyle/>
           <a:p>
-            <a:pPr indent="0" marL="0">
+            <a:pPr marL="0" indent="0">
               <a:buNone/>
             </a:pPr>
             <a:r>
@@ -9306,7 +9418,7 @@
           <a:bodyPr wrap="square" lIns="0" tIns="0" rIns="0" bIns="0" rtlCol="0" anchor="ctr"/>
           <a:lstStyle/>
           <a:p>
-            <a:pPr indent="0" marL="0">
+            <a:pPr marL="0" indent="0">
               <a:buNone/>
             </a:pPr>
             <a:r>
@@ -9345,7 +9457,7 @@
           <a:bodyPr wrap="square" lIns="0" tIns="0" rIns="0" bIns="0" rtlCol="0" anchor="ctr"/>
           <a:lstStyle/>
           <a:p>
-            <a:pPr algn="r" indent="0" marL="0">
+            <a:pPr marL="0" indent="0" algn="r">
               <a:buNone/>
             </a:pPr>
             <a:r>
@@ -9379,6 +9491,7 @@
         <a:solidFill>
           <a:srgbClr val="0B1929"/>
         </a:solidFill>
+        <a:effectLst/>
       </p:bgPr>
     </p:bg>
     <p:spTree>
@@ -9414,6 +9527,13 @@
           </a:solidFill>
           <a:ln/>
         </p:spPr>
+        <p:txBody>
+          <a:bodyPr/>
+          <a:lstStyle/>
+          <a:p>
+            <a:endParaRPr lang="en-US"/>
+          </a:p>
+        </p:txBody>
       </p:sp>
       <p:sp>
         <p:nvSpPr>
@@ -9436,7 +9556,7 @@
           <a:bodyPr wrap="square" lIns="0" tIns="0" rIns="0" bIns="0" rtlCol="0" anchor="ctr"/>
           <a:lstStyle/>
           <a:p>
-            <a:pPr indent="0" marL="0">
+            <a:pPr marL="0" indent="0">
               <a:buNone/>
             </a:pPr>
             <a:r>
@@ -9473,353 +9593,24 @@
           </a:solidFill>
           <a:ln/>
           <a:effectLst>
-            <a:outerShdw sx="100000" sy="100000" kx="0" ky="0" algn="bl" rotWithShape="0" blurRad="101600" dist="38100" dir="8100000">
+            <a:outerShdw blurRad="101600" dist="38100" dir="8100000" algn="bl" rotWithShape="0">
               <a:srgbClr val="000000">
                 <a:alpha val="25000"/>
               </a:srgbClr>
             </a:outerShdw>
           </a:effectLst>
         </p:spPr>
+        <p:txBody>
+          <a:bodyPr/>
+          <a:lstStyle/>
+          <a:p>
+            <a:endParaRPr lang="en-US"/>
+          </a:p>
+        </p:txBody>
       </p:sp>
       <p:pic>
         <p:nvPicPr>
-          <p:cNvPr id="5" name="Image 0" descr="preencoded.png">    </p:cNvPr>
-          <p:cNvPicPr>
-            <a:picLocks noChangeAspect="1"/>
-          </p:cNvPicPr>
-          <p:nvPr/>
-        </p:nvPicPr>
-        <p:blipFill>
-          <a:blip r:embed="rId1"/>
-          <a:stretch>
-            <a:fillRect/>
-          </a:stretch>
-        </p:blipFill>
-        <p:spPr>
-          <a:xfrm>
-            <a:off x="777240" y="1234440"/>
-            <a:ext cx="347472" cy="347472"/>
-          </a:xfrm>
-          <a:prstGeom prst="rect">
-            <a:avLst/>
-          </a:prstGeom>
-        </p:spPr>
-      </p:pic>
-      <p:sp>
-        <p:nvSpPr>
-          <p:cNvPr id="6" name="Text 3"/>
-          <p:cNvSpPr/>
-          <p:nvPr/>
-        </p:nvSpPr>
-        <p:spPr>
-          <a:xfrm>
-            <a:off x="1280160" y="1161288"/>
-            <a:ext cx="1371600" cy="365760"/>
-          </a:xfrm>
-          <a:prstGeom prst="rect">
-            <a:avLst/>
-          </a:prstGeom>
-          <a:noFill/>
-          <a:ln/>
-        </p:spPr>
-        <p:txBody>
-          <a:bodyPr wrap="square" lIns="0" tIns="0" rIns="0" bIns="0" rtlCol="0" anchor="ctr"/>
-          <a:lstStyle/>
-          <a:p>
-            <a:pPr indent="0" marL="0">
-              <a:buNone/>
-            </a:pPr>
-            <a:r>
-              <a:rPr lang="en-US" sz="2600" b="1" dirty="0">
-                <a:solidFill>
-                  <a:srgbClr val="02C39A"/>
-                </a:solidFill>
-                <a:latin typeface="Trebuchet MS" pitchFamily="34" charset="0"/>
-                <a:ea typeface="Trebuchet MS" pitchFamily="34" charset="-122"/>
-                <a:cs typeface="Trebuchet MS" pitchFamily="34" charset="-120"/>
-              </a:rPr>
-              <a:t>Mins</a:t>
-            </a:r>
-            <a:endParaRPr lang="en-US" sz="2600" dirty="0"/>
-          </a:p>
-        </p:txBody>
-      </p:sp>
-      <p:sp>
-        <p:nvSpPr>
-          <p:cNvPr id="7" name="Text 4"/>
-          <p:cNvSpPr/>
-          <p:nvPr/>
-        </p:nvSpPr>
-        <p:spPr>
-          <a:xfrm>
-            <a:off x="2560320" y="1188720"/>
-            <a:ext cx="1737360" cy="365760"/>
-          </a:xfrm>
-          <a:prstGeom prst="rect">
-            <a:avLst/>
-          </a:prstGeom>
-          <a:noFill/>
-          <a:ln/>
-        </p:spPr>
-        <p:txBody>
-          <a:bodyPr wrap="square" lIns="0" tIns="0" rIns="0" bIns="0" rtlCol="0" anchor="ctr"/>
-          <a:lstStyle/>
-          <a:p>
-            <a:pPr indent="0" marL="0">
-              <a:buNone/>
-            </a:pPr>
-            <a:r>
-              <a:rPr lang="en-US" sz="1100" b="1" dirty="0">
-                <a:solidFill>
-                  <a:srgbClr val="FFFFFF"/>
-                </a:solidFill>
-                <a:latin typeface="Trebuchet MS" pitchFamily="34" charset="0"/>
-                <a:ea typeface="Trebuchet MS" pitchFamily="34" charset="-122"/>
-                <a:cs typeface="Trebuchet MS" pitchFamily="34" charset="-120"/>
-              </a:rPr>
-              <a:t>vs. weeks of manual work</a:t>
-            </a:r>
-            <a:endParaRPr lang="en-US" sz="1100" dirty="0"/>
-          </a:p>
-        </p:txBody>
-      </p:sp>
-      <p:sp>
-        <p:nvSpPr>
-          <p:cNvPr id="8" name="Text 5"/>
-          <p:cNvSpPr/>
-          <p:nvPr/>
-        </p:nvSpPr>
-        <p:spPr>
-          <a:xfrm>
-            <a:off x="777240" y="1691640"/>
-            <a:ext cx="3520440" cy="457200"/>
-          </a:xfrm>
-          <a:prstGeom prst="rect">
-            <a:avLst/>
-          </a:prstGeom>
-          <a:noFill/>
-          <a:ln/>
-        </p:spPr>
-        <p:txBody>
-          <a:bodyPr wrap="square" lIns="0" tIns="0" rIns="0" bIns="0" rtlCol="0" anchor="ctr"/>
-          <a:lstStyle/>
-          <a:p>
-            <a:pPr indent="0" marL="0">
-              <a:buNone/>
-            </a:pPr>
-            <a:r>
-              <a:rPr lang="en-US" sz="1000" dirty="0">
-                <a:solidFill>
-                  <a:srgbClr val="8A9BB0"/>
-                </a:solidFill>
-                <a:latin typeface="Calibri" pitchFamily="34" charset="0"/>
-                <a:ea typeface="Calibri" pitchFamily="34" charset="-122"/>
-                <a:cs typeface="Calibri" pitchFamily="34" charset="-120"/>
-              </a:rPr>
-              <a:t>Fully automated ingestion, normalization &amp; AI repair — what took days now runs in minutes</a:t>
-            </a:r>
-            <a:endParaRPr lang="en-US" sz="1000" dirty="0"/>
-          </a:p>
-        </p:txBody>
-      </p:sp>
-      <p:sp>
-        <p:nvSpPr>
-          <p:cNvPr id="9" name="Shape 6"/>
-          <p:cNvSpPr/>
-          <p:nvPr/>
-        </p:nvSpPr>
-        <p:spPr>
-          <a:xfrm>
-            <a:off x="4800600" y="1051560"/>
-            <a:ext cx="3977640" cy="1234440"/>
-          </a:xfrm>
-          <a:prstGeom prst="rect">
-            <a:avLst/>
-          </a:prstGeom>
-          <a:solidFill>
-            <a:srgbClr val="132B42"/>
-          </a:solidFill>
-          <a:ln/>
-          <a:effectLst>
-            <a:outerShdw sx="100000" sy="100000" kx="0" ky="0" algn="bl" rotWithShape="0" blurRad="101600" dist="38100" dir="8100000">
-              <a:srgbClr val="000000">
-                <a:alpha val="25000"/>
-              </a:srgbClr>
-            </a:outerShdw>
-          </a:effectLst>
-        </p:spPr>
-      </p:sp>
-      <p:pic>
-        <p:nvPicPr>
-          <p:cNvPr id="10" name="Image 1" descr="preencoded.png">    </p:cNvPr>
-          <p:cNvPicPr>
-            <a:picLocks noChangeAspect="1"/>
-          </p:cNvPicPr>
-          <p:nvPr/>
-        </p:nvPicPr>
-        <p:blipFill>
-          <a:blip r:embed="rId2"/>
-          <a:stretch>
-            <a:fillRect/>
-          </a:stretch>
-        </p:blipFill>
-        <p:spPr>
-          <a:xfrm>
-            <a:off x="5029200" y="1234440"/>
-            <a:ext cx="347472" cy="347472"/>
-          </a:xfrm>
-          <a:prstGeom prst="rect">
-            <a:avLst/>
-          </a:prstGeom>
-        </p:spPr>
-      </p:pic>
-      <p:sp>
-        <p:nvSpPr>
-          <p:cNvPr id="11" name="Text 7"/>
-          <p:cNvSpPr/>
-          <p:nvPr/>
-        </p:nvSpPr>
-        <p:spPr>
-          <a:xfrm>
-            <a:off x="5532120" y="1161288"/>
-            <a:ext cx="1371600" cy="365760"/>
-          </a:xfrm>
-          <a:prstGeom prst="rect">
-            <a:avLst/>
-          </a:prstGeom>
-          <a:noFill/>
-          <a:ln/>
-        </p:spPr>
-        <p:txBody>
-          <a:bodyPr wrap="square" lIns="0" tIns="0" rIns="0" bIns="0" rtlCol="0" anchor="ctr"/>
-          <a:lstStyle/>
-          <a:p>
-            <a:pPr indent="0" marL="0">
-              <a:buNone/>
-            </a:pPr>
-            <a:r>
-              <a:rPr lang="en-US" sz="2600" b="1" dirty="0">
-                <a:solidFill>
-                  <a:srgbClr val="02C39A"/>
-                </a:solidFill>
-                <a:latin typeface="Trebuchet MS" pitchFamily="34" charset="0"/>
-                <a:ea typeface="Trebuchet MS" pitchFamily="34" charset="-122"/>
-                <a:cs typeface="Trebuchet MS" pitchFamily="34" charset="-120"/>
-              </a:rPr>
-              <a:t>Local</a:t>
-            </a:r>
-            <a:endParaRPr lang="en-US" sz="2600" dirty="0"/>
-          </a:p>
-        </p:txBody>
-      </p:sp>
-      <p:sp>
-        <p:nvSpPr>
-          <p:cNvPr id="12" name="Text 8"/>
-          <p:cNvSpPr/>
-          <p:nvPr/>
-        </p:nvSpPr>
-        <p:spPr>
-          <a:xfrm>
-            <a:off x="6812280" y="1188720"/>
-            <a:ext cx="1737360" cy="365760"/>
-          </a:xfrm>
-          <a:prstGeom prst="rect">
-            <a:avLst/>
-          </a:prstGeom>
-          <a:noFill/>
-          <a:ln/>
-        </p:spPr>
-        <p:txBody>
-          <a:bodyPr wrap="square" lIns="0" tIns="0" rIns="0" bIns="0" rtlCol="0" anchor="ctr"/>
-          <a:lstStyle/>
-          <a:p>
-            <a:pPr indent="0" marL="0">
-              <a:buNone/>
-            </a:pPr>
-            <a:r>
-              <a:rPr lang="en-US" sz="1100" b="1" dirty="0">
-                <a:solidFill>
-                  <a:srgbClr val="FFFFFF"/>
-                </a:solidFill>
-                <a:latin typeface="Trebuchet MS" pitchFamily="34" charset="0"/>
-                <a:ea typeface="Trebuchet MS" pitchFamily="34" charset="-122"/>
-                <a:cs typeface="Trebuchet MS" pitchFamily="34" charset="-120"/>
-              </a:rPr>
-              <a:t>On-prem deployment</a:t>
-            </a:r>
-            <a:endParaRPr lang="en-US" sz="1100" dirty="0"/>
-          </a:p>
-        </p:txBody>
-      </p:sp>
-      <p:sp>
-        <p:nvSpPr>
-          <p:cNvPr id="13" name="Text 9"/>
-          <p:cNvSpPr/>
-          <p:nvPr/>
-        </p:nvSpPr>
-        <p:spPr>
-          <a:xfrm>
-            <a:off x="5029200" y="1691640"/>
-            <a:ext cx="3520440" cy="457200"/>
-          </a:xfrm>
-          <a:prstGeom prst="rect">
-            <a:avLst/>
-          </a:prstGeom>
-          <a:noFill/>
-          <a:ln/>
-        </p:spPr>
-        <p:txBody>
-          <a:bodyPr wrap="square" lIns="0" tIns="0" rIns="0" bIns="0" rtlCol="0" anchor="ctr"/>
-          <a:lstStyle/>
-          <a:p>
-            <a:pPr indent="0" marL="0">
-              <a:buNone/>
-            </a:pPr>
-            <a:r>
-              <a:rPr lang="en-US" sz="1000" dirty="0">
-                <a:solidFill>
-                  <a:srgbClr val="8A9BB0"/>
-                </a:solidFill>
-                <a:latin typeface="Calibri" pitchFamily="34" charset="0"/>
-                <a:ea typeface="Calibri" pitchFamily="34" charset="-122"/>
-                <a:cs typeface="Calibri" pitchFamily="34" charset="-120"/>
-              </a:rPr>
-              <a:t>Core pipeline runs fully offline — data stays in-house. AI repair optionally calls Claude API</a:t>
-            </a:r>
-            <a:endParaRPr lang="en-US" sz="1000" dirty="0"/>
-          </a:p>
-        </p:txBody>
-      </p:sp>
-      <p:sp>
-        <p:nvSpPr>
-          <p:cNvPr id="14" name="Shape 10"/>
-          <p:cNvSpPr/>
-          <p:nvPr/>
-        </p:nvSpPr>
-        <p:spPr>
-          <a:xfrm>
-            <a:off x="548640" y="2468880"/>
-            <a:ext cx="3977640" cy="1234440"/>
-          </a:xfrm>
-          <a:prstGeom prst="rect">
-            <a:avLst/>
-          </a:prstGeom>
-          <a:solidFill>
-            <a:srgbClr val="132B42"/>
-          </a:solidFill>
-          <a:ln/>
-          <a:effectLst>
-            <a:outerShdw sx="100000" sy="100000" kx="0" ky="0" algn="bl" rotWithShape="0" blurRad="101600" dist="38100" dir="8100000">
-              <a:srgbClr val="000000">
-                <a:alpha val="25000"/>
-              </a:srgbClr>
-            </a:outerShdw>
-          </a:effectLst>
-        </p:spPr>
-      </p:sp>
-      <p:pic>
-        <p:nvPicPr>
-          <p:cNvPr id="15" name="Image 2" descr="preencoded.png">    </p:cNvPr>
+          <p:cNvPr id="5" name="Image 0" descr="preencoded.png"/>
           <p:cNvPicPr>
             <a:picLocks noChangeAspect="1"/>
           </p:cNvPicPr>
@@ -9833,7 +9624,7 @@
         </p:blipFill>
         <p:spPr>
           <a:xfrm>
-            <a:off x="777240" y="2651760"/>
+            <a:off x="777240" y="1234440"/>
             <a:ext cx="347472" cy="347472"/>
           </a:xfrm>
           <a:prstGeom prst="rect">
@@ -9843,13 +9634,13 @@
       </p:pic>
       <p:sp>
         <p:nvSpPr>
-          <p:cNvPr id="16" name="Text 11"/>
-          <p:cNvSpPr/>
-          <p:nvPr/>
-        </p:nvSpPr>
-        <p:spPr>
-          <a:xfrm>
-            <a:off x="1280160" y="2578608"/>
+          <p:cNvPr id="6" name="Text 3"/>
+          <p:cNvSpPr/>
+          <p:nvPr/>
+        </p:nvSpPr>
+        <p:spPr>
+          <a:xfrm>
+            <a:off x="1280160" y="1161288"/>
             <a:ext cx="1371600" cy="365760"/>
           </a:xfrm>
           <a:prstGeom prst="rect">
@@ -9862,7 +9653,7 @@
           <a:bodyPr wrap="square" lIns="0" tIns="0" rIns="0" bIns="0" rtlCol="0" anchor="ctr"/>
           <a:lstStyle/>
           <a:p>
-            <a:pPr indent="0" marL="0">
+            <a:pPr marL="0" indent="0">
               <a:buNone/>
             </a:pPr>
             <a:r>
@@ -9874,7 +9665,7 @@
                 <a:ea typeface="Trebuchet MS" pitchFamily="34" charset="-122"/>
                 <a:cs typeface="Trebuchet MS" pitchFamily="34" charset="-120"/>
               </a:rPr>
-              <a:t>AI+ML</a:t>
+              <a:t>Mins</a:t>
             </a:r>
             <a:endParaRPr lang="en-US" sz="2600" dirty="0"/>
           </a:p>
@@ -9882,13 +9673,13 @@
       </p:sp>
       <p:sp>
         <p:nvSpPr>
-          <p:cNvPr id="17" name="Text 12"/>
-          <p:cNvSpPr/>
-          <p:nvPr/>
-        </p:nvSpPr>
-        <p:spPr>
-          <a:xfrm>
-            <a:off x="2560320" y="2606040"/>
+          <p:cNvPr id="7" name="Text 4"/>
+          <p:cNvSpPr/>
+          <p:nvPr/>
+        </p:nvSpPr>
+        <p:spPr>
+          <a:xfrm>
+            <a:off x="2560320" y="1188720"/>
             <a:ext cx="1737360" cy="365760"/>
           </a:xfrm>
           <a:prstGeom prst="rect">
@@ -9901,7 +9692,7 @@
           <a:bodyPr wrap="square" lIns="0" tIns="0" rIns="0" bIns="0" rtlCol="0" anchor="ctr"/>
           <a:lstStyle/>
           <a:p>
-            <a:pPr indent="0" marL="0">
+            <a:pPr marL="0" indent="0">
               <a:buNone/>
             </a:pPr>
             <a:r>
@@ -9913,7 +9704,7 @@
                 <a:ea typeface="Trebuchet MS" pitchFamily="34" charset="-122"/>
                 <a:cs typeface="Trebuchet MS" pitchFamily="34" charset="-120"/>
               </a:rPr>
-              <a:t>Dual intelligence layer</a:t>
+              <a:t>vs. weeks of manual work</a:t>
             </a:r>
             <a:endParaRPr lang="en-US" sz="1100" dirty="0"/>
           </a:p>
@@ -9921,13 +9712,13 @@
       </p:sp>
       <p:sp>
         <p:nvSpPr>
-          <p:cNvPr id="18" name="Text 13"/>
-          <p:cNvSpPr/>
-          <p:nvPr/>
-        </p:nvSpPr>
-        <p:spPr>
-          <a:xfrm>
-            <a:off x="777240" y="3108960"/>
+          <p:cNvPr id="8" name="Text 5"/>
+          <p:cNvSpPr/>
+          <p:nvPr/>
+        </p:nvSpPr>
+        <p:spPr>
+          <a:xfrm>
+            <a:off x="777240" y="1691640"/>
             <a:ext cx="3520440" cy="457200"/>
           </a:xfrm>
           <a:prstGeom prst="rect">
@@ -9940,7 +9731,7 @@
           <a:bodyPr wrap="square" lIns="0" tIns="0" rIns="0" bIns="0" rtlCol="0" anchor="ctr"/>
           <a:lstStyle/>
           <a:p>
-            <a:pPr indent="0" marL="0">
+            <a:pPr marL="0" indent="0">
               <a:buNone/>
             </a:pPr>
             <a:r>
@@ -9952,7 +9743,7 @@
                 <a:ea typeface="Calibri" pitchFamily="34" charset="-122"/>
                 <a:cs typeface="Calibri" pitchFamily="34" charset="-120"/>
               </a:rPr>
-              <a:t>Isolation Forest for anomaly detection + Claude for context-aware data repair</a:t>
+              <a:t>Fully automated ingestion, normalization &amp; AI repair — what took days now runs in minutes</a:t>
             </a:r>
             <a:endParaRPr lang="en-US" sz="1000" dirty="0"/>
           </a:p>
@@ -9960,13 +9751,13 @@
       </p:sp>
       <p:sp>
         <p:nvSpPr>
-          <p:cNvPr id="19" name="Shape 14"/>
-          <p:cNvSpPr/>
-          <p:nvPr/>
-        </p:nvSpPr>
-        <p:spPr>
-          <a:xfrm>
-            <a:off x="4800600" y="2468880"/>
+          <p:cNvPr id="9" name="Shape 6"/>
+          <p:cNvSpPr/>
+          <p:nvPr/>
+        </p:nvSpPr>
+        <p:spPr>
+          <a:xfrm>
+            <a:off x="4800600" y="1051560"/>
             <a:ext cx="3977640" cy="1234440"/>
           </a:xfrm>
           <a:prstGeom prst="rect">
@@ -9977,17 +9768,24 @@
           </a:solidFill>
           <a:ln/>
           <a:effectLst>
-            <a:outerShdw sx="100000" sy="100000" kx="0" ky="0" algn="bl" rotWithShape="0" blurRad="101600" dist="38100" dir="8100000">
+            <a:outerShdw blurRad="101600" dist="38100" dir="8100000" algn="bl" rotWithShape="0">
               <a:srgbClr val="000000">
                 <a:alpha val="25000"/>
               </a:srgbClr>
             </a:outerShdw>
           </a:effectLst>
         </p:spPr>
+        <p:txBody>
+          <a:bodyPr/>
+          <a:lstStyle/>
+          <a:p>
+            <a:endParaRPr lang="en-US"/>
+          </a:p>
+        </p:txBody>
       </p:sp>
       <p:pic>
         <p:nvPicPr>
-          <p:cNvPr id="20" name="Image 3" descr="preencoded.png">    </p:cNvPr>
+          <p:cNvPr id="10" name="Image 1" descr="preencoded.png"/>
           <p:cNvPicPr>
             <a:picLocks noChangeAspect="1"/>
           </p:cNvPicPr>
@@ -10001,7 +9799,7 @@
         </p:blipFill>
         <p:spPr>
           <a:xfrm>
-            <a:off x="5029200" y="2651760"/>
+            <a:off x="5029200" y="1234440"/>
             <a:ext cx="347472" cy="347472"/>
           </a:xfrm>
           <a:prstGeom prst="rect">
@@ -10011,13 +9809,13 @@
       </p:pic>
       <p:sp>
         <p:nvSpPr>
-          <p:cNvPr id="21" name="Text 15"/>
-          <p:cNvSpPr/>
-          <p:nvPr/>
-        </p:nvSpPr>
-        <p:spPr>
-          <a:xfrm>
-            <a:off x="5532120" y="2578608"/>
+          <p:cNvPr id="11" name="Text 7"/>
+          <p:cNvSpPr/>
+          <p:nvPr/>
+        </p:nvSpPr>
+        <p:spPr>
+          <a:xfrm>
+            <a:off x="5532120" y="1161288"/>
             <a:ext cx="1371600" cy="365760"/>
           </a:xfrm>
           <a:prstGeom prst="rect">
@@ -10030,7 +9828,7 @@
           <a:bodyPr wrap="square" lIns="0" tIns="0" rIns="0" bIns="0" rtlCol="0" anchor="ctr"/>
           <a:lstStyle/>
           <a:p>
-            <a:pPr indent="0" marL="0">
+            <a:pPr marL="0" indent="0">
               <a:buNone/>
             </a:pPr>
             <a:r>
@@ -10042,7 +9840,7 @@
                 <a:ea typeface="Trebuchet MS" pitchFamily="34" charset="-122"/>
                 <a:cs typeface="Trebuchet MS" pitchFamily="34" charset="-120"/>
               </a:rPr>
-              <a:t>7→1</a:t>
+              <a:t>Local</a:t>
             </a:r>
             <a:endParaRPr lang="en-US" sz="2600" dirty="0"/>
           </a:p>
@@ -10050,13 +9848,13 @@
       </p:sp>
       <p:sp>
         <p:nvSpPr>
-          <p:cNvPr id="22" name="Text 16"/>
-          <p:cNvSpPr/>
-          <p:nvPr/>
-        </p:nvSpPr>
-        <p:spPr>
-          <a:xfrm>
-            <a:off x="6812280" y="2606040"/>
+          <p:cNvPr id="12" name="Text 8"/>
+          <p:cNvSpPr/>
+          <p:nvPr/>
+        </p:nvSpPr>
+        <p:spPr>
+          <a:xfrm>
+            <a:off x="6812280" y="1188720"/>
             <a:ext cx="1737360" cy="365760"/>
           </a:xfrm>
           <a:prstGeom prst="rect">
@@ -10069,7 +9867,7 @@
           <a:bodyPr wrap="square" lIns="0" tIns="0" rIns="0" bIns="0" rtlCol="0" anchor="ctr"/>
           <a:lstStyle/>
           <a:p>
-            <a:pPr indent="0" marL="0">
+            <a:pPr marL="0" indent="0">
               <a:buNone/>
             </a:pPr>
             <a:r>
@@ -10081,7 +9879,7 @@
                 <a:ea typeface="Trebuchet MS" pitchFamily="34" charset="-122"/>
                 <a:cs typeface="Trebuchet MS" pitchFamily="34" charset="-120"/>
               </a:rPr>
-              <a:t>Unified data model</a:t>
+              <a:t>On-prem deployment</a:t>
             </a:r>
             <a:endParaRPr lang="en-US" sz="1100" dirty="0"/>
           </a:p>
@@ -10089,13 +9887,13 @@
       </p:sp>
       <p:sp>
         <p:nvSpPr>
-          <p:cNvPr id="23" name="Text 17"/>
-          <p:cNvSpPr/>
-          <p:nvPr/>
-        </p:nvSpPr>
-        <p:spPr>
-          <a:xfrm>
-            <a:off x="5029200" y="3108960"/>
+          <p:cNvPr id="13" name="Text 9"/>
+          <p:cNvSpPr/>
+          <p:nvPr/>
+        </p:nvSpPr>
+        <p:spPr>
+          <a:xfrm>
+            <a:off x="5029200" y="1691640"/>
             <a:ext cx="3520440" cy="457200"/>
           </a:xfrm>
           <a:prstGeom prst="rect">
@@ -10108,7 +9906,7 @@
           <a:bodyPr wrap="square" lIns="0" tIns="0" rIns="0" bIns="0" rtlCol="0" anchor="ctr"/>
           <a:lstStyle/>
           <a:p>
-            <a:pPr indent="0" marL="0">
+            <a:pPr marL="0" indent="0">
               <a:buNone/>
             </a:pPr>
             <a:r>
@@ -10120,6 +9918,356 @@
                 <a:ea typeface="Calibri" pitchFamily="34" charset="-122"/>
                 <a:cs typeface="Calibri" pitchFamily="34" charset="-120"/>
               </a:rPr>
+              <a:t>Core pipeline runs fully offline — data stays in-house. AI repair optionally calls Claude API</a:t>
+            </a:r>
+            <a:endParaRPr lang="en-US" sz="1000" dirty="0"/>
+          </a:p>
+        </p:txBody>
+      </p:sp>
+      <p:sp>
+        <p:nvSpPr>
+          <p:cNvPr id="14" name="Shape 10"/>
+          <p:cNvSpPr/>
+          <p:nvPr/>
+        </p:nvSpPr>
+        <p:spPr>
+          <a:xfrm>
+            <a:off x="548640" y="2468880"/>
+            <a:ext cx="3977640" cy="1234440"/>
+          </a:xfrm>
+          <a:prstGeom prst="rect">
+            <a:avLst/>
+          </a:prstGeom>
+          <a:solidFill>
+            <a:srgbClr val="132B42"/>
+          </a:solidFill>
+          <a:ln/>
+          <a:effectLst>
+            <a:outerShdw blurRad="101600" dist="38100" dir="8100000" algn="bl" rotWithShape="0">
+              <a:srgbClr val="000000">
+                <a:alpha val="25000"/>
+              </a:srgbClr>
+            </a:outerShdw>
+          </a:effectLst>
+        </p:spPr>
+        <p:txBody>
+          <a:bodyPr/>
+          <a:lstStyle/>
+          <a:p>
+            <a:endParaRPr lang="en-US"/>
+          </a:p>
+        </p:txBody>
+      </p:sp>
+      <p:pic>
+        <p:nvPicPr>
+          <p:cNvPr id="15" name="Image 2" descr="preencoded.png"/>
+          <p:cNvPicPr>
+            <a:picLocks noChangeAspect="1"/>
+          </p:cNvPicPr>
+          <p:nvPr/>
+        </p:nvPicPr>
+        <p:blipFill>
+          <a:blip r:embed="rId5"/>
+          <a:stretch>
+            <a:fillRect/>
+          </a:stretch>
+        </p:blipFill>
+        <p:spPr>
+          <a:xfrm>
+            <a:off x="777240" y="2651760"/>
+            <a:ext cx="347472" cy="347472"/>
+          </a:xfrm>
+          <a:prstGeom prst="rect">
+            <a:avLst/>
+          </a:prstGeom>
+        </p:spPr>
+      </p:pic>
+      <p:sp>
+        <p:nvSpPr>
+          <p:cNvPr id="16" name="Text 11"/>
+          <p:cNvSpPr/>
+          <p:nvPr/>
+        </p:nvSpPr>
+        <p:spPr>
+          <a:xfrm>
+            <a:off x="1280160" y="2578608"/>
+            <a:ext cx="1371600" cy="365760"/>
+          </a:xfrm>
+          <a:prstGeom prst="rect">
+            <a:avLst/>
+          </a:prstGeom>
+          <a:noFill/>
+          <a:ln/>
+        </p:spPr>
+        <p:txBody>
+          <a:bodyPr wrap="square" lIns="0" tIns="0" rIns="0" bIns="0" rtlCol="0" anchor="ctr"/>
+          <a:lstStyle/>
+          <a:p>
+            <a:pPr marL="0" indent="0">
+              <a:buNone/>
+            </a:pPr>
+            <a:r>
+              <a:rPr lang="en-US" sz="2600" b="1" dirty="0">
+                <a:solidFill>
+                  <a:srgbClr val="02C39A"/>
+                </a:solidFill>
+                <a:latin typeface="Trebuchet MS" pitchFamily="34" charset="0"/>
+                <a:ea typeface="Trebuchet MS" pitchFamily="34" charset="-122"/>
+                <a:cs typeface="Trebuchet MS" pitchFamily="34" charset="-120"/>
+              </a:rPr>
+              <a:t>AI+ML</a:t>
+            </a:r>
+            <a:endParaRPr lang="en-US" sz="2600" dirty="0"/>
+          </a:p>
+        </p:txBody>
+      </p:sp>
+      <p:sp>
+        <p:nvSpPr>
+          <p:cNvPr id="17" name="Text 12"/>
+          <p:cNvSpPr/>
+          <p:nvPr/>
+        </p:nvSpPr>
+        <p:spPr>
+          <a:xfrm>
+            <a:off x="2560320" y="2606040"/>
+            <a:ext cx="1737360" cy="365760"/>
+          </a:xfrm>
+          <a:prstGeom prst="rect">
+            <a:avLst/>
+          </a:prstGeom>
+          <a:noFill/>
+          <a:ln/>
+        </p:spPr>
+        <p:txBody>
+          <a:bodyPr wrap="square" lIns="0" tIns="0" rIns="0" bIns="0" rtlCol="0" anchor="ctr"/>
+          <a:lstStyle/>
+          <a:p>
+            <a:pPr marL="0" indent="0">
+              <a:buNone/>
+            </a:pPr>
+            <a:r>
+              <a:rPr lang="en-US" sz="1100" b="1" dirty="0">
+                <a:solidFill>
+                  <a:srgbClr val="FFFFFF"/>
+                </a:solidFill>
+                <a:latin typeface="Trebuchet MS" pitchFamily="34" charset="0"/>
+                <a:ea typeface="Trebuchet MS" pitchFamily="34" charset="-122"/>
+                <a:cs typeface="Trebuchet MS" pitchFamily="34" charset="-120"/>
+              </a:rPr>
+              <a:t>Dual intelligence layer</a:t>
+            </a:r>
+            <a:endParaRPr lang="en-US" sz="1100" dirty="0"/>
+          </a:p>
+        </p:txBody>
+      </p:sp>
+      <p:sp>
+        <p:nvSpPr>
+          <p:cNvPr id="18" name="Text 13"/>
+          <p:cNvSpPr/>
+          <p:nvPr/>
+        </p:nvSpPr>
+        <p:spPr>
+          <a:xfrm>
+            <a:off x="777240" y="3108960"/>
+            <a:ext cx="3520440" cy="457200"/>
+          </a:xfrm>
+          <a:prstGeom prst="rect">
+            <a:avLst/>
+          </a:prstGeom>
+          <a:noFill/>
+          <a:ln/>
+        </p:spPr>
+        <p:txBody>
+          <a:bodyPr wrap="square" lIns="0" tIns="0" rIns="0" bIns="0" rtlCol="0" anchor="ctr"/>
+          <a:lstStyle/>
+          <a:p>
+            <a:pPr marL="0" indent="0">
+              <a:buNone/>
+            </a:pPr>
+            <a:r>
+              <a:rPr lang="en-US" sz="1000" dirty="0">
+                <a:solidFill>
+                  <a:srgbClr val="8A9BB0"/>
+                </a:solidFill>
+                <a:latin typeface="Calibri" pitchFamily="34" charset="0"/>
+                <a:ea typeface="Calibri" pitchFamily="34" charset="-122"/>
+                <a:cs typeface="Calibri" pitchFamily="34" charset="-120"/>
+              </a:rPr>
+              <a:t>Isolation Forest for anomaly detection + Claude for context-aware data repair</a:t>
+            </a:r>
+            <a:endParaRPr lang="en-US" sz="1000" dirty="0"/>
+          </a:p>
+        </p:txBody>
+      </p:sp>
+      <p:sp>
+        <p:nvSpPr>
+          <p:cNvPr id="19" name="Shape 14"/>
+          <p:cNvSpPr/>
+          <p:nvPr/>
+        </p:nvSpPr>
+        <p:spPr>
+          <a:xfrm>
+            <a:off x="4800600" y="2468880"/>
+            <a:ext cx="3977640" cy="1234440"/>
+          </a:xfrm>
+          <a:prstGeom prst="rect">
+            <a:avLst/>
+          </a:prstGeom>
+          <a:solidFill>
+            <a:srgbClr val="132B42"/>
+          </a:solidFill>
+          <a:ln/>
+          <a:effectLst>
+            <a:outerShdw blurRad="101600" dist="38100" dir="8100000" algn="bl" rotWithShape="0">
+              <a:srgbClr val="000000">
+                <a:alpha val="25000"/>
+              </a:srgbClr>
+            </a:outerShdw>
+          </a:effectLst>
+        </p:spPr>
+        <p:txBody>
+          <a:bodyPr/>
+          <a:lstStyle/>
+          <a:p>
+            <a:endParaRPr lang="en-US"/>
+          </a:p>
+        </p:txBody>
+      </p:sp>
+      <p:pic>
+        <p:nvPicPr>
+          <p:cNvPr id="20" name="Image 3" descr="preencoded.png"/>
+          <p:cNvPicPr>
+            <a:picLocks noChangeAspect="1"/>
+          </p:cNvPicPr>
+          <p:nvPr/>
+        </p:nvPicPr>
+        <p:blipFill>
+          <a:blip r:embed="rId6"/>
+          <a:stretch>
+            <a:fillRect/>
+          </a:stretch>
+        </p:blipFill>
+        <p:spPr>
+          <a:xfrm>
+            <a:off x="5029200" y="2651760"/>
+            <a:ext cx="347472" cy="347472"/>
+          </a:xfrm>
+          <a:prstGeom prst="rect">
+            <a:avLst/>
+          </a:prstGeom>
+        </p:spPr>
+      </p:pic>
+      <p:sp>
+        <p:nvSpPr>
+          <p:cNvPr id="21" name="Text 15"/>
+          <p:cNvSpPr/>
+          <p:nvPr/>
+        </p:nvSpPr>
+        <p:spPr>
+          <a:xfrm>
+            <a:off x="5532120" y="2578608"/>
+            <a:ext cx="1371600" cy="365760"/>
+          </a:xfrm>
+          <a:prstGeom prst="rect">
+            <a:avLst/>
+          </a:prstGeom>
+          <a:noFill/>
+          <a:ln/>
+        </p:spPr>
+        <p:txBody>
+          <a:bodyPr wrap="square" lIns="0" tIns="0" rIns="0" bIns="0" rtlCol="0" anchor="ctr"/>
+          <a:lstStyle/>
+          <a:p>
+            <a:pPr marL="0" indent="0">
+              <a:buNone/>
+            </a:pPr>
+            <a:r>
+              <a:rPr lang="en-US" sz="2600" b="1" dirty="0">
+                <a:solidFill>
+                  <a:srgbClr val="02C39A"/>
+                </a:solidFill>
+                <a:latin typeface="Trebuchet MS" pitchFamily="34" charset="0"/>
+                <a:ea typeface="Trebuchet MS" pitchFamily="34" charset="-122"/>
+                <a:cs typeface="Trebuchet MS" pitchFamily="34" charset="-120"/>
+              </a:rPr>
+              <a:t>7→1</a:t>
+            </a:r>
+            <a:endParaRPr lang="en-US" sz="2600" dirty="0"/>
+          </a:p>
+        </p:txBody>
+      </p:sp>
+      <p:sp>
+        <p:nvSpPr>
+          <p:cNvPr id="22" name="Text 16"/>
+          <p:cNvSpPr/>
+          <p:nvPr/>
+        </p:nvSpPr>
+        <p:spPr>
+          <a:xfrm>
+            <a:off x="6812280" y="2606040"/>
+            <a:ext cx="1737360" cy="365760"/>
+          </a:xfrm>
+          <a:prstGeom prst="rect">
+            <a:avLst/>
+          </a:prstGeom>
+          <a:noFill/>
+          <a:ln/>
+        </p:spPr>
+        <p:txBody>
+          <a:bodyPr wrap="square" lIns="0" tIns="0" rIns="0" bIns="0" rtlCol="0" anchor="ctr"/>
+          <a:lstStyle/>
+          <a:p>
+            <a:pPr marL="0" indent="0">
+              <a:buNone/>
+            </a:pPr>
+            <a:r>
+              <a:rPr lang="en-US" sz="1100" b="1" dirty="0">
+                <a:solidFill>
+                  <a:srgbClr val="FFFFFF"/>
+                </a:solidFill>
+                <a:latin typeface="Trebuchet MS" pitchFamily="34" charset="0"/>
+                <a:ea typeface="Trebuchet MS" pitchFamily="34" charset="-122"/>
+                <a:cs typeface="Trebuchet MS" pitchFamily="34" charset="-120"/>
+              </a:rPr>
+              <a:t>Unified data model</a:t>
+            </a:r>
+            <a:endParaRPr lang="en-US" sz="1100" dirty="0"/>
+          </a:p>
+        </p:txBody>
+      </p:sp>
+      <p:sp>
+        <p:nvSpPr>
+          <p:cNvPr id="23" name="Text 17"/>
+          <p:cNvSpPr/>
+          <p:nvPr/>
+        </p:nvSpPr>
+        <p:spPr>
+          <a:xfrm>
+            <a:off x="5029200" y="3108960"/>
+            <a:ext cx="3520440" cy="457200"/>
+          </a:xfrm>
+          <a:prstGeom prst="rect">
+            <a:avLst/>
+          </a:prstGeom>
+          <a:noFill/>
+          <a:ln/>
+        </p:spPr>
+        <p:txBody>
+          <a:bodyPr wrap="square" lIns="0" tIns="0" rIns="0" bIns="0" rtlCol="0" anchor="ctr"/>
+          <a:lstStyle/>
+          <a:p>
+            <a:pPr marL="0" indent="0">
+              <a:buNone/>
+            </a:pPr>
+            <a:r>
+              <a:rPr lang="en-US" sz="1000" dirty="0">
+                <a:solidFill>
+                  <a:srgbClr val="8A9BB0"/>
+                </a:solidFill>
+                <a:latin typeface="Calibri" pitchFamily="34" charset="0"/>
+                <a:ea typeface="Calibri" pitchFamily="34" charset="-122"/>
+                <a:cs typeface="Calibri" pitchFamily="34" charset="-120"/>
+              </a:rPr>
               <a:t>Seven heterogeneous sources harmonized into a single queryable patient view</a:t>
             </a:r>
             <a:endParaRPr lang="en-US" sz="1000" dirty="0"/>
@@ -10145,6 +10293,13 @@
           </a:solidFill>
           <a:ln/>
         </p:spPr>
+        <p:txBody>
+          <a:bodyPr/>
+          <a:lstStyle/>
+          <a:p>
+            <a:endParaRPr lang="en-US"/>
+          </a:p>
+        </p:txBody>
       </p:sp>
       <p:sp>
         <p:nvSpPr>
@@ -10167,7 +10322,7 @@
           <a:bodyPr wrap="square" lIns="0" tIns="0" rIns="0" bIns="0" rtlCol="0" anchor="ctr"/>
           <a:lstStyle/>
           <a:p>
-            <a:pPr indent="0" marL="0">
+            <a:pPr marL="0" indent="0">
               <a:buNone/>
             </a:pPr>
             <a:r>
@@ -10181,9 +10336,6 @@
               </a:rPr>
               <a:t>MedMap: </a:t>
             </a:r>
-            <a:pPr indent="0" marL="0">
-              <a:buNone/>
-            </a:pPr>
             <a:r>
               <a:rPr lang="en-US" sz="1800" dirty="0">
                 <a:solidFill>
@@ -10500,4 +10652,319 @@
     </a:ext>
   </a:extLst>
 </a:theme>
+</file>
+
+<file path=ppt/theme/theme2.xml><?xml version="1.0" encoding="utf-8"?>
+<a:theme xmlns:a="http://schemas.openxmlformats.org/drawingml/2006/main" name="Office Theme">
+  <a:themeElements>
+    <a:clrScheme name="Office">
+      <a:dk1>
+        <a:sysClr val="windowText" lastClr="000000"/>
+      </a:dk1>
+      <a:lt1>
+        <a:sysClr val="window" lastClr="FFFFFF"/>
+      </a:lt1>
+      <a:dk2>
+        <a:srgbClr val="0E2841"/>
+      </a:dk2>
+      <a:lt2>
+        <a:srgbClr val="E8E8E8"/>
+      </a:lt2>
+      <a:accent1>
+        <a:srgbClr val="156082"/>
+      </a:accent1>
+      <a:accent2>
+        <a:srgbClr val="E97132"/>
+      </a:accent2>
+      <a:accent3>
+        <a:srgbClr val="196B24"/>
+      </a:accent3>
+      <a:accent4>
+        <a:srgbClr val="0F9ED5"/>
+      </a:accent4>
+      <a:accent5>
+        <a:srgbClr val="A02B93"/>
+      </a:accent5>
+      <a:accent6>
+        <a:srgbClr val="4EA72E"/>
+      </a:accent6>
+      <a:hlink>
+        <a:srgbClr val="467886"/>
+      </a:hlink>
+      <a:folHlink>
+        <a:srgbClr val="96607D"/>
+      </a:folHlink>
+    </a:clrScheme>
+    <a:fontScheme name="Office">
+      <a:majorFont>
+        <a:latin typeface="Aptos Display" panose="02110004020202020204"/>
+        <a:ea typeface=""/>
+        <a:cs typeface=""/>
+        <a:font script="Jpan" typeface="游ゴシック Light"/>
+        <a:font script="Hang" typeface="맑은 고딕"/>
+        <a:font script="Hans" typeface="等线 Light"/>
+        <a:font script="Hant" typeface="新細明體"/>
+        <a:font script="Arab" typeface="Times New Roman"/>
+        <a:font script="Hebr" typeface="Times New Roman"/>
+        <a:font script="Thai" typeface="Angsana New"/>
+        <a:font script="Ethi" typeface="Nyala"/>
+        <a:font script="Beng" typeface="Vrinda"/>
+        <a:font script="Gujr" typeface="Shruti"/>
+        <a:font script="Khmr" typeface="MoolBoran"/>
+        <a:font script="Knda" typeface="Tunga"/>
+        <a:font script="Guru" typeface="Raavi"/>
+        <a:font script="Cans" typeface="Euphemia"/>
+        <a:font script="Cher" typeface="Plantagenet Cherokee"/>
+        <a:font script="Yiii" typeface="Microsoft Yi Baiti"/>
+        <a:font script="Tibt" typeface="Microsoft Himalaya"/>
+        <a:font script="Thaa" typeface="MV Boli"/>
+        <a:font script="Deva" typeface="Mangal"/>
+        <a:font script="Telu" typeface="Gautami"/>
+        <a:font script="Taml" typeface="Latha"/>
+        <a:font script="Syrc" typeface="Estrangelo Edessa"/>
+        <a:font script="Orya" typeface="Kalinga"/>
+        <a:font script="Mlym" typeface="Kartika"/>
+        <a:font script="Laoo" typeface="DokChampa"/>
+        <a:font script="Sinh" typeface="Iskoola Pota"/>
+        <a:font script="Mong" typeface="Mongolian Baiti"/>
+        <a:font script="Viet" typeface="Times New Roman"/>
+        <a:font script="Uigh" typeface="Microsoft Uighur"/>
+        <a:font script="Geor" typeface="Sylfaen"/>
+        <a:font script="Armn" typeface="Arial"/>
+        <a:font script="Bugi" typeface="Leelawadee UI"/>
+        <a:font script="Bopo" typeface="Microsoft JhengHei"/>
+        <a:font script="Java" typeface="Javanese Text"/>
+        <a:font script="Lisu" typeface="Segoe UI"/>
+        <a:font script="Mymr" typeface="Myanmar Text"/>
+        <a:font script="Nkoo" typeface="Ebrima"/>
+        <a:font script="Olck" typeface="Nirmala UI"/>
+        <a:font script="Osma" typeface="Ebrima"/>
+        <a:font script="Phag" typeface="Phagspa"/>
+        <a:font script="Syrn" typeface="Estrangelo Edessa"/>
+        <a:font script="Syrj" typeface="Estrangelo Edessa"/>
+        <a:font script="Syre" typeface="Estrangelo Edessa"/>
+        <a:font script="Sora" typeface="Nirmala UI"/>
+        <a:font script="Tale" typeface="Microsoft Tai Le"/>
+        <a:font script="Talu" typeface="Microsoft New Tai Lue"/>
+        <a:font script="Tfng" typeface="Ebrima"/>
+      </a:majorFont>
+      <a:minorFont>
+        <a:latin typeface="Aptos" panose="02110004020202020204"/>
+        <a:ea typeface=""/>
+        <a:cs typeface=""/>
+        <a:font script="Jpan" typeface="游ゴシック"/>
+        <a:font script="Hang" typeface="맑은 고딕"/>
+        <a:font script="Hans" typeface="等线"/>
+        <a:font script="Hant" typeface="新細明體"/>
+        <a:font script="Arab" typeface="Arial"/>
+        <a:font script="Hebr" typeface="Arial"/>
+        <a:font script="Thai" typeface="Cordia New"/>
+        <a:font script="Ethi" typeface="Nyala"/>
+        <a:font script="Beng" typeface="Vrinda"/>
+        <a:font script="Gujr" typeface="Shruti"/>
+        <a:font script="Khmr" typeface="DaunPenh"/>
+        <a:font script="Knda" typeface="Tunga"/>
+        <a:font script="Guru" typeface="Raavi"/>
+        <a:font script="Cans" typeface="Euphemia"/>
+        <a:font script="Cher" typeface="Plantagenet Cherokee"/>
+        <a:font script="Yiii" typeface="Microsoft Yi Baiti"/>
+        <a:font script="Tibt" typeface="Microsoft Himalaya"/>
+        <a:font script="Thaa" typeface="MV Boli"/>
+        <a:font script="Deva" typeface="Mangal"/>
+        <a:font script="Telu" typeface="Gautami"/>
+        <a:font script="Taml" typeface="Latha"/>
+        <a:font script="Syrc" typeface="Estrangelo Edessa"/>
+        <a:font script="Orya" typeface="Kalinga"/>
+        <a:font script="Mlym" typeface="Kartika"/>
+        <a:font script="Laoo" typeface="DokChampa"/>
+        <a:font script="Sinh" typeface="Iskoola Pota"/>
+        <a:font script="Mong" typeface="Mongolian Baiti"/>
+        <a:font script="Viet" typeface="Arial"/>
+        <a:font script="Uigh" typeface="Microsoft Uighur"/>
+        <a:font script="Geor" typeface="Sylfaen"/>
+        <a:font script="Armn" typeface="Arial"/>
+        <a:font script="Bugi" typeface="Leelawadee UI"/>
+        <a:font script="Bopo" typeface="Microsoft JhengHei"/>
+        <a:font script="Java" typeface="Javanese Text"/>
+        <a:font script="Lisu" typeface="Segoe UI"/>
+        <a:font script="Mymr" typeface="Myanmar Text"/>
+        <a:font script="Nkoo" typeface="Ebrima"/>
+        <a:font script="Olck" typeface="Nirmala UI"/>
+        <a:font script="Osma" typeface="Ebrima"/>
+        <a:font script="Phag" typeface="Phagspa"/>
+        <a:font script="Syrn" typeface="Estrangelo Edessa"/>
+        <a:font script="Syrj" typeface="Estrangelo Edessa"/>
+        <a:font script="Syre" typeface="Estrangelo Edessa"/>
+        <a:font script="Sora" typeface="Nirmala UI"/>
+        <a:font script="Tale" typeface="Microsoft Tai Le"/>
+        <a:font script="Talu" typeface="Microsoft New Tai Lue"/>
+        <a:font script="Tfng" typeface="Ebrima"/>
+      </a:minorFont>
+    </a:fontScheme>
+    <a:fmtScheme name="Office">
+      <a:fillStyleLst>
+        <a:solidFill>
+          <a:schemeClr val="phClr"/>
+        </a:solidFill>
+        <a:gradFill rotWithShape="1">
+          <a:gsLst>
+            <a:gs pos="0">
+              <a:schemeClr val="phClr">
+                <a:lumMod val="110000"/>
+                <a:satMod val="105000"/>
+                <a:tint val="67000"/>
+              </a:schemeClr>
+            </a:gs>
+            <a:gs pos="50000">
+              <a:schemeClr val="phClr">
+                <a:lumMod val="105000"/>
+                <a:satMod val="103000"/>
+                <a:tint val="73000"/>
+              </a:schemeClr>
+            </a:gs>
+            <a:gs pos="100000">
+              <a:schemeClr val="phClr">
+                <a:lumMod val="105000"/>
+                <a:satMod val="109000"/>
+                <a:tint val="81000"/>
+              </a:schemeClr>
+            </a:gs>
+          </a:gsLst>
+          <a:lin ang="5400000" scaled="0"/>
+        </a:gradFill>
+        <a:gradFill rotWithShape="1">
+          <a:gsLst>
+            <a:gs pos="0">
+              <a:schemeClr val="phClr">
+                <a:satMod val="103000"/>
+                <a:lumMod val="102000"/>
+                <a:tint val="94000"/>
+              </a:schemeClr>
+            </a:gs>
+            <a:gs pos="50000">
+              <a:schemeClr val="phClr">
+                <a:satMod val="110000"/>
+                <a:lumMod val="100000"/>
+                <a:shade val="100000"/>
+              </a:schemeClr>
+            </a:gs>
+            <a:gs pos="100000">
+              <a:schemeClr val="phClr">
+                <a:lumMod val="99000"/>
+                <a:satMod val="120000"/>
+                <a:shade val="78000"/>
+              </a:schemeClr>
+            </a:gs>
+          </a:gsLst>
+          <a:lin ang="5400000" scaled="0"/>
+        </a:gradFill>
+      </a:fillStyleLst>
+      <a:lnStyleLst>
+        <a:ln w="12700" cap="flat" cmpd="sng" algn="ctr">
+          <a:solidFill>
+            <a:schemeClr val="phClr"/>
+          </a:solidFill>
+          <a:prstDash val="solid"/>
+          <a:miter lim="800000"/>
+        </a:ln>
+        <a:ln w="19050" cap="flat" cmpd="sng" algn="ctr">
+          <a:solidFill>
+            <a:schemeClr val="phClr"/>
+          </a:solidFill>
+          <a:prstDash val="solid"/>
+          <a:miter lim="800000"/>
+        </a:ln>
+        <a:ln w="25400" cap="flat" cmpd="sng" algn="ctr">
+          <a:solidFill>
+            <a:schemeClr val="phClr"/>
+          </a:solidFill>
+          <a:prstDash val="solid"/>
+          <a:miter lim="800000"/>
+        </a:ln>
+      </a:lnStyleLst>
+      <a:effectStyleLst>
+        <a:effectStyle>
+          <a:effectLst/>
+        </a:effectStyle>
+        <a:effectStyle>
+          <a:effectLst/>
+        </a:effectStyle>
+        <a:effectStyle>
+          <a:effectLst>
+            <a:outerShdw blurRad="57150" dist="19050" dir="5400000" algn="ctr" rotWithShape="0">
+              <a:srgbClr val="000000">
+                <a:alpha val="63000"/>
+              </a:srgbClr>
+            </a:outerShdw>
+          </a:effectLst>
+        </a:effectStyle>
+      </a:effectStyleLst>
+      <a:bgFillStyleLst>
+        <a:solidFill>
+          <a:schemeClr val="phClr"/>
+        </a:solidFill>
+        <a:solidFill>
+          <a:schemeClr val="phClr">
+            <a:tint val="95000"/>
+            <a:satMod val="170000"/>
+          </a:schemeClr>
+        </a:solidFill>
+        <a:gradFill rotWithShape="1">
+          <a:gsLst>
+            <a:gs pos="0">
+              <a:schemeClr val="phClr">
+                <a:tint val="93000"/>
+                <a:satMod val="150000"/>
+                <a:shade val="98000"/>
+                <a:lumMod val="102000"/>
+              </a:schemeClr>
+            </a:gs>
+            <a:gs pos="50000">
+              <a:schemeClr val="phClr">
+                <a:tint val="98000"/>
+                <a:satMod val="130000"/>
+                <a:shade val="90000"/>
+                <a:lumMod val="103000"/>
+              </a:schemeClr>
+            </a:gs>
+            <a:gs pos="100000">
+              <a:schemeClr val="phClr">
+                <a:shade val="63000"/>
+                <a:satMod val="120000"/>
+              </a:schemeClr>
+            </a:gs>
+          </a:gsLst>
+          <a:lin ang="5400000" scaled="0"/>
+        </a:gradFill>
+      </a:bgFillStyleLst>
+    </a:fmtScheme>
+  </a:themeElements>
+  <a:objectDefaults>
+    <a:lnDef>
+      <a:spPr/>
+      <a:bodyPr/>
+      <a:lstStyle/>
+      <a:style>
+        <a:lnRef idx="2">
+          <a:schemeClr val="accent1"/>
+        </a:lnRef>
+        <a:fillRef idx="0">
+          <a:schemeClr val="accent1"/>
+        </a:fillRef>
+        <a:effectRef idx="1">
+          <a:schemeClr val="accent1"/>
+        </a:effectRef>
+        <a:fontRef idx="minor">
+          <a:schemeClr val="tx1"/>
+        </a:fontRef>
+      </a:style>
+    </a:lnDef>
+  </a:objectDefaults>
+  <a:extraClrSchemeLst/>
+  <a:extLst>
+    <a:ext uri="{05A4C25C-085E-4340-85A3-A5531E510DB2}">
+      <thm15:themeFamily xmlns:thm15="http://schemas.microsoft.com/office/thememl/2012/main" name="Office Theme" id="{2E142A2C-CD16-42D6-873A-C26D2A0506FA}" vid="{1BDDFF52-6CD6-40A5-AB3C-68EB2F1E4D0A}"/>
+    </a:ext>
+  </a:extLst>
+</a:theme>
 </file>